--- a/analises_exploratorias/B7_raca/B7_raca.pptx
+++ b/analises_exploratorias/B7_raca/B7_raca.pptx
@@ -890,7 +890,7 @@
               <a:rPr lang="en-US" dirty="0"/>
               <a:t>O índice vai de 0 (o setor menos vulnerável do município) a 1 (o mais vulnerável). Comparar o nível do índice entre municípios não faz sentido nesta normalização; o que se compara é a posição relativa de cada setor dentro da sua cidade.
 Como ler: Descritivas do índice para o total e por região. Como o índice é normalizado dentro de cada município, todo município tem mínimo 0 e máximo 1.
-O que mostra: 73.879 setores; mediana 0,3037; percentil 90 0,4007.</a:t>
+O que mostra: 73.878 setores; mediana 0,3037; percentil 90 0,4007.</a:t>
             </a:r>
             <a:endParaRPr lang="en-US" dirty="0"/>
           </a:p>
@@ -1966,7 +1966,7 @@
               <a:rPr lang="en-US" dirty="0"/>
               <a:t>A faixa usada é a da regra do IVS-BH. Municípios pequenos tendem a aparecer no topo, porque poucas trocas pesam muito em poucos setores.
 Como ler: A primeira linha é o total; as demais, os municípios, do mais afetado para o menos: setores comuns, setores que mudam de faixa e o percentual.
-O que mostra: No total, 17,1% dos setores mudam de faixa; o município mais afetado é São Raimundo do Doca Bezerra (100,0%).</a:t>
+O que mostra: No total, 17,1% dos setores mudam de faixa; o município mais afetado é Água Preta (27,8%).</a:t>
             </a:r>
             <a:endParaRPr lang="en-US" dirty="0"/>
           </a:p>
@@ -2146,7 +2146,7 @@
               <a:rPr lang="en-US" dirty="0"/>
               <a:t>O gráfico destaca onde a escolha desta versão faz mais diferença. Na própria referência, todas as barras são zero.
 Como ler: Os 20 municípios com o maior percentual de setores que mudam de faixa.
-O que mostra: O mais afetado é São Raimundo do Doca Bezerra (100,0%); no total, 17,1%.</a:t>
+O que mostra: O mais afetado é Água Preta (27,8%); no total, 17,1%.</a:t>
             </a:r>
             <a:endParaRPr lang="en-US" dirty="0"/>
           </a:p>
@@ -2853,7 +2853,7 @@
               <a:rPr lang="en-US" dirty="0"/>
               <a:t>O KMO (Kaiser-Meyer-Olkin) compara as correlações entre as variáveis com as correlações parciais: perto de 1, as variáveis compartilham muita informação e a fatorial faz sentido; o critério do projeto é pelo menos 0,70. O teste de Bartlett verifica se a matriz de correlação é diferente da identidade (variáveis sem relação); com tantos setores, ele sempre rejeita. O critério de Kaiser retém fatores com autovalor acima de 1; a análise paralela de Horn, mais conservadora, retém os fatores cujo autovalor supera o que dados aleatórios do mesmo tamanho produziriam. A correlação usada é a de Spearman, como no NB04.
 Como ler: As medidas de adequação da matriz de correlação dos componentes do índice, na amostra do índice.
-O que mostra: KMO 0,7155, com 73.879 setores; Kaiser retém 2 fatores e Horn, 2; dois fatores explicam 60,0% da variância.</a:t>
+O que mostra: KMO 0,7155, com 73.879 setores; Kaiser retém 2 fatores e Horn, 2; 2 fatores explicam 60,0% da variância.</a:t>
             </a:r>
             <a:endParaRPr lang="en-US" dirty="0"/>
           </a:p>
@@ -6517,7 +6517,7 @@
                 <a:ea typeface="Cambria" pitchFamily="34" charset="-122"/>
                 <a:cs typeface="Cambria" pitchFamily="34" charset="-120"/>
               </a:rPr>
-              <a:t>O índice tem mediana 0,3037 e P90 0,4007, em 73.879 setores</a:t>
+              <a:t>O índice tem mediana 0,3037 e P90 0,4007, em 73.878 setores</a:t>
             </a:r>
             <a:endParaRPr lang="en-US" sz="2400" dirty="0"/>
           </a:p>
@@ -7015,7 +7015,7 @@
                           <a:ea typeface="Cambria" pitchFamily="34" charset="-122"/>
                           <a:cs typeface="Cambria" pitchFamily="34" charset="-120"/>
                         </a:rPr>
-                        <a:t>73.879</a:t>
+                        <a:t>73.878</a:t>
                       </a:r>
                       <a:endParaRPr lang="en-US" sz="1000" dirty="0">
                         <a:latin typeface="Cambria" charset="0"/>
@@ -7109,7 +7109,7 @@
                           <a:ea typeface="Cambria" pitchFamily="34" charset="-122"/>
                           <a:cs typeface="Cambria" pitchFamily="34" charset="-120"/>
                         </a:rPr>
-                        <a:t>0,0696</a:t>
+                        <a:t>0,0695</a:t>
                       </a:r>
                       <a:endParaRPr lang="en-US" sz="1000" dirty="0">
                         <a:latin typeface="Cambria" charset="0"/>
@@ -7677,7 +7677,7 @@
                           <a:ea typeface="Cambria" pitchFamily="34" charset="-122"/>
                           <a:cs typeface="Cambria" pitchFamily="34" charset="-120"/>
                         </a:rPr>
-                        <a:t>13.097</a:t>
+                        <a:t>13.096</a:t>
                       </a:r>
                       <a:endParaRPr lang="en-US" sz="1000" dirty="0">
                         <a:latin typeface="Cambria" charset="0"/>
@@ -7771,54 +7771,54 @@
                           <a:ea typeface="Cambria" pitchFamily="34" charset="-122"/>
                           <a:cs typeface="Cambria" pitchFamily="34" charset="-120"/>
                         </a:rPr>
-                        <a:t>0,0802</a:t>
-                      </a:r>
-                      <a:endParaRPr lang="en-US" sz="1000" dirty="0">
-                        <a:latin typeface="Cambria" charset="0"/>
-                        <a:ea typeface="Cambria" charset="0"/>
-                        <a:cs typeface="Cambria" charset="0"/>
-                      </a:endParaRPr>
-                    </a:p>
-                  </a:txBody>
-                  <a:tcPr marL="91440" marR="91440" marT="45720" marB="45720" anchor="ctr">
-                    <a:lnL w="0" cap="flat" cmpd="sng" algn="ctr">
-                      <a:noFill/>
-                    </a:lnL>
-                    <a:lnR w="0" cap="flat" cmpd="sng" algn="ctr">
-                      <a:noFill/>
-                    </a:lnR>
-                    <a:lnT w="0" cap="flat" cmpd="sng" algn="ctr">
-                      <a:noFill/>
-                    </a:lnT>
-                    <a:lnB w="6350" cap="flat" cmpd="sng" algn="ctr">
-                      <a:solidFill>
-                        <a:srgbClr val="E6E4DE"/>
-                      </a:solidFill>
-                      <a:prstDash val="solid"/>
-                      <a:round/>
-                      <a:headEnd type="none" w="med" len="med"/>
-                      <a:tailEnd type="none" w="med" len="med"/>
-                    </a:lnB>
-                  </a:tcPr>
-                </a:tc>
-                <a:tc>
-                  <a:txBody>
-                    <a:bodyPr/>
-                    <a:lstStyle/>
-                    <a:p>
-                      <a:pPr indent="0" marL="0">
-                        <a:buNone/>
-                      </a:pPr>
-                      <a:r>
-                        <a:rPr lang="en-US" sz="1000" dirty="0">
-                          <a:solidFill>
-                            <a:srgbClr val="1A1A18"/>
-                          </a:solidFill>
-                          <a:latin typeface="Cambria" pitchFamily="34" charset="0"/>
-                          <a:ea typeface="Cambria" pitchFamily="34" charset="-122"/>
-                          <a:cs typeface="Cambria" pitchFamily="34" charset="-120"/>
-                        </a:rPr>
-                        <a:t>0,2646</a:t>
+                        <a:t>0,0801</a:t>
+                      </a:r>
+                      <a:endParaRPr lang="en-US" sz="1000" dirty="0">
+                        <a:latin typeface="Cambria" charset="0"/>
+                        <a:ea typeface="Cambria" charset="0"/>
+                        <a:cs typeface="Cambria" charset="0"/>
+                      </a:endParaRPr>
+                    </a:p>
+                  </a:txBody>
+                  <a:tcPr marL="91440" marR="91440" marT="45720" marB="45720" anchor="ctr">
+                    <a:lnL w="0" cap="flat" cmpd="sng" algn="ctr">
+                      <a:noFill/>
+                    </a:lnL>
+                    <a:lnR w="0" cap="flat" cmpd="sng" algn="ctr">
+                      <a:noFill/>
+                    </a:lnR>
+                    <a:lnT w="0" cap="flat" cmpd="sng" algn="ctr">
+                      <a:noFill/>
+                    </a:lnT>
+                    <a:lnB w="6350" cap="flat" cmpd="sng" algn="ctr">
+                      <a:solidFill>
+                        <a:srgbClr val="E6E4DE"/>
+                      </a:solidFill>
+                      <a:prstDash val="solid"/>
+                      <a:round/>
+                      <a:headEnd type="none" w="med" len="med"/>
+                      <a:tailEnd type="none" w="med" len="med"/>
+                    </a:lnB>
+                  </a:tcPr>
+                </a:tc>
+                <a:tc>
+                  <a:txBody>
+                    <a:bodyPr/>
+                    <a:lstStyle/>
+                    <a:p>
+                      <a:pPr indent="0" marL="0">
+                        <a:buNone/>
+                      </a:pPr>
+                      <a:r>
+                        <a:rPr lang="en-US" sz="1000" dirty="0">
+                          <a:solidFill>
+                            <a:srgbClr val="1A1A18"/>
+                          </a:solidFill>
+                          <a:latin typeface="Cambria" pitchFamily="34" charset="0"/>
+                          <a:ea typeface="Cambria" pitchFamily="34" charset="-122"/>
+                          <a:cs typeface="Cambria" pitchFamily="34" charset="-120"/>
+                        </a:rPr>
+                        <a:t>0,2647</a:t>
                       </a:r>
                       <a:endParaRPr lang="en-US" sz="1000" dirty="0">
                         <a:latin typeface="Cambria" charset="0"/>
@@ -9075,7 +9075,7 @@
                 <a:ea typeface="Cambria" pitchFamily="34" charset="-122"/>
                 <a:cs typeface="Cambria" pitchFamily="34" charset="-120"/>
               </a:rPr>
-              <a:t>73.879 setores; mediana 0,3037; percentil 90 0,4007.</a:t>
+              <a:t>73.878 setores; mediana 0,3037; percentil 90 0,4007.</a:t>
             </a:r>
             <a:endParaRPr lang="en-US" sz="1250" dirty="0"/>
           </a:p>
@@ -10510,101 +10510,101 @@
                           <a:ea typeface="Cambria" pitchFamily="34" charset="-122"/>
                           <a:cs typeface="Cambria" pitchFamily="34" charset="-120"/>
                         </a:rPr>
-                        <a:t>baixo</a:t>
-                      </a:r>
-                      <a:endParaRPr lang="en-US" sz="1000" dirty="0">
-                        <a:latin typeface="Cambria" charset="0"/>
-                        <a:ea typeface="Cambria" charset="0"/>
-                        <a:cs typeface="Cambria" charset="0"/>
-                      </a:endParaRPr>
-                    </a:p>
-                  </a:txBody>
-                  <a:tcPr marL="91440" marR="91440" marT="45720" marB="45720" anchor="ctr">
-                    <a:lnL w="0" cap="flat" cmpd="sng" algn="ctr">
-                      <a:noFill/>
-                    </a:lnL>
-                    <a:lnR w="0" cap="flat" cmpd="sng" algn="ctr">
-                      <a:noFill/>
-                    </a:lnR>
-                    <a:lnT w="0" cap="flat" cmpd="sng" algn="ctr">
-                      <a:noFill/>
-                    </a:lnT>
-                    <a:lnB w="6350" cap="flat" cmpd="sng" algn="ctr">
-                      <a:solidFill>
-                        <a:srgbClr val="E6E4DE"/>
-                      </a:solidFill>
-                      <a:prstDash val="solid"/>
-                      <a:round/>
-                      <a:headEnd type="none" w="med" len="med"/>
-                      <a:tailEnd type="none" w="med" len="med"/>
-                    </a:lnB>
-                  </a:tcPr>
-                </a:tc>
-                <a:tc>
-                  <a:txBody>
-                    <a:bodyPr/>
-                    <a:lstStyle/>
-                    <a:p>
-                      <a:pPr indent="0" marL="0">
-                        <a:buNone/>
-                      </a:pPr>
-                      <a:r>
-                        <a:rPr lang="en-US" sz="1000" dirty="0">
-                          <a:solidFill>
-                            <a:srgbClr val="1A1A18"/>
-                          </a:solidFill>
-                          <a:latin typeface="Cambria" pitchFamily="34" charset="0"/>
-                          <a:ea typeface="Cambria" pitchFamily="34" charset="-122"/>
-                          <a:cs typeface="Cambria" pitchFamily="34" charset="-120"/>
-                        </a:rPr>
-                        <a:t>18.449</a:t>
-                      </a:r>
-                      <a:endParaRPr lang="en-US" sz="1000" dirty="0">
-                        <a:latin typeface="Cambria" charset="0"/>
-                        <a:ea typeface="Cambria" charset="0"/>
-                        <a:cs typeface="Cambria" charset="0"/>
-                      </a:endParaRPr>
-                    </a:p>
-                  </a:txBody>
-                  <a:tcPr marL="91440" marR="91440" marT="45720" marB="45720" anchor="ctr">
-                    <a:lnL w="0" cap="flat" cmpd="sng" algn="ctr">
-                      <a:noFill/>
-                    </a:lnL>
-                    <a:lnR w="0" cap="flat" cmpd="sng" algn="ctr">
-                      <a:noFill/>
-                    </a:lnR>
-                    <a:lnT w="0" cap="flat" cmpd="sng" algn="ctr">
-                      <a:noFill/>
-                    </a:lnT>
-                    <a:lnB w="6350" cap="flat" cmpd="sng" algn="ctr">
-                      <a:solidFill>
-                        <a:srgbClr val="E6E4DE"/>
-                      </a:solidFill>
-                      <a:prstDash val="solid"/>
-                      <a:round/>
-                      <a:headEnd type="none" w="med" len="med"/>
-                      <a:tailEnd type="none" w="med" len="med"/>
-                    </a:lnB>
-                  </a:tcPr>
-                </a:tc>
-                <a:tc>
-                  <a:txBody>
-                    <a:bodyPr/>
-                    <a:lstStyle/>
-                    <a:p>
-                      <a:pPr indent="0" marL="0">
-                        <a:buNone/>
-                      </a:pPr>
-                      <a:r>
-                        <a:rPr lang="en-US" sz="1000" dirty="0">
-                          <a:solidFill>
-                            <a:srgbClr val="1A1A18"/>
-                          </a:solidFill>
-                          <a:latin typeface="Cambria" pitchFamily="34" charset="0"/>
-                          <a:ea typeface="Cambria" pitchFamily="34" charset="-122"/>
-                          <a:cs typeface="Cambria" pitchFamily="34" charset="-120"/>
-                        </a:rPr>
-                        <a:t>25,0%</a:t>
+                        <a:t>indefinida</a:t>
+                      </a:r>
+                      <a:endParaRPr lang="en-US" sz="1000" dirty="0">
+                        <a:latin typeface="Cambria" charset="0"/>
+                        <a:ea typeface="Cambria" charset="0"/>
+                        <a:cs typeface="Cambria" charset="0"/>
+                      </a:endParaRPr>
+                    </a:p>
+                  </a:txBody>
+                  <a:tcPr marL="91440" marR="91440" marT="45720" marB="45720" anchor="ctr">
+                    <a:lnL w="0" cap="flat" cmpd="sng" algn="ctr">
+                      <a:noFill/>
+                    </a:lnL>
+                    <a:lnR w="0" cap="flat" cmpd="sng" algn="ctr">
+                      <a:noFill/>
+                    </a:lnR>
+                    <a:lnT w="0" cap="flat" cmpd="sng" algn="ctr">
+                      <a:noFill/>
+                    </a:lnT>
+                    <a:lnB w="6350" cap="flat" cmpd="sng" algn="ctr">
+                      <a:solidFill>
+                        <a:srgbClr val="E6E4DE"/>
+                      </a:solidFill>
+                      <a:prstDash val="solid"/>
+                      <a:round/>
+                      <a:headEnd type="none" w="med" len="med"/>
+                      <a:tailEnd type="none" w="med" len="med"/>
+                    </a:lnB>
+                  </a:tcPr>
+                </a:tc>
+                <a:tc>
+                  <a:txBody>
+                    <a:bodyPr/>
+                    <a:lstStyle/>
+                    <a:p>
+                      <a:pPr indent="0" marL="0">
+                        <a:buNone/>
+                      </a:pPr>
+                      <a:r>
+                        <a:rPr lang="en-US" sz="1000" dirty="0">
+                          <a:solidFill>
+                            <a:srgbClr val="1A1A18"/>
+                          </a:solidFill>
+                          <a:latin typeface="Cambria" pitchFamily="34" charset="0"/>
+                          <a:ea typeface="Cambria" pitchFamily="34" charset="-122"/>
+                          <a:cs typeface="Cambria" pitchFamily="34" charset="-120"/>
+                        </a:rPr>
+                        <a:t>1</a:t>
+                      </a:r>
+                      <a:endParaRPr lang="en-US" sz="1000" dirty="0">
+                        <a:latin typeface="Cambria" charset="0"/>
+                        <a:ea typeface="Cambria" charset="0"/>
+                        <a:cs typeface="Cambria" charset="0"/>
+                      </a:endParaRPr>
+                    </a:p>
+                  </a:txBody>
+                  <a:tcPr marL="91440" marR="91440" marT="45720" marB="45720" anchor="ctr">
+                    <a:lnL w="0" cap="flat" cmpd="sng" algn="ctr">
+                      <a:noFill/>
+                    </a:lnL>
+                    <a:lnR w="0" cap="flat" cmpd="sng" algn="ctr">
+                      <a:noFill/>
+                    </a:lnR>
+                    <a:lnT w="0" cap="flat" cmpd="sng" algn="ctr">
+                      <a:noFill/>
+                    </a:lnT>
+                    <a:lnB w="6350" cap="flat" cmpd="sng" algn="ctr">
+                      <a:solidFill>
+                        <a:srgbClr val="E6E4DE"/>
+                      </a:solidFill>
+                      <a:prstDash val="solid"/>
+                      <a:round/>
+                      <a:headEnd type="none" w="med" len="med"/>
+                      <a:tailEnd type="none" w="med" len="med"/>
+                    </a:lnB>
+                  </a:tcPr>
+                </a:tc>
+                <a:tc>
+                  <a:txBody>
+                    <a:bodyPr/>
+                    <a:lstStyle/>
+                    <a:p>
+                      <a:pPr indent="0" marL="0">
+                        <a:buNone/>
+                      </a:pPr>
+                      <a:r>
+                        <a:rPr lang="en-US" sz="1000" dirty="0">
+                          <a:solidFill>
+                            <a:srgbClr val="1A1A18"/>
+                          </a:solidFill>
+                          <a:latin typeface="Cambria" pitchFamily="34" charset="0"/>
+                          <a:ea typeface="Cambria" pitchFamily="34" charset="-122"/>
+                          <a:cs typeface="Cambria" pitchFamily="34" charset="-120"/>
+                        </a:rPr>
+                        <a:t>0,0%</a:t>
                       </a:r>
                       <a:endParaRPr lang="en-US" sz="1000" dirty="0">
                         <a:latin typeface="Cambria" charset="0"/>
@@ -10700,54 +10700,54 @@
                           <a:ea typeface="Cambria" pitchFamily="34" charset="-122"/>
                           <a:cs typeface="Cambria" pitchFamily="34" charset="-120"/>
                         </a:rPr>
-                        <a:t>médio</a:t>
-                      </a:r>
-                      <a:endParaRPr lang="en-US" sz="1000" dirty="0">
-                        <a:latin typeface="Cambria" charset="0"/>
-                        <a:ea typeface="Cambria" charset="0"/>
-                        <a:cs typeface="Cambria" charset="0"/>
-                      </a:endParaRPr>
-                    </a:p>
-                  </a:txBody>
-                  <a:tcPr marL="91440" marR="91440" marT="45720" marB="45720" anchor="ctr">
-                    <a:lnL w="0" cap="flat" cmpd="sng" algn="ctr">
-                      <a:noFill/>
-                    </a:lnL>
-                    <a:lnR w="0" cap="flat" cmpd="sng" algn="ctr">
-                      <a:noFill/>
-                    </a:lnR>
-                    <a:lnT w="0" cap="flat" cmpd="sng" algn="ctr">
-                      <a:noFill/>
-                    </a:lnT>
-                    <a:lnB w="6350" cap="flat" cmpd="sng" algn="ctr">
-                      <a:solidFill>
-                        <a:srgbClr val="E6E4DE"/>
-                      </a:solidFill>
-                      <a:prstDash val="solid"/>
-                      <a:round/>
-                      <a:headEnd type="none" w="med" len="med"/>
-                      <a:tailEnd type="none" w="med" len="med"/>
-                    </a:lnB>
-                  </a:tcPr>
-                </a:tc>
-                <a:tc>
-                  <a:txBody>
-                    <a:bodyPr/>
-                    <a:lstStyle/>
-                    <a:p>
-                      <a:pPr indent="0" marL="0">
-                        <a:buNone/>
-                      </a:pPr>
-                      <a:r>
-                        <a:rPr lang="en-US" sz="1000" dirty="0">
-                          <a:solidFill>
-                            <a:srgbClr val="1A1A18"/>
-                          </a:solidFill>
-                          <a:latin typeface="Cambria" pitchFamily="34" charset="0"/>
-                          <a:ea typeface="Cambria" pitchFamily="34" charset="-122"/>
-                          <a:cs typeface="Cambria" pitchFamily="34" charset="-120"/>
-                        </a:rPr>
-                        <a:t>18.473</a:t>
+                        <a:t>baixo</a:t>
+                      </a:r>
+                      <a:endParaRPr lang="en-US" sz="1000" dirty="0">
+                        <a:latin typeface="Cambria" charset="0"/>
+                        <a:ea typeface="Cambria" charset="0"/>
+                        <a:cs typeface="Cambria" charset="0"/>
+                      </a:endParaRPr>
+                    </a:p>
+                  </a:txBody>
+                  <a:tcPr marL="91440" marR="91440" marT="45720" marB="45720" anchor="ctr">
+                    <a:lnL w="0" cap="flat" cmpd="sng" algn="ctr">
+                      <a:noFill/>
+                    </a:lnL>
+                    <a:lnR w="0" cap="flat" cmpd="sng" algn="ctr">
+                      <a:noFill/>
+                    </a:lnR>
+                    <a:lnT w="0" cap="flat" cmpd="sng" algn="ctr">
+                      <a:noFill/>
+                    </a:lnT>
+                    <a:lnB w="6350" cap="flat" cmpd="sng" algn="ctr">
+                      <a:solidFill>
+                        <a:srgbClr val="E6E4DE"/>
+                      </a:solidFill>
+                      <a:prstDash val="solid"/>
+                      <a:round/>
+                      <a:headEnd type="none" w="med" len="med"/>
+                      <a:tailEnd type="none" w="med" len="med"/>
+                    </a:lnB>
+                  </a:tcPr>
+                </a:tc>
+                <a:tc>
+                  <a:txBody>
+                    <a:bodyPr/>
+                    <a:lstStyle/>
+                    <a:p>
+                      <a:pPr indent="0" marL="0">
+                        <a:buNone/>
+                      </a:pPr>
+                      <a:r>
+                        <a:rPr lang="en-US" sz="1000" dirty="0">
+                          <a:solidFill>
+                            <a:srgbClr val="1A1A18"/>
+                          </a:solidFill>
+                          <a:latin typeface="Cambria" pitchFamily="34" charset="0"/>
+                          <a:ea typeface="Cambria" pitchFamily="34" charset="-122"/>
+                          <a:cs typeface="Cambria" pitchFamily="34" charset="-120"/>
+                        </a:rPr>
+                        <a:t>18.449</a:t>
                       </a:r>
                       <a:endParaRPr lang="en-US" sz="1000" dirty="0">
                         <a:latin typeface="Cambria" charset="0"/>
@@ -10890,54 +10890,54 @@
                           <a:ea typeface="Cambria" pitchFamily="34" charset="-122"/>
                           <a:cs typeface="Cambria" pitchFamily="34" charset="-120"/>
                         </a:rPr>
-                        <a:t>elevado</a:t>
-                      </a:r>
-                      <a:endParaRPr lang="en-US" sz="1000" dirty="0">
-                        <a:latin typeface="Cambria" charset="0"/>
-                        <a:ea typeface="Cambria" charset="0"/>
-                        <a:cs typeface="Cambria" charset="0"/>
-                      </a:endParaRPr>
-                    </a:p>
-                  </a:txBody>
-                  <a:tcPr marL="91440" marR="91440" marT="45720" marB="45720" anchor="ctr">
-                    <a:lnL w="0" cap="flat" cmpd="sng" algn="ctr">
-                      <a:noFill/>
-                    </a:lnL>
-                    <a:lnR w="0" cap="flat" cmpd="sng" algn="ctr">
-                      <a:noFill/>
-                    </a:lnR>
-                    <a:lnT w="0" cap="flat" cmpd="sng" algn="ctr">
-                      <a:noFill/>
-                    </a:lnT>
-                    <a:lnB w="6350" cap="flat" cmpd="sng" algn="ctr">
-                      <a:solidFill>
-                        <a:srgbClr val="E6E4DE"/>
-                      </a:solidFill>
-                      <a:prstDash val="solid"/>
-                      <a:round/>
-                      <a:headEnd type="none" w="med" len="med"/>
-                      <a:tailEnd type="none" w="med" len="med"/>
-                    </a:lnB>
-                  </a:tcPr>
-                </a:tc>
-                <a:tc>
-                  <a:txBody>
-                    <a:bodyPr/>
-                    <a:lstStyle/>
-                    <a:p>
-                      <a:pPr indent="0" marL="0">
-                        <a:buNone/>
-                      </a:pPr>
-                      <a:r>
-                        <a:rPr lang="en-US" sz="1000" dirty="0">
-                          <a:solidFill>
-                            <a:srgbClr val="1A1A18"/>
-                          </a:solidFill>
-                          <a:latin typeface="Cambria" pitchFamily="34" charset="0"/>
-                          <a:ea typeface="Cambria" pitchFamily="34" charset="-122"/>
-                          <a:cs typeface="Cambria" pitchFamily="34" charset="-120"/>
-                        </a:rPr>
-                        <a:t>18.464</a:t>
+                        <a:t>médio</a:t>
+                      </a:r>
+                      <a:endParaRPr lang="en-US" sz="1000" dirty="0">
+                        <a:latin typeface="Cambria" charset="0"/>
+                        <a:ea typeface="Cambria" charset="0"/>
+                        <a:cs typeface="Cambria" charset="0"/>
+                      </a:endParaRPr>
+                    </a:p>
+                  </a:txBody>
+                  <a:tcPr marL="91440" marR="91440" marT="45720" marB="45720" anchor="ctr">
+                    <a:lnL w="0" cap="flat" cmpd="sng" algn="ctr">
+                      <a:noFill/>
+                    </a:lnL>
+                    <a:lnR w="0" cap="flat" cmpd="sng" algn="ctr">
+                      <a:noFill/>
+                    </a:lnR>
+                    <a:lnT w="0" cap="flat" cmpd="sng" algn="ctr">
+                      <a:noFill/>
+                    </a:lnT>
+                    <a:lnB w="6350" cap="flat" cmpd="sng" algn="ctr">
+                      <a:solidFill>
+                        <a:srgbClr val="E6E4DE"/>
+                      </a:solidFill>
+                      <a:prstDash val="solid"/>
+                      <a:round/>
+                      <a:headEnd type="none" w="med" len="med"/>
+                      <a:tailEnd type="none" w="med" len="med"/>
+                    </a:lnB>
+                  </a:tcPr>
+                </a:tc>
+                <a:tc>
+                  <a:txBody>
+                    <a:bodyPr/>
+                    <a:lstStyle/>
+                    <a:p>
+                      <a:pPr indent="0" marL="0">
+                        <a:buNone/>
+                      </a:pPr>
+                      <a:r>
+                        <a:rPr lang="en-US" sz="1000" dirty="0">
+                          <a:solidFill>
+                            <a:srgbClr val="1A1A18"/>
+                          </a:solidFill>
+                          <a:latin typeface="Cambria" pitchFamily="34" charset="0"/>
+                          <a:ea typeface="Cambria" pitchFamily="34" charset="-122"/>
+                          <a:cs typeface="Cambria" pitchFamily="34" charset="-120"/>
+                        </a:rPr>
+                        <a:t>18.473</a:t>
                       </a:r>
                       <a:endParaRPr lang="en-US" sz="1000" dirty="0">
                         <a:latin typeface="Cambria" charset="0"/>
@@ -11052,6 +11052,196 @@
                     <a:lnT w="0" cap="flat" cmpd="sng" algn="ctr">
                       <a:noFill/>
                     </a:lnT>
+                    <a:lnB w="6350" cap="flat" cmpd="sng" algn="ctr">
+                      <a:solidFill>
+                        <a:srgbClr val="E6E4DE"/>
+                      </a:solidFill>
+                      <a:prstDash val="solid"/>
+                      <a:round/>
+                      <a:headEnd type="none" w="med" len="med"/>
+                      <a:tailEnd type="none" w="med" len="med"/>
+                    </a:lnB>
+                  </a:tcPr>
+                </a:tc>
+                <a:tc>
+                  <a:txBody>
+                    <a:bodyPr/>
+                    <a:lstStyle/>
+                    <a:p>
+                      <a:pPr indent="0" marL="0">
+                        <a:buNone/>
+                      </a:pPr>
+                      <a:r>
+                        <a:rPr lang="en-US" sz="1000" dirty="0">
+                          <a:solidFill>
+                            <a:srgbClr val="1A1A18"/>
+                          </a:solidFill>
+                          <a:latin typeface="Cambria" pitchFamily="34" charset="0"/>
+                          <a:ea typeface="Cambria" pitchFamily="34" charset="-122"/>
+                          <a:cs typeface="Cambria" pitchFamily="34" charset="-120"/>
+                        </a:rPr>
+                        <a:t>elevado</a:t>
+                      </a:r>
+                      <a:endParaRPr lang="en-US" sz="1000" dirty="0">
+                        <a:latin typeface="Cambria" charset="0"/>
+                        <a:ea typeface="Cambria" charset="0"/>
+                        <a:cs typeface="Cambria" charset="0"/>
+                      </a:endParaRPr>
+                    </a:p>
+                  </a:txBody>
+                  <a:tcPr marL="91440" marR="91440" marT="45720" marB="45720" anchor="ctr">
+                    <a:lnL w="0" cap="flat" cmpd="sng" algn="ctr">
+                      <a:noFill/>
+                    </a:lnL>
+                    <a:lnR w="0" cap="flat" cmpd="sng" algn="ctr">
+                      <a:noFill/>
+                    </a:lnR>
+                    <a:lnT w="0" cap="flat" cmpd="sng" algn="ctr">
+                      <a:noFill/>
+                    </a:lnT>
+                    <a:lnB w="6350" cap="flat" cmpd="sng" algn="ctr">
+                      <a:solidFill>
+                        <a:srgbClr val="E6E4DE"/>
+                      </a:solidFill>
+                      <a:prstDash val="solid"/>
+                      <a:round/>
+                      <a:headEnd type="none" w="med" len="med"/>
+                      <a:tailEnd type="none" w="med" len="med"/>
+                    </a:lnB>
+                  </a:tcPr>
+                </a:tc>
+                <a:tc>
+                  <a:txBody>
+                    <a:bodyPr/>
+                    <a:lstStyle/>
+                    <a:p>
+                      <a:pPr indent="0" marL="0">
+                        <a:buNone/>
+                      </a:pPr>
+                      <a:r>
+                        <a:rPr lang="en-US" sz="1000" dirty="0">
+                          <a:solidFill>
+                            <a:srgbClr val="1A1A18"/>
+                          </a:solidFill>
+                          <a:latin typeface="Cambria" pitchFamily="34" charset="0"/>
+                          <a:ea typeface="Cambria" pitchFamily="34" charset="-122"/>
+                          <a:cs typeface="Cambria" pitchFamily="34" charset="-120"/>
+                        </a:rPr>
+                        <a:t>18.464</a:t>
+                      </a:r>
+                      <a:endParaRPr lang="en-US" sz="1000" dirty="0">
+                        <a:latin typeface="Cambria" charset="0"/>
+                        <a:ea typeface="Cambria" charset="0"/>
+                        <a:cs typeface="Cambria" charset="0"/>
+                      </a:endParaRPr>
+                    </a:p>
+                  </a:txBody>
+                  <a:tcPr marL="91440" marR="91440" marT="45720" marB="45720" anchor="ctr">
+                    <a:lnL w="0" cap="flat" cmpd="sng" algn="ctr">
+                      <a:noFill/>
+                    </a:lnL>
+                    <a:lnR w="0" cap="flat" cmpd="sng" algn="ctr">
+                      <a:noFill/>
+                    </a:lnR>
+                    <a:lnT w="0" cap="flat" cmpd="sng" algn="ctr">
+                      <a:noFill/>
+                    </a:lnT>
+                    <a:lnB w="6350" cap="flat" cmpd="sng" algn="ctr">
+                      <a:solidFill>
+                        <a:srgbClr val="E6E4DE"/>
+                      </a:solidFill>
+                      <a:prstDash val="solid"/>
+                      <a:round/>
+                      <a:headEnd type="none" w="med" len="med"/>
+                      <a:tailEnd type="none" w="med" len="med"/>
+                    </a:lnB>
+                  </a:tcPr>
+                </a:tc>
+                <a:tc>
+                  <a:txBody>
+                    <a:bodyPr/>
+                    <a:lstStyle/>
+                    <a:p>
+                      <a:pPr indent="0" marL="0">
+                        <a:buNone/>
+                      </a:pPr>
+                      <a:r>
+                        <a:rPr lang="en-US" sz="1000" dirty="0">
+                          <a:solidFill>
+                            <a:srgbClr val="1A1A18"/>
+                          </a:solidFill>
+                          <a:latin typeface="Cambria" pitchFamily="34" charset="0"/>
+                          <a:ea typeface="Cambria" pitchFamily="34" charset="-122"/>
+                          <a:cs typeface="Cambria" pitchFamily="34" charset="-120"/>
+                        </a:rPr>
+                        <a:t>25,0%</a:t>
+                      </a:r>
+                      <a:endParaRPr lang="en-US" sz="1000" dirty="0">
+                        <a:latin typeface="Cambria" charset="0"/>
+                        <a:ea typeface="Cambria" charset="0"/>
+                        <a:cs typeface="Cambria" charset="0"/>
+                      </a:endParaRPr>
+                    </a:p>
+                  </a:txBody>
+                  <a:tcPr marL="91440" marR="91440" marT="45720" marB="45720" anchor="ctr">
+                    <a:lnL w="0" cap="flat" cmpd="sng" algn="ctr">
+                      <a:noFill/>
+                    </a:lnL>
+                    <a:lnR w="0" cap="flat" cmpd="sng" algn="ctr">
+                      <a:noFill/>
+                    </a:lnR>
+                    <a:lnT w="0" cap="flat" cmpd="sng" algn="ctr">
+                      <a:noFill/>
+                    </a:lnT>
+                    <a:lnB w="6350" cap="flat" cmpd="sng" algn="ctr">
+                      <a:solidFill>
+                        <a:srgbClr val="E6E4DE"/>
+                      </a:solidFill>
+                      <a:prstDash val="solid"/>
+                      <a:round/>
+                      <a:headEnd type="none" w="med" len="med"/>
+                      <a:tailEnd type="none" w="med" len="med"/>
+                    </a:lnB>
+                  </a:tcPr>
+                </a:tc>
+              </a:tr>
+              <a:tr h="246380">
+                <a:tc>
+                  <a:txBody>
+                    <a:bodyPr/>
+                    <a:lstStyle/>
+                    <a:p>
+                      <a:pPr indent="0" marL="0">
+                        <a:buNone/>
+                      </a:pPr>
+                      <a:r>
+                        <a:rPr lang="en-US" sz="1000" dirty="0">
+                          <a:solidFill>
+                            <a:srgbClr val="1A1A18"/>
+                          </a:solidFill>
+                          <a:latin typeface="Cambria" pitchFamily="34" charset="0"/>
+                          <a:ea typeface="Cambria" pitchFamily="34" charset="-122"/>
+                          <a:cs typeface="Cambria" pitchFamily="34" charset="-120"/>
+                        </a:rPr>
+                        <a:t>Quartis</a:t>
+                      </a:r>
+                      <a:endParaRPr lang="en-US" sz="1000" dirty="0">
+                        <a:latin typeface="Cambria" charset="0"/>
+                        <a:ea typeface="Cambria" charset="0"/>
+                        <a:cs typeface="Cambria" charset="0"/>
+                      </a:endParaRPr>
+                    </a:p>
+                  </a:txBody>
+                  <a:tcPr marL="91440" marR="91440" marT="45720" marB="45720" anchor="ctr">
+                    <a:lnL w="0" cap="flat" cmpd="sng" algn="ctr">
+                      <a:noFill/>
+                    </a:lnL>
+                    <a:lnR w="0" cap="flat" cmpd="sng" algn="ctr">
+                      <a:noFill/>
+                    </a:lnR>
+                    <a:lnT w="0" cap="flat" cmpd="sng" algn="ctr">
+                      <a:noFill/>
+                    </a:lnT>
                     <a:lnB w="15875" cap="flat" cmpd="sng" algn="ctr">
                       <a:solidFill>
                         <a:srgbClr val="1A1A18"/>
@@ -11127,7 +11317,7 @@
                           <a:ea typeface="Cambria" pitchFamily="34" charset="-122"/>
                           <a:cs typeface="Cambria" pitchFamily="34" charset="-120"/>
                         </a:rPr>
-                        <a:t>18.493</a:t>
+                        <a:t>18.492</a:t>
                       </a:r>
                       <a:endParaRPr lang="en-US" sz="1000" dirty="0">
                         <a:latin typeface="Cambria" charset="0"/>
@@ -25197,7 +25387,7 @@
                           <a:ea typeface="Cambria" pitchFamily="34" charset="-122"/>
                           <a:cs typeface="Cambria" pitchFamily="34" charset="-120"/>
                         </a:rPr>
-                        <a:t>73.878</a:t>
+                        <a:t>73.877</a:t>
                       </a:r>
                       <a:endParaRPr lang="en-US" sz="1000" dirty="0">
                         <a:latin typeface="Cambria" charset="0"/>
@@ -25293,101 +25483,101 @@
                           <a:ea typeface="Cambria" pitchFamily="34" charset="-122"/>
                           <a:cs typeface="Cambria" pitchFamily="34" charset="-120"/>
                         </a:rPr>
-                        <a:t>São Raimundo do Doca Bezerra</a:t>
-                      </a:r>
-                      <a:endParaRPr lang="en-US" sz="1000" dirty="0">
-                        <a:latin typeface="Cambria" charset="0"/>
-                        <a:ea typeface="Cambria" charset="0"/>
-                        <a:cs typeface="Cambria" charset="0"/>
-                      </a:endParaRPr>
-                    </a:p>
-                  </a:txBody>
-                  <a:tcPr marL="91440" marR="91440" marT="45720" marB="45720" anchor="ctr">
-                    <a:lnL w="0" cap="flat" cmpd="sng" algn="ctr">
-                      <a:noFill/>
-                    </a:lnL>
-                    <a:lnR w="0" cap="flat" cmpd="sng" algn="ctr">
-                      <a:noFill/>
-                    </a:lnR>
-                    <a:lnT w="0" cap="flat" cmpd="sng" algn="ctr">
-                      <a:noFill/>
-                    </a:lnT>
-                    <a:lnB w="6350" cap="flat" cmpd="sng" algn="ctr">
-                      <a:solidFill>
-                        <a:srgbClr val="E6E4DE"/>
-                      </a:solidFill>
-                      <a:prstDash val="solid"/>
-                      <a:round/>
-                      <a:headEnd type="none" w="med" len="med"/>
-                      <a:tailEnd type="none" w="med" len="med"/>
-                    </a:lnB>
-                  </a:tcPr>
-                </a:tc>
-                <a:tc>
-                  <a:txBody>
-                    <a:bodyPr/>
-                    <a:lstStyle/>
-                    <a:p>
-                      <a:pPr indent="0" marL="0">
-                        <a:buNone/>
-                      </a:pPr>
-                      <a:r>
-                        <a:rPr lang="en-US" sz="1000" dirty="0">
-                          <a:solidFill>
-                            <a:srgbClr val="1A1A18"/>
-                          </a:solidFill>
-                          <a:latin typeface="Cambria" pitchFamily="34" charset="0"/>
-                          <a:ea typeface="Cambria" pitchFamily="34" charset="-122"/>
-                          <a:cs typeface="Cambria" pitchFamily="34" charset="-120"/>
-                        </a:rPr>
-                        <a:t>1</a:t>
-                      </a:r>
-                      <a:endParaRPr lang="en-US" sz="1000" dirty="0">
-                        <a:latin typeface="Cambria" charset="0"/>
-                        <a:ea typeface="Cambria" charset="0"/>
-                        <a:cs typeface="Cambria" charset="0"/>
-                      </a:endParaRPr>
-                    </a:p>
-                  </a:txBody>
-                  <a:tcPr marL="91440" marR="91440" marT="45720" marB="45720" anchor="ctr">
-                    <a:lnL w="0" cap="flat" cmpd="sng" algn="ctr">
-                      <a:noFill/>
-                    </a:lnL>
-                    <a:lnR w="0" cap="flat" cmpd="sng" algn="ctr">
-                      <a:noFill/>
-                    </a:lnR>
-                    <a:lnT w="0" cap="flat" cmpd="sng" algn="ctr">
-                      <a:noFill/>
-                    </a:lnT>
-                    <a:lnB w="6350" cap="flat" cmpd="sng" algn="ctr">
-                      <a:solidFill>
-                        <a:srgbClr val="E6E4DE"/>
-                      </a:solidFill>
-                      <a:prstDash val="solid"/>
-                      <a:round/>
-                      <a:headEnd type="none" w="med" len="med"/>
-                      <a:tailEnd type="none" w="med" len="med"/>
-                    </a:lnB>
-                  </a:tcPr>
-                </a:tc>
-                <a:tc>
-                  <a:txBody>
-                    <a:bodyPr/>
-                    <a:lstStyle/>
-                    <a:p>
-                      <a:pPr indent="0" marL="0">
-                        <a:buNone/>
-                      </a:pPr>
-                      <a:r>
-                        <a:rPr lang="en-US" sz="1000" dirty="0">
-                          <a:solidFill>
-                            <a:srgbClr val="1A1A18"/>
-                          </a:solidFill>
-                          <a:latin typeface="Cambria" pitchFamily="34" charset="0"/>
-                          <a:ea typeface="Cambria" pitchFamily="34" charset="-122"/>
-                          <a:cs typeface="Cambria" pitchFamily="34" charset="-120"/>
-                        </a:rPr>
-                        <a:t>—</a:t>
+                        <a:t>Japoatã</a:t>
+                      </a:r>
+                      <a:endParaRPr lang="en-US" sz="1000" dirty="0">
+                        <a:latin typeface="Cambria" charset="0"/>
+                        <a:ea typeface="Cambria" charset="0"/>
+                        <a:cs typeface="Cambria" charset="0"/>
+                      </a:endParaRPr>
+                    </a:p>
+                  </a:txBody>
+                  <a:tcPr marL="91440" marR="91440" marT="45720" marB="45720" anchor="ctr">
+                    <a:lnL w="0" cap="flat" cmpd="sng" algn="ctr">
+                      <a:noFill/>
+                    </a:lnL>
+                    <a:lnR w="0" cap="flat" cmpd="sng" algn="ctr">
+                      <a:noFill/>
+                    </a:lnR>
+                    <a:lnT w="0" cap="flat" cmpd="sng" algn="ctr">
+                      <a:noFill/>
+                    </a:lnT>
+                    <a:lnB w="6350" cap="flat" cmpd="sng" algn="ctr">
+                      <a:solidFill>
+                        <a:srgbClr val="E6E4DE"/>
+                      </a:solidFill>
+                      <a:prstDash val="solid"/>
+                      <a:round/>
+                      <a:headEnd type="none" w="med" len="med"/>
+                      <a:tailEnd type="none" w="med" len="med"/>
+                    </a:lnB>
+                  </a:tcPr>
+                </a:tc>
+                <a:tc>
+                  <a:txBody>
+                    <a:bodyPr/>
+                    <a:lstStyle/>
+                    <a:p>
+                      <a:pPr indent="0" marL="0">
+                        <a:buNone/>
+                      </a:pPr>
+                      <a:r>
+                        <a:rPr lang="en-US" sz="1000" dirty="0">
+                          <a:solidFill>
+                            <a:srgbClr val="1A1A18"/>
+                          </a:solidFill>
+                          <a:latin typeface="Cambria" pitchFamily="34" charset="0"/>
+                          <a:ea typeface="Cambria" pitchFamily="34" charset="-122"/>
+                          <a:cs typeface="Cambria" pitchFamily="34" charset="-120"/>
+                        </a:rPr>
+                        <a:t>4</a:t>
+                      </a:r>
+                      <a:endParaRPr lang="en-US" sz="1000" dirty="0">
+                        <a:latin typeface="Cambria" charset="0"/>
+                        <a:ea typeface="Cambria" charset="0"/>
+                        <a:cs typeface="Cambria" charset="0"/>
+                      </a:endParaRPr>
+                    </a:p>
+                  </a:txBody>
+                  <a:tcPr marL="91440" marR="91440" marT="45720" marB="45720" anchor="ctr">
+                    <a:lnL w="0" cap="flat" cmpd="sng" algn="ctr">
+                      <a:noFill/>
+                    </a:lnL>
+                    <a:lnR w="0" cap="flat" cmpd="sng" algn="ctr">
+                      <a:noFill/>
+                    </a:lnR>
+                    <a:lnT w="0" cap="flat" cmpd="sng" algn="ctr">
+                      <a:noFill/>
+                    </a:lnT>
+                    <a:lnB w="6350" cap="flat" cmpd="sng" algn="ctr">
+                      <a:solidFill>
+                        <a:srgbClr val="E6E4DE"/>
+                      </a:solidFill>
+                      <a:prstDash val="solid"/>
+                      <a:round/>
+                      <a:headEnd type="none" w="med" len="med"/>
+                      <a:tailEnd type="none" w="med" len="med"/>
+                    </a:lnB>
+                  </a:tcPr>
+                </a:tc>
+                <a:tc>
+                  <a:txBody>
+                    <a:bodyPr/>
+                    <a:lstStyle/>
+                    <a:p>
+                      <a:pPr indent="0" marL="0">
+                        <a:buNone/>
+                      </a:pPr>
+                      <a:r>
+                        <a:rPr lang="en-US" sz="1000" dirty="0">
+                          <a:solidFill>
+                            <a:srgbClr val="1A1A18"/>
+                          </a:solidFill>
+                          <a:latin typeface="Cambria" pitchFamily="34" charset="0"/>
+                          <a:ea typeface="Cambria" pitchFamily="34" charset="-122"/>
+                          <a:cs typeface="Cambria" pitchFamily="34" charset="-120"/>
+                        </a:rPr>
+                        <a:t>0,4000</a:t>
                       </a:r>
                       <a:endParaRPr lang="en-US" sz="1000" dirty="0">
                         <a:latin typeface="Cambria" charset="0"/>
@@ -25436,101 +25626,101 @@
                           <a:ea typeface="Cambria" pitchFamily="34" charset="-122"/>
                           <a:cs typeface="Cambria" pitchFamily="34" charset="-120"/>
                         </a:rPr>
-                        <a:t>Japoatã</a:t>
-                      </a:r>
-                      <a:endParaRPr lang="en-US" sz="1000" dirty="0">
-                        <a:latin typeface="Cambria" charset="0"/>
-                        <a:ea typeface="Cambria" charset="0"/>
-                        <a:cs typeface="Cambria" charset="0"/>
-                      </a:endParaRPr>
-                    </a:p>
-                  </a:txBody>
-                  <a:tcPr marL="91440" marR="91440" marT="45720" marB="45720" anchor="ctr">
-                    <a:lnL w="0" cap="flat" cmpd="sng" algn="ctr">
-                      <a:noFill/>
-                    </a:lnL>
-                    <a:lnR w="0" cap="flat" cmpd="sng" algn="ctr">
-                      <a:noFill/>
-                    </a:lnR>
-                    <a:lnT w="0" cap="flat" cmpd="sng" algn="ctr">
-                      <a:noFill/>
-                    </a:lnT>
-                    <a:lnB w="6350" cap="flat" cmpd="sng" algn="ctr">
-                      <a:solidFill>
-                        <a:srgbClr val="E6E4DE"/>
-                      </a:solidFill>
-                      <a:prstDash val="solid"/>
-                      <a:round/>
-                      <a:headEnd type="none" w="med" len="med"/>
-                      <a:tailEnd type="none" w="med" len="med"/>
-                    </a:lnB>
-                  </a:tcPr>
-                </a:tc>
-                <a:tc>
-                  <a:txBody>
-                    <a:bodyPr/>
-                    <a:lstStyle/>
-                    <a:p>
-                      <a:pPr indent="0" marL="0">
-                        <a:buNone/>
-                      </a:pPr>
-                      <a:r>
-                        <a:rPr lang="en-US" sz="1000" dirty="0">
-                          <a:solidFill>
-                            <a:srgbClr val="1A1A18"/>
-                          </a:solidFill>
-                          <a:latin typeface="Cambria" pitchFamily="34" charset="0"/>
-                          <a:ea typeface="Cambria" pitchFamily="34" charset="-122"/>
-                          <a:cs typeface="Cambria" pitchFamily="34" charset="-120"/>
-                        </a:rPr>
-                        <a:t>4</a:t>
-                      </a:r>
-                      <a:endParaRPr lang="en-US" sz="1000" dirty="0">
-                        <a:latin typeface="Cambria" charset="0"/>
-                        <a:ea typeface="Cambria" charset="0"/>
-                        <a:cs typeface="Cambria" charset="0"/>
-                      </a:endParaRPr>
-                    </a:p>
-                  </a:txBody>
-                  <a:tcPr marL="91440" marR="91440" marT="45720" marB="45720" anchor="ctr">
-                    <a:lnL w="0" cap="flat" cmpd="sng" algn="ctr">
-                      <a:noFill/>
-                    </a:lnL>
-                    <a:lnR w="0" cap="flat" cmpd="sng" algn="ctr">
-                      <a:noFill/>
-                    </a:lnR>
-                    <a:lnT w="0" cap="flat" cmpd="sng" algn="ctr">
-                      <a:noFill/>
-                    </a:lnT>
-                    <a:lnB w="6350" cap="flat" cmpd="sng" algn="ctr">
-                      <a:solidFill>
-                        <a:srgbClr val="E6E4DE"/>
-                      </a:solidFill>
-                      <a:prstDash val="solid"/>
-                      <a:round/>
-                      <a:headEnd type="none" w="med" len="med"/>
-                      <a:tailEnd type="none" w="med" len="med"/>
-                    </a:lnB>
-                  </a:tcPr>
-                </a:tc>
-                <a:tc>
-                  <a:txBody>
-                    <a:bodyPr/>
-                    <a:lstStyle/>
-                    <a:p>
-                      <a:pPr indent="0" marL="0">
-                        <a:buNone/>
-                      </a:pPr>
-                      <a:r>
-                        <a:rPr lang="en-US" sz="1000" dirty="0">
-                          <a:solidFill>
-                            <a:srgbClr val="1A1A18"/>
-                          </a:solidFill>
-                          <a:latin typeface="Cambria" pitchFamily="34" charset="0"/>
-                          <a:ea typeface="Cambria" pitchFamily="34" charset="-122"/>
-                          <a:cs typeface="Cambria" pitchFamily="34" charset="-120"/>
-                        </a:rPr>
-                        <a:t>0,4000</a:t>
+                        <a:t>Água Preta</a:t>
+                      </a:r>
+                      <a:endParaRPr lang="en-US" sz="1000" dirty="0">
+                        <a:latin typeface="Cambria" charset="0"/>
+                        <a:ea typeface="Cambria" charset="0"/>
+                        <a:cs typeface="Cambria" charset="0"/>
+                      </a:endParaRPr>
+                    </a:p>
+                  </a:txBody>
+                  <a:tcPr marL="91440" marR="91440" marT="45720" marB="45720" anchor="ctr">
+                    <a:lnL w="0" cap="flat" cmpd="sng" algn="ctr">
+                      <a:noFill/>
+                    </a:lnL>
+                    <a:lnR w="0" cap="flat" cmpd="sng" algn="ctr">
+                      <a:noFill/>
+                    </a:lnR>
+                    <a:lnT w="0" cap="flat" cmpd="sng" algn="ctr">
+                      <a:noFill/>
+                    </a:lnT>
+                    <a:lnB w="6350" cap="flat" cmpd="sng" algn="ctr">
+                      <a:solidFill>
+                        <a:srgbClr val="E6E4DE"/>
+                      </a:solidFill>
+                      <a:prstDash val="solid"/>
+                      <a:round/>
+                      <a:headEnd type="none" w="med" len="med"/>
+                      <a:tailEnd type="none" w="med" len="med"/>
+                    </a:lnB>
+                  </a:tcPr>
+                </a:tc>
+                <a:tc>
+                  <a:txBody>
+                    <a:bodyPr/>
+                    <a:lstStyle/>
+                    <a:p>
+                      <a:pPr indent="0" marL="0">
+                        <a:buNone/>
+                      </a:pPr>
+                      <a:r>
+                        <a:rPr lang="en-US" sz="1000" dirty="0">
+                          <a:solidFill>
+                            <a:srgbClr val="1A1A18"/>
+                          </a:solidFill>
+                          <a:latin typeface="Cambria" pitchFamily="34" charset="0"/>
+                          <a:ea typeface="Cambria" pitchFamily="34" charset="-122"/>
+                          <a:cs typeface="Cambria" pitchFamily="34" charset="-120"/>
+                        </a:rPr>
+                        <a:t>18</a:t>
+                      </a:r>
+                      <a:endParaRPr lang="en-US" sz="1000" dirty="0">
+                        <a:latin typeface="Cambria" charset="0"/>
+                        <a:ea typeface="Cambria" charset="0"/>
+                        <a:cs typeface="Cambria" charset="0"/>
+                      </a:endParaRPr>
+                    </a:p>
+                  </a:txBody>
+                  <a:tcPr marL="91440" marR="91440" marT="45720" marB="45720" anchor="ctr">
+                    <a:lnL w="0" cap="flat" cmpd="sng" algn="ctr">
+                      <a:noFill/>
+                    </a:lnL>
+                    <a:lnR w="0" cap="flat" cmpd="sng" algn="ctr">
+                      <a:noFill/>
+                    </a:lnR>
+                    <a:lnT w="0" cap="flat" cmpd="sng" algn="ctr">
+                      <a:noFill/>
+                    </a:lnT>
+                    <a:lnB w="6350" cap="flat" cmpd="sng" algn="ctr">
+                      <a:solidFill>
+                        <a:srgbClr val="E6E4DE"/>
+                      </a:solidFill>
+                      <a:prstDash val="solid"/>
+                      <a:round/>
+                      <a:headEnd type="none" w="med" len="med"/>
+                      <a:tailEnd type="none" w="med" len="med"/>
+                    </a:lnB>
+                  </a:tcPr>
+                </a:tc>
+                <a:tc>
+                  <a:txBody>
+                    <a:bodyPr/>
+                    <a:lstStyle/>
+                    <a:p>
+                      <a:pPr indent="0" marL="0">
+                        <a:buNone/>
+                      </a:pPr>
+                      <a:r>
+                        <a:rPr lang="en-US" sz="1000" dirty="0">
+                          <a:solidFill>
+                            <a:srgbClr val="1A1A18"/>
+                          </a:solidFill>
+                          <a:latin typeface="Cambria" pitchFamily="34" charset="0"/>
+                          <a:ea typeface="Cambria" pitchFamily="34" charset="-122"/>
+                          <a:cs typeface="Cambria" pitchFamily="34" charset="-120"/>
+                        </a:rPr>
+                        <a:t>0,8596</a:t>
                       </a:r>
                       <a:endParaRPr lang="en-US" sz="1000" dirty="0">
                         <a:latin typeface="Cambria" charset="0"/>
@@ -25579,101 +25769,101 @@
                           <a:ea typeface="Cambria" pitchFamily="34" charset="-122"/>
                           <a:cs typeface="Cambria" pitchFamily="34" charset="-120"/>
                         </a:rPr>
-                        <a:t>Água Preta</a:t>
-                      </a:r>
-                      <a:endParaRPr lang="en-US" sz="1000" dirty="0">
-                        <a:latin typeface="Cambria" charset="0"/>
-                        <a:ea typeface="Cambria" charset="0"/>
-                        <a:cs typeface="Cambria" charset="0"/>
-                      </a:endParaRPr>
-                    </a:p>
-                  </a:txBody>
-                  <a:tcPr marL="91440" marR="91440" marT="45720" marB="45720" anchor="ctr">
-                    <a:lnL w="0" cap="flat" cmpd="sng" algn="ctr">
-                      <a:noFill/>
-                    </a:lnL>
-                    <a:lnR w="0" cap="flat" cmpd="sng" algn="ctr">
-                      <a:noFill/>
-                    </a:lnR>
-                    <a:lnT w="0" cap="flat" cmpd="sng" algn="ctr">
-                      <a:noFill/>
-                    </a:lnT>
-                    <a:lnB w="6350" cap="flat" cmpd="sng" algn="ctr">
-                      <a:solidFill>
-                        <a:srgbClr val="E6E4DE"/>
-                      </a:solidFill>
-                      <a:prstDash val="solid"/>
-                      <a:round/>
-                      <a:headEnd type="none" w="med" len="med"/>
-                      <a:tailEnd type="none" w="med" len="med"/>
-                    </a:lnB>
-                  </a:tcPr>
-                </a:tc>
-                <a:tc>
-                  <a:txBody>
-                    <a:bodyPr/>
-                    <a:lstStyle/>
-                    <a:p>
-                      <a:pPr indent="0" marL="0">
-                        <a:buNone/>
-                      </a:pPr>
-                      <a:r>
-                        <a:rPr lang="en-US" sz="1000" dirty="0">
-                          <a:solidFill>
-                            <a:srgbClr val="1A1A18"/>
-                          </a:solidFill>
-                          <a:latin typeface="Cambria" pitchFamily="34" charset="0"/>
-                          <a:ea typeface="Cambria" pitchFamily="34" charset="-122"/>
-                          <a:cs typeface="Cambria" pitchFamily="34" charset="-120"/>
-                        </a:rPr>
-                        <a:t>18</a:t>
-                      </a:r>
-                      <a:endParaRPr lang="en-US" sz="1000" dirty="0">
-                        <a:latin typeface="Cambria" charset="0"/>
-                        <a:ea typeface="Cambria" charset="0"/>
-                        <a:cs typeface="Cambria" charset="0"/>
-                      </a:endParaRPr>
-                    </a:p>
-                  </a:txBody>
-                  <a:tcPr marL="91440" marR="91440" marT="45720" marB="45720" anchor="ctr">
-                    <a:lnL w="0" cap="flat" cmpd="sng" algn="ctr">
-                      <a:noFill/>
-                    </a:lnL>
-                    <a:lnR w="0" cap="flat" cmpd="sng" algn="ctr">
-                      <a:noFill/>
-                    </a:lnR>
-                    <a:lnT w="0" cap="flat" cmpd="sng" algn="ctr">
-                      <a:noFill/>
-                    </a:lnT>
-                    <a:lnB w="6350" cap="flat" cmpd="sng" algn="ctr">
-                      <a:solidFill>
-                        <a:srgbClr val="E6E4DE"/>
-                      </a:solidFill>
-                      <a:prstDash val="solid"/>
-                      <a:round/>
-                      <a:headEnd type="none" w="med" len="med"/>
-                      <a:tailEnd type="none" w="med" len="med"/>
-                    </a:lnB>
-                  </a:tcPr>
-                </a:tc>
-                <a:tc>
-                  <a:txBody>
-                    <a:bodyPr/>
-                    <a:lstStyle/>
-                    <a:p>
-                      <a:pPr indent="0" marL="0">
-                        <a:buNone/>
-                      </a:pPr>
-                      <a:r>
-                        <a:rPr lang="en-US" sz="1000" dirty="0">
-                          <a:solidFill>
-                            <a:srgbClr val="1A1A18"/>
-                          </a:solidFill>
-                          <a:latin typeface="Cambria" pitchFamily="34" charset="0"/>
-                          <a:ea typeface="Cambria" pitchFamily="34" charset="-122"/>
-                          <a:cs typeface="Cambria" pitchFamily="34" charset="-120"/>
-                        </a:rPr>
-                        <a:t>0,8596</a:t>
+                        <a:t>Placas</a:t>
+                      </a:r>
+                      <a:endParaRPr lang="en-US" sz="1000" dirty="0">
+                        <a:latin typeface="Cambria" charset="0"/>
+                        <a:ea typeface="Cambria" charset="0"/>
+                        <a:cs typeface="Cambria" charset="0"/>
+                      </a:endParaRPr>
+                    </a:p>
+                  </a:txBody>
+                  <a:tcPr marL="91440" marR="91440" marT="45720" marB="45720" anchor="ctr">
+                    <a:lnL w="0" cap="flat" cmpd="sng" algn="ctr">
+                      <a:noFill/>
+                    </a:lnL>
+                    <a:lnR w="0" cap="flat" cmpd="sng" algn="ctr">
+                      <a:noFill/>
+                    </a:lnR>
+                    <a:lnT w="0" cap="flat" cmpd="sng" algn="ctr">
+                      <a:noFill/>
+                    </a:lnT>
+                    <a:lnB w="6350" cap="flat" cmpd="sng" algn="ctr">
+                      <a:solidFill>
+                        <a:srgbClr val="E6E4DE"/>
+                      </a:solidFill>
+                      <a:prstDash val="solid"/>
+                      <a:round/>
+                      <a:headEnd type="none" w="med" len="med"/>
+                      <a:tailEnd type="none" w="med" len="med"/>
+                    </a:lnB>
+                  </a:tcPr>
+                </a:tc>
+                <a:tc>
+                  <a:txBody>
+                    <a:bodyPr/>
+                    <a:lstStyle/>
+                    <a:p>
+                      <a:pPr indent="0" marL="0">
+                        <a:buNone/>
+                      </a:pPr>
+                      <a:r>
+                        <a:rPr lang="en-US" sz="1000" dirty="0">
+                          <a:solidFill>
+                            <a:srgbClr val="1A1A18"/>
+                          </a:solidFill>
+                          <a:latin typeface="Cambria" pitchFamily="34" charset="0"/>
+                          <a:ea typeface="Cambria" pitchFamily="34" charset="-122"/>
+                          <a:cs typeface="Cambria" pitchFamily="34" charset="-120"/>
+                        </a:rPr>
+                        <a:t>5</a:t>
+                      </a:r>
+                      <a:endParaRPr lang="en-US" sz="1000" dirty="0">
+                        <a:latin typeface="Cambria" charset="0"/>
+                        <a:ea typeface="Cambria" charset="0"/>
+                        <a:cs typeface="Cambria" charset="0"/>
+                      </a:endParaRPr>
+                    </a:p>
+                  </a:txBody>
+                  <a:tcPr marL="91440" marR="91440" marT="45720" marB="45720" anchor="ctr">
+                    <a:lnL w="0" cap="flat" cmpd="sng" algn="ctr">
+                      <a:noFill/>
+                    </a:lnL>
+                    <a:lnR w="0" cap="flat" cmpd="sng" algn="ctr">
+                      <a:noFill/>
+                    </a:lnR>
+                    <a:lnT w="0" cap="flat" cmpd="sng" algn="ctr">
+                      <a:noFill/>
+                    </a:lnT>
+                    <a:lnB w="6350" cap="flat" cmpd="sng" algn="ctr">
+                      <a:solidFill>
+                        <a:srgbClr val="E6E4DE"/>
+                      </a:solidFill>
+                      <a:prstDash val="solid"/>
+                      <a:round/>
+                      <a:headEnd type="none" w="med" len="med"/>
+                      <a:tailEnd type="none" w="med" len="med"/>
+                    </a:lnB>
+                  </a:tcPr>
+                </a:tc>
+                <a:tc>
+                  <a:txBody>
+                    <a:bodyPr/>
+                    <a:lstStyle/>
+                    <a:p>
+                      <a:pPr indent="0" marL="0">
+                        <a:buNone/>
+                      </a:pPr>
+                      <a:r>
+                        <a:rPr lang="en-US" sz="1000" dirty="0">
+                          <a:solidFill>
+                            <a:srgbClr val="1A1A18"/>
+                          </a:solidFill>
+                          <a:latin typeface="Cambria" pitchFamily="34" charset="0"/>
+                          <a:ea typeface="Cambria" pitchFamily="34" charset="-122"/>
+                          <a:cs typeface="Cambria" pitchFamily="34" charset="-120"/>
+                        </a:rPr>
+                        <a:t>0,9000</a:t>
                       </a:r>
                       <a:endParaRPr lang="en-US" sz="1000" dirty="0">
                         <a:latin typeface="Cambria" charset="0"/>
@@ -25722,7 +25912,7 @@
                           <a:ea typeface="Cambria" pitchFamily="34" charset="-122"/>
                           <a:cs typeface="Cambria" pitchFamily="34" charset="-120"/>
                         </a:rPr>
-                        <a:t>Placas</a:t>
+                        <a:t>Santa Maria do Oeste</a:t>
                       </a:r>
                       <a:endParaRPr lang="en-US" sz="1000" dirty="0">
                         <a:latin typeface="Cambria" charset="0"/>
@@ -25865,101 +26055,101 @@
                           <a:ea typeface="Cambria" pitchFamily="34" charset="-122"/>
                           <a:cs typeface="Cambria" pitchFamily="34" charset="-120"/>
                         </a:rPr>
-                        <a:t>Santa Maria do Oeste</a:t>
-                      </a:r>
-                      <a:endParaRPr lang="en-US" sz="1000" dirty="0">
-                        <a:latin typeface="Cambria" charset="0"/>
-                        <a:ea typeface="Cambria" charset="0"/>
-                        <a:cs typeface="Cambria" charset="0"/>
-                      </a:endParaRPr>
-                    </a:p>
-                  </a:txBody>
-                  <a:tcPr marL="91440" marR="91440" marT="45720" marB="45720" anchor="ctr">
-                    <a:lnL w="0" cap="flat" cmpd="sng" algn="ctr">
-                      <a:noFill/>
-                    </a:lnL>
-                    <a:lnR w="0" cap="flat" cmpd="sng" algn="ctr">
-                      <a:noFill/>
-                    </a:lnR>
-                    <a:lnT w="0" cap="flat" cmpd="sng" algn="ctr">
-                      <a:noFill/>
-                    </a:lnT>
-                    <a:lnB w="6350" cap="flat" cmpd="sng" algn="ctr">
-                      <a:solidFill>
-                        <a:srgbClr val="E6E4DE"/>
-                      </a:solidFill>
-                      <a:prstDash val="solid"/>
-                      <a:round/>
-                      <a:headEnd type="none" w="med" len="med"/>
-                      <a:tailEnd type="none" w="med" len="med"/>
-                    </a:lnB>
-                  </a:tcPr>
-                </a:tc>
-                <a:tc>
-                  <a:txBody>
-                    <a:bodyPr/>
-                    <a:lstStyle/>
-                    <a:p>
-                      <a:pPr indent="0" marL="0">
-                        <a:buNone/>
-                      </a:pPr>
-                      <a:r>
-                        <a:rPr lang="en-US" sz="1000" dirty="0">
-                          <a:solidFill>
-                            <a:srgbClr val="1A1A18"/>
-                          </a:solidFill>
-                          <a:latin typeface="Cambria" pitchFamily="34" charset="0"/>
-                          <a:ea typeface="Cambria" pitchFamily="34" charset="-122"/>
-                          <a:cs typeface="Cambria" pitchFamily="34" charset="-120"/>
-                        </a:rPr>
-                        <a:t>5</a:t>
-                      </a:r>
-                      <a:endParaRPr lang="en-US" sz="1000" dirty="0">
-                        <a:latin typeface="Cambria" charset="0"/>
-                        <a:ea typeface="Cambria" charset="0"/>
-                        <a:cs typeface="Cambria" charset="0"/>
-                      </a:endParaRPr>
-                    </a:p>
-                  </a:txBody>
-                  <a:tcPr marL="91440" marR="91440" marT="45720" marB="45720" anchor="ctr">
-                    <a:lnL w="0" cap="flat" cmpd="sng" algn="ctr">
-                      <a:noFill/>
-                    </a:lnL>
-                    <a:lnR w="0" cap="flat" cmpd="sng" algn="ctr">
-                      <a:noFill/>
-                    </a:lnR>
-                    <a:lnT w="0" cap="flat" cmpd="sng" algn="ctr">
-                      <a:noFill/>
-                    </a:lnT>
-                    <a:lnB w="6350" cap="flat" cmpd="sng" algn="ctr">
-                      <a:solidFill>
-                        <a:srgbClr val="E6E4DE"/>
-                      </a:solidFill>
-                      <a:prstDash val="solid"/>
-                      <a:round/>
-                      <a:headEnd type="none" w="med" len="med"/>
-                      <a:tailEnd type="none" w="med" len="med"/>
-                    </a:lnB>
-                  </a:tcPr>
-                </a:tc>
-                <a:tc>
-                  <a:txBody>
-                    <a:bodyPr/>
-                    <a:lstStyle/>
-                    <a:p>
-                      <a:pPr indent="0" marL="0">
-                        <a:buNone/>
-                      </a:pPr>
-                      <a:r>
-                        <a:rPr lang="en-US" sz="1000" dirty="0">
-                          <a:solidFill>
-                            <a:srgbClr val="1A1A18"/>
-                          </a:solidFill>
-                          <a:latin typeface="Cambria" pitchFamily="34" charset="0"/>
-                          <a:ea typeface="Cambria" pitchFamily="34" charset="-122"/>
-                          <a:cs typeface="Cambria" pitchFamily="34" charset="-120"/>
-                        </a:rPr>
-                        <a:t>0,9000</a:t>
+                        <a:t>Salvador</a:t>
+                      </a:r>
+                      <a:endParaRPr lang="en-US" sz="1000" dirty="0">
+                        <a:latin typeface="Cambria" charset="0"/>
+                        <a:ea typeface="Cambria" charset="0"/>
+                        <a:cs typeface="Cambria" charset="0"/>
+                      </a:endParaRPr>
+                    </a:p>
+                  </a:txBody>
+                  <a:tcPr marL="91440" marR="91440" marT="45720" marB="45720" anchor="ctr">
+                    <a:lnL w="0" cap="flat" cmpd="sng" algn="ctr">
+                      <a:noFill/>
+                    </a:lnL>
+                    <a:lnR w="0" cap="flat" cmpd="sng" algn="ctr">
+                      <a:noFill/>
+                    </a:lnR>
+                    <a:lnT w="0" cap="flat" cmpd="sng" algn="ctr">
+                      <a:noFill/>
+                    </a:lnT>
+                    <a:lnB w="6350" cap="flat" cmpd="sng" algn="ctr">
+                      <a:solidFill>
+                        <a:srgbClr val="E6E4DE"/>
+                      </a:solidFill>
+                      <a:prstDash val="solid"/>
+                      <a:round/>
+                      <a:headEnd type="none" w="med" len="med"/>
+                      <a:tailEnd type="none" w="med" len="med"/>
+                    </a:lnB>
+                  </a:tcPr>
+                </a:tc>
+                <a:tc>
+                  <a:txBody>
+                    <a:bodyPr/>
+                    <a:lstStyle/>
+                    <a:p>
+                      <a:pPr indent="0" marL="0">
+                        <a:buNone/>
+                      </a:pPr>
+                      <a:r>
+                        <a:rPr lang="en-US" sz="1000" dirty="0">
+                          <a:solidFill>
+                            <a:srgbClr val="1A1A18"/>
+                          </a:solidFill>
+                          <a:latin typeface="Cambria" pitchFamily="34" charset="0"/>
+                          <a:ea typeface="Cambria" pitchFamily="34" charset="-122"/>
+                          <a:cs typeface="Cambria" pitchFamily="34" charset="-120"/>
+                        </a:rPr>
+                        <a:t>3.088</a:t>
+                      </a:r>
+                      <a:endParaRPr lang="en-US" sz="1000" dirty="0">
+                        <a:latin typeface="Cambria" charset="0"/>
+                        <a:ea typeface="Cambria" charset="0"/>
+                        <a:cs typeface="Cambria" charset="0"/>
+                      </a:endParaRPr>
+                    </a:p>
+                  </a:txBody>
+                  <a:tcPr marL="91440" marR="91440" marT="45720" marB="45720" anchor="ctr">
+                    <a:lnL w="0" cap="flat" cmpd="sng" algn="ctr">
+                      <a:noFill/>
+                    </a:lnL>
+                    <a:lnR w="0" cap="flat" cmpd="sng" algn="ctr">
+                      <a:noFill/>
+                    </a:lnR>
+                    <a:lnT w="0" cap="flat" cmpd="sng" algn="ctr">
+                      <a:noFill/>
+                    </a:lnT>
+                    <a:lnB w="6350" cap="flat" cmpd="sng" algn="ctr">
+                      <a:solidFill>
+                        <a:srgbClr val="E6E4DE"/>
+                      </a:solidFill>
+                      <a:prstDash val="solid"/>
+                      <a:round/>
+                      <a:headEnd type="none" w="med" len="med"/>
+                      <a:tailEnd type="none" w="med" len="med"/>
+                    </a:lnB>
+                  </a:tcPr>
+                </a:tc>
+                <a:tc>
+                  <a:txBody>
+                    <a:bodyPr/>
+                    <a:lstStyle/>
+                    <a:p>
+                      <a:pPr indent="0" marL="0">
+                        <a:buNone/>
+                      </a:pPr>
+                      <a:r>
+                        <a:rPr lang="en-US" sz="1000" dirty="0">
+                          <a:solidFill>
+                            <a:srgbClr val="1A1A18"/>
+                          </a:solidFill>
+                          <a:latin typeface="Cambria" pitchFamily="34" charset="0"/>
+                          <a:ea typeface="Cambria" pitchFamily="34" charset="-122"/>
+                          <a:cs typeface="Cambria" pitchFamily="34" charset="-120"/>
+                        </a:rPr>
+                        <a:t>0,9080</a:t>
                       </a:r>
                       <a:endParaRPr lang="en-US" sz="1000" dirty="0">
                         <a:latin typeface="Cambria" charset="0"/>
@@ -26008,101 +26198,101 @@
                           <a:ea typeface="Cambria" pitchFamily="34" charset="-122"/>
                           <a:cs typeface="Cambria" pitchFamily="34" charset="-120"/>
                         </a:rPr>
-                        <a:t>Salvador</a:t>
-                      </a:r>
-                      <a:endParaRPr lang="en-US" sz="1000" dirty="0">
-                        <a:latin typeface="Cambria" charset="0"/>
-                        <a:ea typeface="Cambria" charset="0"/>
-                        <a:cs typeface="Cambria" charset="0"/>
-                      </a:endParaRPr>
-                    </a:p>
-                  </a:txBody>
-                  <a:tcPr marL="91440" marR="91440" marT="45720" marB="45720" anchor="ctr">
-                    <a:lnL w="0" cap="flat" cmpd="sng" algn="ctr">
-                      <a:noFill/>
-                    </a:lnL>
-                    <a:lnR w="0" cap="flat" cmpd="sng" algn="ctr">
-                      <a:noFill/>
-                    </a:lnR>
-                    <a:lnT w="0" cap="flat" cmpd="sng" algn="ctr">
-                      <a:noFill/>
-                    </a:lnT>
-                    <a:lnB w="6350" cap="flat" cmpd="sng" algn="ctr">
-                      <a:solidFill>
-                        <a:srgbClr val="E6E4DE"/>
-                      </a:solidFill>
-                      <a:prstDash val="solid"/>
-                      <a:round/>
-                      <a:headEnd type="none" w="med" len="med"/>
-                      <a:tailEnd type="none" w="med" len="med"/>
-                    </a:lnB>
-                  </a:tcPr>
-                </a:tc>
-                <a:tc>
-                  <a:txBody>
-                    <a:bodyPr/>
-                    <a:lstStyle/>
-                    <a:p>
-                      <a:pPr indent="0" marL="0">
-                        <a:buNone/>
-                      </a:pPr>
-                      <a:r>
-                        <a:rPr lang="en-US" sz="1000" dirty="0">
-                          <a:solidFill>
-                            <a:srgbClr val="1A1A18"/>
-                          </a:solidFill>
-                          <a:latin typeface="Cambria" pitchFamily="34" charset="0"/>
-                          <a:ea typeface="Cambria" pitchFamily="34" charset="-122"/>
-                          <a:cs typeface="Cambria" pitchFamily="34" charset="-120"/>
-                        </a:rPr>
-                        <a:t>3.088</a:t>
-                      </a:r>
-                      <a:endParaRPr lang="en-US" sz="1000" dirty="0">
-                        <a:latin typeface="Cambria" charset="0"/>
-                        <a:ea typeface="Cambria" charset="0"/>
-                        <a:cs typeface="Cambria" charset="0"/>
-                      </a:endParaRPr>
-                    </a:p>
-                  </a:txBody>
-                  <a:tcPr marL="91440" marR="91440" marT="45720" marB="45720" anchor="ctr">
-                    <a:lnL w="0" cap="flat" cmpd="sng" algn="ctr">
-                      <a:noFill/>
-                    </a:lnL>
-                    <a:lnR w="0" cap="flat" cmpd="sng" algn="ctr">
-                      <a:noFill/>
-                    </a:lnR>
-                    <a:lnT w="0" cap="flat" cmpd="sng" algn="ctr">
-                      <a:noFill/>
-                    </a:lnT>
-                    <a:lnB w="6350" cap="flat" cmpd="sng" algn="ctr">
-                      <a:solidFill>
-                        <a:srgbClr val="E6E4DE"/>
-                      </a:solidFill>
-                      <a:prstDash val="solid"/>
-                      <a:round/>
-                      <a:headEnd type="none" w="med" len="med"/>
-                      <a:tailEnd type="none" w="med" len="med"/>
-                    </a:lnB>
-                  </a:tcPr>
-                </a:tc>
-                <a:tc>
-                  <a:txBody>
-                    <a:bodyPr/>
-                    <a:lstStyle/>
-                    <a:p>
-                      <a:pPr indent="0" marL="0">
-                        <a:buNone/>
-                      </a:pPr>
-                      <a:r>
-                        <a:rPr lang="en-US" sz="1000" dirty="0">
-                          <a:solidFill>
-                            <a:srgbClr val="1A1A18"/>
-                          </a:solidFill>
-                          <a:latin typeface="Cambria" pitchFamily="34" charset="0"/>
-                          <a:ea typeface="Cambria" pitchFamily="34" charset="-122"/>
-                          <a:cs typeface="Cambria" pitchFamily="34" charset="-120"/>
-                        </a:rPr>
-                        <a:t>0,9080</a:t>
+                        <a:t>Vicentinópolis</a:t>
+                      </a:r>
+                      <a:endParaRPr lang="en-US" sz="1000" dirty="0">
+                        <a:latin typeface="Cambria" charset="0"/>
+                        <a:ea typeface="Cambria" charset="0"/>
+                        <a:cs typeface="Cambria" charset="0"/>
+                      </a:endParaRPr>
+                    </a:p>
+                  </a:txBody>
+                  <a:tcPr marL="91440" marR="91440" marT="45720" marB="45720" anchor="ctr">
+                    <a:lnL w="0" cap="flat" cmpd="sng" algn="ctr">
+                      <a:noFill/>
+                    </a:lnL>
+                    <a:lnR w="0" cap="flat" cmpd="sng" algn="ctr">
+                      <a:noFill/>
+                    </a:lnR>
+                    <a:lnT w="0" cap="flat" cmpd="sng" algn="ctr">
+                      <a:noFill/>
+                    </a:lnT>
+                    <a:lnB w="6350" cap="flat" cmpd="sng" algn="ctr">
+                      <a:solidFill>
+                        <a:srgbClr val="E6E4DE"/>
+                      </a:solidFill>
+                      <a:prstDash val="solid"/>
+                      <a:round/>
+                      <a:headEnd type="none" w="med" len="med"/>
+                      <a:tailEnd type="none" w="med" len="med"/>
+                    </a:lnB>
+                  </a:tcPr>
+                </a:tc>
+                <a:tc>
+                  <a:txBody>
+                    <a:bodyPr/>
+                    <a:lstStyle/>
+                    <a:p>
+                      <a:pPr indent="0" marL="0">
+                        <a:buNone/>
+                      </a:pPr>
+                      <a:r>
+                        <a:rPr lang="en-US" sz="1000" dirty="0">
+                          <a:solidFill>
+                            <a:srgbClr val="1A1A18"/>
+                          </a:solidFill>
+                          <a:latin typeface="Cambria" pitchFamily="34" charset="0"/>
+                          <a:ea typeface="Cambria" pitchFamily="34" charset="-122"/>
+                          <a:cs typeface="Cambria" pitchFamily="34" charset="-120"/>
+                        </a:rPr>
+                        <a:t>11</a:t>
+                      </a:r>
+                      <a:endParaRPr lang="en-US" sz="1000" dirty="0">
+                        <a:latin typeface="Cambria" charset="0"/>
+                        <a:ea typeface="Cambria" charset="0"/>
+                        <a:cs typeface="Cambria" charset="0"/>
+                      </a:endParaRPr>
+                    </a:p>
+                  </a:txBody>
+                  <a:tcPr marL="91440" marR="91440" marT="45720" marB="45720" anchor="ctr">
+                    <a:lnL w="0" cap="flat" cmpd="sng" algn="ctr">
+                      <a:noFill/>
+                    </a:lnL>
+                    <a:lnR w="0" cap="flat" cmpd="sng" algn="ctr">
+                      <a:noFill/>
+                    </a:lnR>
+                    <a:lnT w="0" cap="flat" cmpd="sng" algn="ctr">
+                      <a:noFill/>
+                    </a:lnT>
+                    <a:lnB w="6350" cap="flat" cmpd="sng" algn="ctr">
+                      <a:solidFill>
+                        <a:srgbClr val="E6E4DE"/>
+                      </a:solidFill>
+                      <a:prstDash val="solid"/>
+                      <a:round/>
+                      <a:headEnd type="none" w="med" len="med"/>
+                      <a:tailEnd type="none" w="med" len="med"/>
+                    </a:lnB>
+                  </a:tcPr>
+                </a:tc>
+                <a:tc>
+                  <a:txBody>
+                    <a:bodyPr/>
+                    <a:lstStyle/>
+                    <a:p>
+                      <a:pPr indent="0" marL="0">
+                        <a:buNone/>
+                      </a:pPr>
+                      <a:r>
+                        <a:rPr lang="en-US" sz="1000" dirty="0">
+                          <a:solidFill>
+                            <a:srgbClr val="1A1A18"/>
+                          </a:solidFill>
+                          <a:latin typeface="Cambria" pitchFamily="34" charset="0"/>
+                          <a:ea typeface="Cambria" pitchFamily="34" charset="-122"/>
+                          <a:cs typeface="Cambria" pitchFamily="34" charset="-120"/>
+                        </a:rPr>
+                        <a:t>0,9091</a:t>
                       </a:r>
                       <a:endParaRPr lang="en-US" sz="1000" dirty="0">
                         <a:latin typeface="Cambria" charset="0"/>
@@ -26151,101 +26341,101 @@
                           <a:ea typeface="Cambria" pitchFamily="34" charset="-122"/>
                           <a:cs typeface="Cambria" pitchFamily="34" charset="-120"/>
                         </a:rPr>
-                        <a:t>Vicentinópolis</a:t>
-                      </a:r>
-                      <a:endParaRPr lang="en-US" sz="1000" dirty="0">
-                        <a:latin typeface="Cambria" charset="0"/>
-                        <a:ea typeface="Cambria" charset="0"/>
-                        <a:cs typeface="Cambria" charset="0"/>
-                      </a:endParaRPr>
-                    </a:p>
-                  </a:txBody>
-                  <a:tcPr marL="91440" marR="91440" marT="45720" marB="45720" anchor="ctr">
-                    <a:lnL w="0" cap="flat" cmpd="sng" algn="ctr">
-                      <a:noFill/>
-                    </a:lnL>
-                    <a:lnR w="0" cap="flat" cmpd="sng" algn="ctr">
-                      <a:noFill/>
-                    </a:lnR>
-                    <a:lnT w="0" cap="flat" cmpd="sng" algn="ctr">
-                      <a:noFill/>
-                    </a:lnT>
-                    <a:lnB w="6350" cap="flat" cmpd="sng" algn="ctr">
-                      <a:solidFill>
-                        <a:srgbClr val="E6E4DE"/>
-                      </a:solidFill>
-                      <a:prstDash val="solid"/>
-                      <a:round/>
-                      <a:headEnd type="none" w="med" len="med"/>
-                      <a:tailEnd type="none" w="med" len="med"/>
-                    </a:lnB>
-                  </a:tcPr>
-                </a:tc>
-                <a:tc>
-                  <a:txBody>
-                    <a:bodyPr/>
-                    <a:lstStyle/>
-                    <a:p>
-                      <a:pPr indent="0" marL="0">
-                        <a:buNone/>
-                      </a:pPr>
-                      <a:r>
-                        <a:rPr lang="en-US" sz="1000" dirty="0">
-                          <a:solidFill>
-                            <a:srgbClr val="1A1A18"/>
-                          </a:solidFill>
-                          <a:latin typeface="Cambria" pitchFamily="34" charset="0"/>
-                          <a:ea typeface="Cambria" pitchFamily="34" charset="-122"/>
-                          <a:cs typeface="Cambria" pitchFamily="34" charset="-120"/>
-                        </a:rPr>
-                        <a:t>11</a:t>
-                      </a:r>
-                      <a:endParaRPr lang="en-US" sz="1000" dirty="0">
-                        <a:latin typeface="Cambria" charset="0"/>
-                        <a:ea typeface="Cambria" charset="0"/>
-                        <a:cs typeface="Cambria" charset="0"/>
-                      </a:endParaRPr>
-                    </a:p>
-                  </a:txBody>
-                  <a:tcPr marL="91440" marR="91440" marT="45720" marB="45720" anchor="ctr">
-                    <a:lnL w="0" cap="flat" cmpd="sng" algn="ctr">
-                      <a:noFill/>
-                    </a:lnL>
-                    <a:lnR w="0" cap="flat" cmpd="sng" algn="ctr">
-                      <a:noFill/>
-                    </a:lnR>
-                    <a:lnT w="0" cap="flat" cmpd="sng" algn="ctr">
-                      <a:noFill/>
-                    </a:lnT>
-                    <a:lnB w="6350" cap="flat" cmpd="sng" algn="ctr">
-                      <a:solidFill>
-                        <a:srgbClr val="E6E4DE"/>
-                      </a:solidFill>
-                      <a:prstDash val="solid"/>
-                      <a:round/>
-                      <a:headEnd type="none" w="med" len="med"/>
-                      <a:tailEnd type="none" w="med" len="med"/>
-                    </a:lnB>
-                  </a:tcPr>
-                </a:tc>
-                <a:tc>
-                  <a:txBody>
-                    <a:bodyPr/>
-                    <a:lstStyle/>
-                    <a:p>
-                      <a:pPr indent="0" marL="0">
-                        <a:buNone/>
-                      </a:pPr>
-                      <a:r>
-                        <a:rPr lang="en-US" sz="1000" dirty="0">
-                          <a:solidFill>
-                            <a:srgbClr val="1A1A18"/>
-                          </a:solidFill>
-                          <a:latin typeface="Cambria" pitchFamily="34" charset="0"/>
-                          <a:ea typeface="Cambria" pitchFamily="34" charset="-122"/>
-                          <a:cs typeface="Cambria" pitchFamily="34" charset="-120"/>
-                        </a:rPr>
-                        <a:t>0,9091</a:t>
+                        <a:t>Guapiaçu</a:t>
+                      </a:r>
+                      <a:endParaRPr lang="en-US" sz="1000" dirty="0">
+                        <a:latin typeface="Cambria" charset="0"/>
+                        <a:ea typeface="Cambria" charset="0"/>
+                        <a:cs typeface="Cambria" charset="0"/>
+                      </a:endParaRPr>
+                    </a:p>
+                  </a:txBody>
+                  <a:tcPr marL="91440" marR="91440" marT="45720" marB="45720" anchor="ctr">
+                    <a:lnL w="0" cap="flat" cmpd="sng" algn="ctr">
+                      <a:noFill/>
+                    </a:lnL>
+                    <a:lnR w="0" cap="flat" cmpd="sng" algn="ctr">
+                      <a:noFill/>
+                    </a:lnR>
+                    <a:lnT w="0" cap="flat" cmpd="sng" algn="ctr">
+                      <a:noFill/>
+                    </a:lnT>
+                    <a:lnB w="6350" cap="flat" cmpd="sng" algn="ctr">
+                      <a:solidFill>
+                        <a:srgbClr val="E6E4DE"/>
+                      </a:solidFill>
+                      <a:prstDash val="solid"/>
+                      <a:round/>
+                      <a:headEnd type="none" w="med" len="med"/>
+                      <a:tailEnd type="none" w="med" len="med"/>
+                    </a:lnB>
+                  </a:tcPr>
+                </a:tc>
+                <a:tc>
+                  <a:txBody>
+                    <a:bodyPr/>
+                    <a:lstStyle/>
+                    <a:p>
+                      <a:pPr indent="0" marL="0">
+                        <a:buNone/>
+                      </a:pPr>
+                      <a:r>
+                        <a:rPr lang="en-US" sz="1000" dirty="0">
+                          <a:solidFill>
+                            <a:srgbClr val="1A1A18"/>
+                          </a:solidFill>
+                          <a:latin typeface="Cambria" pitchFamily="34" charset="0"/>
+                          <a:ea typeface="Cambria" pitchFamily="34" charset="-122"/>
+                          <a:cs typeface="Cambria" pitchFamily="34" charset="-120"/>
+                        </a:rPr>
+                        <a:t>37</a:t>
+                      </a:r>
+                      <a:endParaRPr lang="en-US" sz="1000" dirty="0">
+                        <a:latin typeface="Cambria" charset="0"/>
+                        <a:ea typeface="Cambria" charset="0"/>
+                        <a:cs typeface="Cambria" charset="0"/>
+                      </a:endParaRPr>
+                    </a:p>
+                  </a:txBody>
+                  <a:tcPr marL="91440" marR="91440" marT="45720" marB="45720" anchor="ctr">
+                    <a:lnL w="0" cap="flat" cmpd="sng" algn="ctr">
+                      <a:noFill/>
+                    </a:lnL>
+                    <a:lnR w="0" cap="flat" cmpd="sng" algn="ctr">
+                      <a:noFill/>
+                    </a:lnR>
+                    <a:lnT w="0" cap="flat" cmpd="sng" algn="ctr">
+                      <a:noFill/>
+                    </a:lnT>
+                    <a:lnB w="6350" cap="flat" cmpd="sng" algn="ctr">
+                      <a:solidFill>
+                        <a:srgbClr val="E6E4DE"/>
+                      </a:solidFill>
+                      <a:prstDash val="solid"/>
+                      <a:round/>
+                      <a:headEnd type="none" w="med" len="med"/>
+                      <a:tailEnd type="none" w="med" len="med"/>
+                    </a:lnB>
+                  </a:tcPr>
+                </a:tc>
+                <a:tc>
+                  <a:txBody>
+                    <a:bodyPr/>
+                    <a:lstStyle/>
+                    <a:p>
+                      <a:pPr indent="0" marL="0">
+                        <a:buNone/>
+                      </a:pPr>
+                      <a:r>
+                        <a:rPr lang="en-US" sz="1000" dirty="0">
+                          <a:solidFill>
+                            <a:srgbClr val="1A1A18"/>
+                          </a:solidFill>
+                          <a:latin typeface="Cambria" pitchFamily="34" charset="0"/>
+                          <a:ea typeface="Cambria" pitchFamily="34" charset="-122"/>
+                          <a:cs typeface="Cambria" pitchFamily="34" charset="-120"/>
+                        </a:rPr>
+                        <a:t>0,9156</a:t>
                       </a:r>
                       <a:endParaRPr lang="en-US" sz="1000" dirty="0">
                         <a:latin typeface="Cambria" charset="0"/>
@@ -26294,7 +26484,7 @@
                           <a:ea typeface="Cambria" pitchFamily="34" charset="-122"/>
                           <a:cs typeface="Cambria" pitchFamily="34" charset="-120"/>
                         </a:rPr>
-                        <a:t>Guapiaçu</a:t>
+                        <a:t>Taió</a:t>
                       </a:r>
                       <a:endParaRPr lang="en-US" sz="1000" dirty="0">
                         <a:latin typeface="Cambria" charset="0"/>
@@ -26388,7 +26578,7 @@
                           <a:ea typeface="Cambria" pitchFamily="34" charset="-122"/>
                           <a:cs typeface="Cambria" pitchFamily="34" charset="-120"/>
                         </a:rPr>
-                        <a:t>0,9156</a:t>
+                        <a:t>0,9173</a:t>
                       </a:r>
                       <a:endParaRPr lang="en-US" sz="1000" dirty="0">
                         <a:latin typeface="Cambria" charset="0"/>
@@ -26437,101 +26627,101 @@
                           <a:ea typeface="Cambria" pitchFamily="34" charset="-122"/>
                           <a:cs typeface="Cambria" pitchFamily="34" charset="-120"/>
                         </a:rPr>
-                        <a:t>Taió</a:t>
-                      </a:r>
-                      <a:endParaRPr lang="en-US" sz="1000" dirty="0">
-                        <a:latin typeface="Cambria" charset="0"/>
-                        <a:ea typeface="Cambria" charset="0"/>
-                        <a:cs typeface="Cambria" charset="0"/>
-                      </a:endParaRPr>
-                    </a:p>
-                  </a:txBody>
-                  <a:tcPr marL="91440" marR="91440" marT="45720" marB="45720" anchor="ctr">
-                    <a:lnL w="0" cap="flat" cmpd="sng" algn="ctr">
-                      <a:noFill/>
-                    </a:lnL>
-                    <a:lnR w="0" cap="flat" cmpd="sng" algn="ctr">
-                      <a:noFill/>
-                    </a:lnR>
-                    <a:lnT w="0" cap="flat" cmpd="sng" algn="ctr">
-                      <a:noFill/>
-                    </a:lnT>
-                    <a:lnB w="6350" cap="flat" cmpd="sng" algn="ctr">
-                      <a:solidFill>
-                        <a:srgbClr val="E6E4DE"/>
-                      </a:solidFill>
-                      <a:prstDash val="solid"/>
-                      <a:round/>
-                      <a:headEnd type="none" w="med" len="med"/>
-                      <a:tailEnd type="none" w="med" len="med"/>
-                    </a:lnB>
-                  </a:tcPr>
-                </a:tc>
-                <a:tc>
-                  <a:txBody>
-                    <a:bodyPr/>
-                    <a:lstStyle/>
-                    <a:p>
-                      <a:pPr indent="0" marL="0">
-                        <a:buNone/>
-                      </a:pPr>
-                      <a:r>
-                        <a:rPr lang="en-US" sz="1000" dirty="0">
-                          <a:solidFill>
-                            <a:srgbClr val="1A1A18"/>
-                          </a:solidFill>
-                          <a:latin typeface="Cambria" pitchFamily="34" charset="0"/>
-                          <a:ea typeface="Cambria" pitchFamily="34" charset="-122"/>
-                          <a:cs typeface="Cambria" pitchFamily="34" charset="-120"/>
-                        </a:rPr>
-                        <a:t>37</a:t>
-                      </a:r>
-                      <a:endParaRPr lang="en-US" sz="1000" dirty="0">
-                        <a:latin typeface="Cambria" charset="0"/>
-                        <a:ea typeface="Cambria" charset="0"/>
-                        <a:cs typeface="Cambria" charset="0"/>
-                      </a:endParaRPr>
-                    </a:p>
-                  </a:txBody>
-                  <a:tcPr marL="91440" marR="91440" marT="45720" marB="45720" anchor="ctr">
-                    <a:lnL w="0" cap="flat" cmpd="sng" algn="ctr">
-                      <a:noFill/>
-                    </a:lnL>
-                    <a:lnR w="0" cap="flat" cmpd="sng" algn="ctr">
-                      <a:noFill/>
-                    </a:lnR>
-                    <a:lnT w="0" cap="flat" cmpd="sng" algn="ctr">
-                      <a:noFill/>
-                    </a:lnT>
-                    <a:lnB w="6350" cap="flat" cmpd="sng" algn="ctr">
-                      <a:solidFill>
-                        <a:srgbClr val="E6E4DE"/>
-                      </a:solidFill>
-                      <a:prstDash val="solid"/>
-                      <a:round/>
-                      <a:headEnd type="none" w="med" len="med"/>
-                      <a:tailEnd type="none" w="med" len="med"/>
-                    </a:lnB>
-                  </a:tcPr>
-                </a:tc>
-                <a:tc>
-                  <a:txBody>
-                    <a:bodyPr/>
-                    <a:lstStyle/>
-                    <a:p>
-                      <a:pPr indent="0" marL="0">
-                        <a:buNone/>
-                      </a:pPr>
-                      <a:r>
-                        <a:rPr lang="en-US" sz="1000" dirty="0">
-                          <a:solidFill>
-                            <a:srgbClr val="1A1A18"/>
-                          </a:solidFill>
-                          <a:latin typeface="Cambria" pitchFamily="34" charset="0"/>
-                          <a:ea typeface="Cambria" pitchFamily="34" charset="-122"/>
-                          <a:cs typeface="Cambria" pitchFamily="34" charset="-120"/>
-                        </a:rPr>
-                        <a:t>0,9173</a:t>
+                        <a:t>Belo Horizonte</a:t>
+                      </a:r>
+                      <a:endParaRPr lang="en-US" sz="1000" dirty="0">
+                        <a:latin typeface="Cambria" charset="0"/>
+                        <a:ea typeface="Cambria" charset="0"/>
+                        <a:cs typeface="Cambria" charset="0"/>
+                      </a:endParaRPr>
+                    </a:p>
+                  </a:txBody>
+                  <a:tcPr marL="91440" marR="91440" marT="45720" marB="45720" anchor="ctr">
+                    <a:lnL w="0" cap="flat" cmpd="sng" algn="ctr">
+                      <a:noFill/>
+                    </a:lnL>
+                    <a:lnR w="0" cap="flat" cmpd="sng" algn="ctr">
+                      <a:noFill/>
+                    </a:lnR>
+                    <a:lnT w="0" cap="flat" cmpd="sng" algn="ctr">
+                      <a:noFill/>
+                    </a:lnT>
+                    <a:lnB w="6350" cap="flat" cmpd="sng" algn="ctr">
+                      <a:solidFill>
+                        <a:srgbClr val="E6E4DE"/>
+                      </a:solidFill>
+                      <a:prstDash val="solid"/>
+                      <a:round/>
+                      <a:headEnd type="none" w="med" len="med"/>
+                      <a:tailEnd type="none" w="med" len="med"/>
+                    </a:lnB>
+                  </a:tcPr>
+                </a:tc>
+                <a:tc>
+                  <a:txBody>
+                    <a:bodyPr/>
+                    <a:lstStyle/>
+                    <a:p>
+                      <a:pPr indent="0" marL="0">
+                        <a:buNone/>
+                      </a:pPr>
+                      <a:r>
+                        <a:rPr lang="en-US" sz="1000" dirty="0">
+                          <a:solidFill>
+                            <a:srgbClr val="1A1A18"/>
+                          </a:solidFill>
+                          <a:latin typeface="Cambria" pitchFamily="34" charset="0"/>
+                          <a:ea typeface="Cambria" pitchFamily="34" charset="-122"/>
+                          <a:cs typeface="Cambria" pitchFamily="34" charset="-120"/>
+                        </a:rPr>
+                        <a:t>3.499</a:t>
+                      </a:r>
+                      <a:endParaRPr lang="en-US" sz="1000" dirty="0">
+                        <a:latin typeface="Cambria" charset="0"/>
+                        <a:ea typeface="Cambria" charset="0"/>
+                        <a:cs typeface="Cambria" charset="0"/>
+                      </a:endParaRPr>
+                    </a:p>
+                  </a:txBody>
+                  <a:tcPr marL="91440" marR="91440" marT="45720" marB="45720" anchor="ctr">
+                    <a:lnL w="0" cap="flat" cmpd="sng" algn="ctr">
+                      <a:noFill/>
+                    </a:lnL>
+                    <a:lnR w="0" cap="flat" cmpd="sng" algn="ctr">
+                      <a:noFill/>
+                    </a:lnR>
+                    <a:lnT w="0" cap="flat" cmpd="sng" algn="ctr">
+                      <a:noFill/>
+                    </a:lnT>
+                    <a:lnB w="6350" cap="flat" cmpd="sng" algn="ctr">
+                      <a:solidFill>
+                        <a:srgbClr val="E6E4DE"/>
+                      </a:solidFill>
+                      <a:prstDash val="solid"/>
+                      <a:round/>
+                      <a:headEnd type="none" w="med" len="med"/>
+                      <a:tailEnd type="none" w="med" len="med"/>
+                    </a:lnB>
+                  </a:tcPr>
+                </a:tc>
+                <a:tc>
+                  <a:txBody>
+                    <a:bodyPr/>
+                    <a:lstStyle/>
+                    <a:p>
+                      <a:pPr indent="0" marL="0">
+                        <a:buNone/>
+                      </a:pPr>
+                      <a:r>
+                        <a:rPr lang="en-US" sz="1000" dirty="0">
+                          <a:solidFill>
+                            <a:srgbClr val="1A1A18"/>
+                          </a:solidFill>
+                          <a:latin typeface="Cambria" pitchFamily="34" charset="0"/>
+                          <a:ea typeface="Cambria" pitchFamily="34" charset="-122"/>
+                          <a:cs typeface="Cambria" pitchFamily="34" charset="-120"/>
+                        </a:rPr>
+                        <a:t>0,9281</a:t>
                       </a:r>
                       <a:endParaRPr lang="en-US" sz="1000" dirty="0">
                         <a:latin typeface="Cambria" charset="0"/>
@@ -26580,101 +26770,101 @@
                           <a:ea typeface="Cambria" pitchFamily="34" charset="-122"/>
                           <a:cs typeface="Cambria" pitchFamily="34" charset="-120"/>
                         </a:rPr>
-                        <a:t>Belo Horizonte</a:t>
-                      </a:r>
-                      <a:endParaRPr lang="en-US" sz="1000" dirty="0">
-                        <a:latin typeface="Cambria" charset="0"/>
-                        <a:ea typeface="Cambria" charset="0"/>
-                        <a:cs typeface="Cambria" charset="0"/>
-                      </a:endParaRPr>
-                    </a:p>
-                  </a:txBody>
-                  <a:tcPr marL="91440" marR="91440" marT="45720" marB="45720" anchor="ctr">
-                    <a:lnL w="0" cap="flat" cmpd="sng" algn="ctr">
-                      <a:noFill/>
-                    </a:lnL>
-                    <a:lnR w="0" cap="flat" cmpd="sng" algn="ctr">
-                      <a:noFill/>
-                    </a:lnR>
-                    <a:lnT w="0" cap="flat" cmpd="sng" algn="ctr">
-                      <a:noFill/>
-                    </a:lnT>
-                    <a:lnB w="6350" cap="flat" cmpd="sng" algn="ctr">
-                      <a:solidFill>
-                        <a:srgbClr val="E6E4DE"/>
-                      </a:solidFill>
-                      <a:prstDash val="solid"/>
-                      <a:round/>
-                      <a:headEnd type="none" w="med" len="med"/>
-                      <a:tailEnd type="none" w="med" len="med"/>
-                    </a:lnB>
-                  </a:tcPr>
-                </a:tc>
-                <a:tc>
-                  <a:txBody>
-                    <a:bodyPr/>
-                    <a:lstStyle/>
-                    <a:p>
-                      <a:pPr indent="0" marL="0">
-                        <a:buNone/>
-                      </a:pPr>
-                      <a:r>
-                        <a:rPr lang="en-US" sz="1000" dirty="0">
-                          <a:solidFill>
-                            <a:srgbClr val="1A1A18"/>
-                          </a:solidFill>
-                          <a:latin typeface="Cambria" pitchFamily="34" charset="0"/>
-                          <a:ea typeface="Cambria" pitchFamily="34" charset="-122"/>
-                          <a:cs typeface="Cambria" pitchFamily="34" charset="-120"/>
-                        </a:rPr>
-                        <a:t>3.499</a:t>
-                      </a:r>
-                      <a:endParaRPr lang="en-US" sz="1000" dirty="0">
-                        <a:latin typeface="Cambria" charset="0"/>
-                        <a:ea typeface="Cambria" charset="0"/>
-                        <a:cs typeface="Cambria" charset="0"/>
-                      </a:endParaRPr>
-                    </a:p>
-                  </a:txBody>
-                  <a:tcPr marL="91440" marR="91440" marT="45720" marB="45720" anchor="ctr">
-                    <a:lnL w="0" cap="flat" cmpd="sng" algn="ctr">
-                      <a:noFill/>
-                    </a:lnL>
-                    <a:lnR w="0" cap="flat" cmpd="sng" algn="ctr">
-                      <a:noFill/>
-                    </a:lnR>
-                    <a:lnT w="0" cap="flat" cmpd="sng" algn="ctr">
-                      <a:noFill/>
-                    </a:lnT>
-                    <a:lnB w="6350" cap="flat" cmpd="sng" algn="ctr">
-                      <a:solidFill>
-                        <a:srgbClr val="E6E4DE"/>
-                      </a:solidFill>
-                      <a:prstDash val="solid"/>
-                      <a:round/>
-                      <a:headEnd type="none" w="med" len="med"/>
-                      <a:tailEnd type="none" w="med" len="med"/>
-                    </a:lnB>
-                  </a:tcPr>
-                </a:tc>
-                <a:tc>
-                  <a:txBody>
-                    <a:bodyPr/>
-                    <a:lstStyle/>
-                    <a:p>
-                      <a:pPr indent="0" marL="0">
-                        <a:buNone/>
-                      </a:pPr>
-                      <a:r>
-                        <a:rPr lang="en-US" sz="1000" dirty="0">
-                          <a:solidFill>
-                            <a:srgbClr val="1A1A18"/>
-                          </a:solidFill>
-                          <a:latin typeface="Cambria" pitchFamily="34" charset="0"/>
-                          <a:ea typeface="Cambria" pitchFamily="34" charset="-122"/>
-                          <a:cs typeface="Cambria" pitchFamily="34" charset="-120"/>
-                        </a:rPr>
-                        <a:t>0,9281</a:t>
+                        <a:t>Divinópolis</a:t>
+                      </a:r>
+                      <a:endParaRPr lang="en-US" sz="1000" dirty="0">
+                        <a:latin typeface="Cambria" charset="0"/>
+                        <a:ea typeface="Cambria" charset="0"/>
+                        <a:cs typeface="Cambria" charset="0"/>
+                      </a:endParaRPr>
+                    </a:p>
+                  </a:txBody>
+                  <a:tcPr marL="91440" marR="91440" marT="45720" marB="45720" anchor="ctr">
+                    <a:lnL w="0" cap="flat" cmpd="sng" algn="ctr">
+                      <a:noFill/>
+                    </a:lnL>
+                    <a:lnR w="0" cap="flat" cmpd="sng" algn="ctr">
+                      <a:noFill/>
+                    </a:lnR>
+                    <a:lnT w="0" cap="flat" cmpd="sng" algn="ctr">
+                      <a:noFill/>
+                    </a:lnT>
+                    <a:lnB w="6350" cap="flat" cmpd="sng" algn="ctr">
+                      <a:solidFill>
+                        <a:srgbClr val="E6E4DE"/>
+                      </a:solidFill>
+                      <a:prstDash val="solid"/>
+                      <a:round/>
+                      <a:headEnd type="none" w="med" len="med"/>
+                      <a:tailEnd type="none" w="med" len="med"/>
+                    </a:lnB>
+                  </a:tcPr>
+                </a:tc>
+                <a:tc>
+                  <a:txBody>
+                    <a:bodyPr/>
+                    <a:lstStyle/>
+                    <a:p>
+                      <a:pPr indent="0" marL="0">
+                        <a:buNone/>
+                      </a:pPr>
+                      <a:r>
+                        <a:rPr lang="en-US" sz="1000" dirty="0">
+                          <a:solidFill>
+                            <a:srgbClr val="1A1A18"/>
+                          </a:solidFill>
+                          <a:latin typeface="Cambria" pitchFamily="34" charset="0"/>
+                          <a:ea typeface="Cambria" pitchFamily="34" charset="-122"/>
+                          <a:cs typeface="Cambria" pitchFamily="34" charset="-120"/>
+                        </a:rPr>
+                        <a:t>428</a:t>
+                      </a:r>
+                      <a:endParaRPr lang="en-US" sz="1000" dirty="0">
+                        <a:latin typeface="Cambria" charset="0"/>
+                        <a:ea typeface="Cambria" charset="0"/>
+                        <a:cs typeface="Cambria" charset="0"/>
+                      </a:endParaRPr>
+                    </a:p>
+                  </a:txBody>
+                  <a:tcPr marL="91440" marR="91440" marT="45720" marB="45720" anchor="ctr">
+                    <a:lnL w="0" cap="flat" cmpd="sng" algn="ctr">
+                      <a:noFill/>
+                    </a:lnL>
+                    <a:lnR w="0" cap="flat" cmpd="sng" algn="ctr">
+                      <a:noFill/>
+                    </a:lnR>
+                    <a:lnT w="0" cap="flat" cmpd="sng" algn="ctr">
+                      <a:noFill/>
+                    </a:lnT>
+                    <a:lnB w="6350" cap="flat" cmpd="sng" algn="ctr">
+                      <a:solidFill>
+                        <a:srgbClr val="E6E4DE"/>
+                      </a:solidFill>
+                      <a:prstDash val="solid"/>
+                      <a:round/>
+                      <a:headEnd type="none" w="med" len="med"/>
+                      <a:tailEnd type="none" w="med" len="med"/>
+                    </a:lnB>
+                  </a:tcPr>
+                </a:tc>
+                <a:tc>
+                  <a:txBody>
+                    <a:bodyPr/>
+                    <a:lstStyle/>
+                    <a:p>
+                      <a:pPr indent="0" marL="0">
+                        <a:buNone/>
+                      </a:pPr>
+                      <a:r>
+                        <a:rPr lang="en-US" sz="1000" dirty="0">
+                          <a:solidFill>
+                            <a:srgbClr val="1A1A18"/>
+                          </a:solidFill>
+                          <a:latin typeface="Cambria" pitchFamily="34" charset="0"/>
+                          <a:ea typeface="Cambria" pitchFamily="34" charset="-122"/>
+                          <a:cs typeface="Cambria" pitchFamily="34" charset="-120"/>
+                        </a:rPr>
+                        <a:t>0,9328</a:t>
                       </a:r>
                       <a:endParaRPr lang="en-US" sz="1000" dirty="0">
                         <a:latin typeface="Cambria" charset="0"/>
@@ -26723,101 +26913,101 @@
                           <a:ea typeface="Cambria" pitchFamily="34" charset="-122"/>
                           <a:cs typeface="Cambria" pitchFamily="34" charset="-120"/>
                         </a:rPr>
-                        <a:t>Divinópolis</a:t>
-                      </a:r>
-                      <a:endParaRPr lang="en-US" sz="1000" dirty="0">
-                        <a:latin typeface="Cambria" charset="0"/>
-                        <a:ea typeface="Cambria" charset="0"/>
-                        <a:cs typeface="Cambria" charset="0"/>
-                      </a:endParaRPr>
-                    </a:p>
-                  </a:txBody>
-                  <a:tcPr marL="91440" marR="91440" marT="45720" marB="45720" anchor="ctr">
-                    <a:lnL w="0" cap="flat" cmpd="sng" algn="ctr">
-                      <a:noFill/>
-                    </a:lnL>
-                    <a:lnR w="0" cap="flat" cmpd="sng" algn="ctr">
-                      <a:noFill/>
-                    </a:lnR>
-                    <a:lnT w="0" cap="flat" cmpd="sng" algn="ctr">
-                      <a:noFill/>
-                    </a:lnT>
-                    <a:lnB w="6350" cap="flat" cmpd="sng" algn="ctr">
-                      <a:solidFill>
-                        <a:srgbClr val="E6E4DE"/>
-                      </a:solidFill>
-                      <a:prstDash val="solid"/>
-                      <a:round/>
-                      <a:headEnd type="none" w="med" len="med"/>
-                      <a:tailEnd type="none" w="med" len="med"/>
-                    </a:lnB>
-                  </a:tcPr>
-                </a:tc>
-                <a:tc>
-                  <a:txBody>
-                    <a:bodyPr/>
-                    <a:lstStyle/>
-                    <a:p>
-                      <a:pPr indent="0" marL="0">
-                        <a:buNone/>
-                      </a:pPr>
-                      <a:r>
-                        <a:rPr lang="en-US" sz="1000" dirty="0">
-                          <a:solidFill>
-                            <a:srgbClr val="1A1A18"/>
-                          </a:solidFill>
-                          <a:latin typeface="Cambria" pitchFamily="34" charset="0"/>
-                          <a:ea typeface="Cambria" pitchFamily="34" charset="-122"/>
-                          <a:cs typeface="Cambria" pitchFamily="34" charset="-120"/>
-                        </a:rPr>
-                        <a:t>428</a:t>
-                      </a:r>
-                      <a:endParaRPr lang="en-US" sz="1000" dirty="0">
-                        <a:latin typeface="Cambria" charset="0"/>
-                        <a:ea typeface="Cambria" charset="0"/>
-                        <a:cs typeface="Cambria" charset="0"/>
-                      </a:endParaRPr>
-                    </a:p>
-                  </a:txBody>
-                  <a:tcPr marL="91440" marR="91440" marT="45720" marB="45720" anchor="ctr">
-                    <a:lnL w="0" cap="flat" cmpd="sng" algn="ctr">
-                      <a:noFill/>
-                    </a:lnL>
-                    <a:lnR w="0" cap="flat" cmpd="sng" algn="ctr">
-                      <a:noFill/>
-                    </a:lnR>
-                    <a:lnT w="0" cap="flat" cmpd="sng" algn="ctr">
-                      <a:noFill/>
-                    </a:lnT>
-                    <a:lnB w="6350" cap="flat" cmpd="sng" algn="ctr">
-                      <a:solidFill>
-                        <a:srgbClr val="E6E4DE"/>
-                      </a:solidFill>
-                      <a:prstDash val="solid"/>
-                      <a:round/>
-                      <a:headEnd type="none" w="med" len="med"/>
-                      <a:tailEnd type="none" w="med" len="med"/>
-                    </a:lnB>
-                  </a:tcPr>
-                </a:tc>
-                <a:tc>
-                  <a:txBody>
-                    <a:bodyPr/>
-                    <a:lstStyle/>
-                    <a:p>
-                      <a:pPr indent="0" marL="0">
-                        <a:buNone/>
-                      </a:pPr>
-                      <a:r>
-                        <a:rPr lang="en-US" sz="1000" dirty="0">
-                          <a:solidFill>
-                            <a:srgbClr val="1A1A18"/>
-                          </a:solidFill>
-                          <a:latin typeface="Cambria" pitchFamily="34" charset="0"/>
-                          <a:ea typeface="Cambria" pitchFamily="34" charset="-122"/>
-                          <a:cs typeface="Cambria" pitchFamily="34" charset="-120"/>
-                        </a:rPr>
-                        <a:t>0,9328</a:t>
+                        <a:t>Rio de Janeiro</a:t>
+                      </a:r>
+                      <a:endParaRPr lang="en-US" sz="1000" dirty="0">
+                        <a:latin typeface="Cambria" charset="0"/>
+                        <a:ea typeface="Cambria" charset="0"/>
+                        <a:cs typeface="Cambria" charset="0"/>
+                      </a:endParaRPr>
+                    </a:p>
+                  </a:txBody>
+                  <a:tcPr marL="91440" marR="91440" marT="45720" marB="45720" anchor="ctr">
+                    <a:lnL w="0" cap="flat" cmpd="sng" algn="ctr">
+                      <a:noFill/>
+                    </a:lnL>
+                    <a:lnR w="0" cap="flat" cmpd="sng" algn="ctr">
+                      <a:noFill/>
+                    </a:lnR>
+                    <a:lnT w="0" cap="flat" cmpd="sng" algn="ctr">
+                      <a:noFill/>
+                    </a:lnT>
+                    <a:lnB w="6350" cap="flat" cmpd="sng" algn="ctr">
+                      <a:solidFill>
+                        <a:srgbClr val="E6E4DE"/>
+                      </a:solidFill>
+                      <a:prstDash val="solid"/>
+                      <a:round/>
+                      <a:headEnd type="none" w="med" len="med"/>
+                      <a:tailEnd type="none" w="med" len="med"/>
+                    </a:lnB>
+                  </a:tcPr>
+                </a:tc>
+                <a:tc>
+                  <a:txBody>
+                    <a:bodyPr/>
+                    <a:lstStyle/>
+                    <a:p>
+                      <a:pPr indent="0" marL="0">
+                        <a:buNone/>
+                      </a:pPr>
+                      <a:r>
+                        <a:rPr lang="en-US" sz="1000" dirty="0">
+                          <a:solidFill>
+                            <a:srgbClr val="1A1A18"/>
+                          </a:solidFill>
+                          <a:latin typeface="Cambria" pitchFamily="34" charset="0"/>
+                          <a:ea typeface="Cambria" pitchFamily="34" charset="-122"/>
+                          <a:cs typeface="Cambria" pitchFamily="34" charset="-120"/>
+                        </a:rPr>
+                        <a:t>9.479</a:t>
+                      </a:r>
+                      <a:endParaRPr lang="en-US" sz="1000" dirty="0">
+                        <a:latin typeface="Cambria" charset="0"/>
+                        <a:ea typeface="Cambria" charset="0"/>
+                        <a:cs typeface="Cambria" charset="0"/>
+                      </a:endParaRPr>
+                    </a:p>
+                  </a:txBody>
+                  <a:tcPr marL="91440" marR="91440" marT="45720" marB="45720" anchor="ctr">
+                    <a:lnL w="0" cap="flat" cmpd="sng" algn="ctr">
+                      <a:noFill/>
+                    </a:lnL>
+                    <a:lnR w="0" cap="flat" cmpd="sng" algn="ctr">
+                      <a:noFill/>
+                    </a:lnR>
+                    <a:lnT w="0" cap="flat" cmpd="sng" algn="ctr">
+                      <a:noFill/>
+                    </a:lnT>
+                    <a:lnB w="6350" cap="flat" cmpd="sng" algn="ctr">
+                      <a:solidFill>
+                        <a:srgbClr val="E6E4DE"/>
+                      </a:solidFill>
+                      <a:prstDash val="solid"/>
+                      <a:round/>
+                      <a:headEnd type="none" w="med" len="med"/>
+                      <a:tailEnd type="none" w="med" len="med"/>
+                    </a:lnB>
+                  </a:tcPr>
+                </a:tc>
+                <a:tc>
+                  <a:txBody>
+                    <a:bodyPr/>
+                    <a:lstStyle/>
+                    <a:p>
+                      <a:pPr indent="0" marL="0">
+                        <a:buNone/>
+                      </a:pPr>
+                      <a:r>
+                        <a:rPr lang="en-US" sz="1000" dirty="0">
+                          <a:solidFill>
+                            <a:srgbClr val="1A1A18"/>
+                          </a:solidFill>
+                          <a:latin typeface="Cambria" pitchFamily="34" charset="0"/>
+                          <a:ea typeface="Cambria" pitchFamily="34" charset="-122"/>
+                          <a:cs typeface="Cambria" pitchFamily="34" charset="-120"/>
+                        </a:rPr>
+                        <a:t>0,9369</a:t>
                       </a:r>
                       <a:endParaRPr lang="en-US" sz="1000" dirty="0">
                         <a:latin typeface="Cambria" charset="0"/>
@@ -26866,101 +27056,101 @@
                           <a:ea typeface="Cambria" pitchFamily="34" charset="-122"/>
                           <a:cs typeface="Cambria" pitchFamily="34" charset="-120"/>
                         </a:rPr>
-                        <a:t>Rio de Janeiro</a:t>
-                      </a:r>
-                      <a:endParaRPr lang="en-US" sz="1000" dirty="0">
-                        <a:latin typeface="Cambria" charset="0"/>
-                        <a:ea typeface="Cambria" charset="0"/>
-                        <a:cs typeface="Cambria" charset="0"/>
-                      </a:endParaRPr>
-                    </a:p>
-                  </a:txBody>
-                  <a:tcPr marL="91440" marR="91440" marT="45720" marB="45720" anchor="ctr">
-                    <a:lnL w="0" cap="flat" cmpd="sng" algn="ctr">
-                      <a:noFill/>
-                    </a:lnL>
-                    <a:lnR w="0" cap="flat" cmpd="sng" algn="ctr">
-                      <a:noFill/>
-                    </a:lnR>
-                    <a:lnT w="0" cap="flat" cmpd="sng" algn="ctr">
-                      <a:noFill/>
-                    </a:lnT>
-                    <a:lnB w="6350" cap="flat" cmpd="sng" algn="ctr">
-                      <a:solidFill>
-                        <a:srgbClr val="E6E4DE"/>
-                      </a:solidFill>
-                      <a:prstDash val="solid"/>
-                      <a:round/>
-                      <a:headEnd type="none" w="med" len="med"/>
-                      <a:tailEnd type="none" w="med" len="med"/>
-                    </a:lnB>
-                  </a:tcPr>
-                </a:tc>
-                <a:tc>
-                  <a:txBody>
-                    <a:bodyPr/>
-                    <a:lstStyle/>
-                    <a:p>
-                      <a:pPr indent="0" marL="0">
-                        <a:buNone/>
-                      </a:pPr>
-                      <a:r>
-                        <a:rPr lang="en-US" sz="1000" dirty="0">
-                          <a:solidFill>
-                            <a:srgbClr val="1A1A18"/>
-                          </a:solidFill>
-                          <a:latin typeface="Cambria" pitchFamily="34" charset="0"/>
-                          <a:ea typeface="Cambria" pitchFamily="34" charset="-122"/>
-                          <a:cs typeface="Cambria" pitchFamily="34" charset="-120"/>
-                        </a:rPr>
-                        <a:t>9.479</a:t>
-                      </a:r>
-                      <a:endParaRPr lang="en-US" sz="1000" dirty="0">
-                        <a:latin typeface="Cambria" charset="0"/>
-                        <a:ea typeface="Cambria" charset="0"/>
-                        <a:cs typeface="Cambria" charset="0"/>
-                      </a:endParaRPr>
-                    </a:p>
-                  </a:txBody>
-                  <a:tcPr marL="91440" marR="91440" marT="45720" marB="45720" anchor="ctr">
-                    <a:lnL w="0" cap="flat" cmpd="sng" algn="ctr">
-                      <a:noFill/>
-                    </a:lnL>
-                    <a:lnR w="0" cap="flat" cmpd="sng" algn="ctr">
-                      <a:noFill/>
-                    </a:lnR>
-                    <a:lnT w="0" cap="flat" cmpd="sng" algn="ctr">
-                      <a:noFill/>
-                    </a:lnT>
-                    <a:lnB w="6350" cap="flat" cmpd="sng" algn="ctr">
-                      <a:solidFill>
-                        <a:srgbClr val="E6E4DE"/>
-                      </a:solidFill>
-                      <a:prstDash val="solid"/>
-                      <a:round/>
-                      <a:headEnd type="none" w="med" len="med"/>
-                      <a:tailEnd type="none" w="med" len="med"/>
-                    </a:lnB>
-                  </a:tcPr>
-                </a:tc>
-                <a:tc>
-                  <a:txBody>
-                    <a:bodyPr/>
-                    <a:lstStyle/>
-                    <a:p>
-                      <a:pPr indent="0" marL="0">
-                        <a:buNone/>
-                      </a:pPr>
-                      <a:r>
-                        <a:rPr lang="en-US" sz="1000" dirty="0">
-                          <a:solidFill>
-                            <a:srgbClr val="1A1A18"/>
-                          </a:solidFill>
-                          <a:latin typeface="Cambria" pitchFamily="34" charset="0"/>
-                          <a:ea typeface="Cambria" pitchFamily="34" charset="-122"/>
-                          <a:cs typeface="Cambria" pitchFamily="34" charset="-120"/>
-                        </a:rPr>
-                        <a:t>0,9369</a:t>
+                        <a:t>São Paulo</a:t>
+                      </a:r>
+                      <a:endParaRPr lang="en-US" sz="1000" dirty="0">
+                        <a:latin typeface="Cambria" charset="0"/>
+                        <a:ea typeface="Cambria" charset="0"/>
+                        <a:cs typeface="Cambria" charset="0"/>
+                      </a:endParaRPr>
+                    </a:p>
+                  </a:txBody>
+                  <a:tcPr marL="91440" marR="91440" marT="45720" marB="45720" anchor="ctr">
+                    <a:lnL w="0" cap="flat" cmpd="sng" algn="ctr">
+                      <a:noFill/>
+                    </a:lnL>
+                    <a:lnR w="0" cap="flat" cmpd="sng" algn="ctr">
+                      <a:noFill/>
+                    </a:lnR>
+                    <a:lnT w="0" cap="flat" cmpd="sng" algn="ctr">
+                      <a:noFill/>
+                    </a:lnT>
+                    <a:lnB w="6350" cap="flat" cmpd="sng" algn="ctr">
+                      <a:solidFill>
+                        <a:srgbClr val="E6E4DE"/>
+                      </a:solidFill>
+                      <a:prstDash val="solid"/>
+                      <a:round/>
+                      <a:headEnd type="none" w="med" len="med"/>
+                      <a:tailEnd type="none" w="med" len="med"/>
+                    </a:lnB>
+                  </a:tcPr>
+                </a:tc>
+                <a:tc>
+                  <a:txBody>
+                    <a:bodyPr/>
+                    <a:lstStyle/>
+                    <a:p>
+                      <a:pPr indent="0" marL="0">
+                        <a:buNone/>
+                      </a:pPr>
+                      <a:r>
+                        <a:rPr lang="en-US" sz="1000" dirty="0">
+                          <a:solidFill>
+                            <a:srgbClr val="1A1A18"/>
+                          </a:solidFill>
+                          <a:latin typeface="Cambria" pitchFamily="34" charset="0"/>
+                          <a:ea typeface="Cambria" pitchFamily="34" charset="-122"/>
+                          <a:cs typeface="Cambria" pitchFamily="34" charset="-120"/>
+                        </a:rPr>
+                        <a:t>19.433</a:t>
+                      </a:r>
+                      <a:endParaRPr lang="en-US" sz="1000" dirty="0">
+                        <a:latin typeface="Cambria" charset="0"/>
+                        <a:ea typeface="Cambria" charset="0"/>
+                        <a:cs typeface="Cambria" charset="0"/>
+                      </a:endParaRPr>
+                    </a:p>
+                  </a:txBody>
+                  <a:tcPr marL="91440" marR="91440" marT="45720" marB="45720" anchor="ctr">
+                    <a:lnL w="0" cap="flat" cmpd="sng" algn="ctr">
+                      <a:noFill/>
+                    </a:lnL>
+                    <a:lnR w="0" cap="flat" cmpd="sng" algn="ctr">
+                      <a:noFill/>
+                    </a:lnR>
+                    <a:lnT w="0" cap="flat" cmpd="sng" algn="ctr">
+                      <a:noFill/>
+                    </a:lnT>
+                    <a:lnB w="6350" cap="flat" cmpd="sng" algn="ctr">
+                      <a:solidFill>
+                        <a:srgbClr val="E6E4DE"/>
+                      </a:solidFill>
+                      <a:prstDash val="solid"/>
+                      <a:round/>
+                      <a:headEnd type="none" w="med" len="med"/>
+                      <a:tailEnd type="none" w="med" len="med"/>
+                    </a:lnB>
+                  </a:tcPr>
+                </a:tc>
+                <a:tc>
+                  <a:txBody>
+                    <a:bodyPr/>
+                    <a:lstStyle/>
+                    <a:p>
+                      <a:pPr indent="0" marL="0">
+                        <a:buNone/>
+                      </a:pPr>
+                      <a:r>
+                        <a:rPr lang="en-US" sz="1000" dirty="0">
+                          <a:solidFill>
+                            <a:srgbClr val="1A1A18"/>
+                          </a:solidFill>
+                          <a:latin typeface="Cambria" pitchFamily="34" charset="0"/>
+                          <a:ea typeface="Cambria" pitchFamily="34" charset="-122"/>
+                          <a:cs typeface="Cambria" pitchFamily="34" charset="-120"/>
+                        </a:rPr>
+                        <a:t>0,9435</a:t>
                       </a:r>
                       <a:endParaRPr lang="en-US" sz="1000" dirty="0">
                         <a:latin typeface="Cambria" charset="0"/>
@@ -27009,101 +27199,101 @@
                           <a:ea typeface="Cambria" pitchFamily="34" charset="-122"/>
                           <a:cs typeface="Cambria" pitchFamily="34" charset="-120"/>
                         </a:rPr>
-                        <a:t>São Paulo</a:t>
-                      </a:r>
-                      <a:endParaRPr lang="en-US" sz="1000" dirty="0">
-                        <a:latin typeface="Cambria" charset="0"/>
-                        <a:ea typeface="Cambria" charset="0"/>
-                        <a:cs typeface="Cambria" charset="0"/>
-                      </a:endParaRPr>
-                    </a:p>
-                  </a:txBody>
-                  <a:tcPr marL="91440" marR="91440" marT="45720" marB="45720" anchor="ctr">
-                    <a:lnL w="0" cap="flat" cmpd="sng" algn="ctr">
-                      <a:noFill/>
-                    </a:lnL>
-                    <a:lnR w="0" cap="flat" cmpd="sng" algn="ctr">
-                      <a:noFill/>
-                    </a:lnR>
-                    <a:lnT w="0" cap="flat" cmpd="sng" algn="ctr">
-                      <a:noFill/>
-                    </a:lnT>
-                    <a:lnB w="6350" cap="flat" cmpd="sng" algn="ctr">
-                      <a:solidFill>
-                        <a:srgbClr val="E6E4DE"/>
-                      </a:solidFill>
-                      <a:prstDash val="solid"/>
-                      <a:round/>
-                      <a:headEnd type="none" w="med" len="med"/>
-                      <a:tailEnd type="none" w="med" len="med"/>
-                    </a:lnB>
-                  </a:tcPr>
-                </a:tc>
-                <a:tc>
-                  <a:txBody>
-                    <a:bodyPr/>
-                    <a:lstStyle/>
-                    <a:p>
-                      <a:pPr indent="0" marL="0">
-                        <a:buNone/>
-                      </a:pPr>
-                      <a:r>
-                        <a:rPr lang="en-US" sz="1000" dirty="0">
-                          <a:solidFill>
-                            <a:srgbClr val="1A1A18"/>
-                          </a:solidFill>
-                          <a:latin typeface="Cambria" pitchFamily="34" charset="0"/>
-                          <a:ea typeface="Cambria" pitchFamily="34" charset="-122"/>
-                          <a:cs typeface="Cambria" pitchFamily="34" charset="-120"/>
-                        </a:rPr>
-                        <a:t>19.433</a:t>
-                      </a:r>
-                      <a:endParaRPr lang="en-US" sz="1000" dirty="0">
-                        <a:latin typeface="Cambria" charset="0"/>
-                        <a:ea typeface="Cambria" charset="0"/>
-                        <a:cs typeface="Cambria" charset="0"/>
-                      </a:endParaRPr>
-                    </a:p>
-                  </a:txBody>
-                  <a:tcPr marL="91440" marR="91440" marT="45720" marB="45720" anchor="ctr">
-                    <a:lnL w="0" cap="flat" cmpd="sng" algn="ctr">
-                      <a:noFill/>
-                    </a:lnL>
-                    <a:lnR w="0" cap="flat" cmpd="sng" algn="ctr">
-                      <a:noFill/>
-                    </a:lnR>
-                    <a:lnT w="0" cap="flat" cmpd="sng" algn="ctr">
-                      <a:noFill/>
-                    </a:lnT>
-                    <a:lnB w="6350" cap="flat" cmpd="sng" algn="ctr">
-                      <a:solidFill>
-                        <a:srgbClr val="E6E4DE"/>
-                      </a:solidFill>
-                      <a:prstDash val="solid"/>
-                      <a:round/>
-                      <a:headEnd type="none" w="med" len="med"/>
-                      <a:tailEnd type="none" w="med" len="med"/>
-                    </a:lnB>
-                  </a:tcPr>
-                </a:tc>
-                <a:tc>
-                  <a:txBody>
-                    <a:bodyPr/>
-                    <a:lstStyle/>
-                    <a:p>
-                      <a:pPr indent="0" marL="0">
-                        <a:buNone/>
-                      </a:pPr>
-                      <a:r>
-                        <a:rPr lang="en-US" sz="1000" dirty="0">
-                          <a:solidFill>
-                            <a:srgbClr val="1A1A18"/>
-                          </a:solidFill>
-                          <a:latin typeface="Cambria" pitchFamily="34" charset="0"/>
-                          <a:ea typeface="Cambria" pitchFamily="34" charset="-122"/>
-                          <a:cs typeface="Cambria" pitchFamily="34" charset="-120"/>
-                        </a:rPr>
-                        <a:t>0,9435</a:t>
+                        <a:t>Autazes</a:t>
+                      </a:r>
+                      <a:endParaRPr lang="en-US" sz="1000" dirty="0">
+                        <a:latin typeface="Cambria" charset="0"/>
+                        <a:ea typeface="Cambria" charset="0"/>
+                        <a:cs typeface="Cambria" charset="0"/>
+                      </a:endParaRPr>
+                    </a:p>
+                  </a:txBody>
+                  <a:tcPr marL="91440" marR="91440" marT="45720" marB="45720" anchor="ctr">
+                    <a:lnL w="0" cap="flat" cmpd="sng" algn="ctr">
+                      <a:noFill/>
+                    </a:lnL>
+                    <a:lnR w="0" cap="flat" cmpd="sng" algn="ctr">
+                      <a:noFill/>
+                    </a:lnR>
+                    <a:lnT w="0" cap="flat" cmpd="sng" algn="ctr">
+                      <a:noFill/>
+                    </a:lnT>
+                    <a:lnB w="6350" cap="flat" cmpd="sng" algn="ctr">
+                      <a:solidFill>
+                        <a:srgbClr val="E6E4DE"/>
+                      </a:solidFill>
+                      <a:prstDash val="solid"/>
+                      <a:round/>
+                      <a:headEnd type="none" w="med" len="med"/>
+                      <a:tailEnd type="none" w="med" len="med"/>
+                    </a:lnB>
+                  </a:tcPr>
+                </a:tc>
+                <a:tc>
+                  <a:txBody>
+                    <a:bodyPr/>
+                    <a:lstStyle/>
+                    <a:p>
+                      <a:pPr indent="0" marL="0">
+                        <a:buNone/>
+                      </a:pPr>
+                      <a:r>
+                        <a:rPr lang="en-US" sz="1000" dirty="0">
+                          <a:solidFill>
+                            <a:srgbClr val="1A1A18"/>
+                          </a:solidFill>
+                          <a:latin typeface="Cambria" pitchFamily="34" charset="0"/>
+                          <a:ea typeface="Cambria" pitchFamily="34" charset="-122"/>
+                          <a:cs typeface="Cambria" pitchFamily="34" charset="-120"/>
+                        </a:rPr>
+                        <a:t>21</a:t>
+                      </a:r>
+                      <a:endParaRPr lang="en-US" sz="1000" dirty="0">
+                        <a:latin typeface="Cambria" charset="0"/>
+                        <a:ea typeface="Cambria" charset="0"/>
+                        <a:cs typeface="Cambria" charset="0"/>
+                      </a:endParaRPr>
+                    </a:p>
+                  </a:txBody>
+                  <a:tcPr marL="91440" marR="91440" marT="45720" marB="45720" anchor="ctr">
+                    <a:lnL w="0" cap="flat" cmpd="sng" algn="ctr">
+                      <a:noFill/>
+                    </a:lnL>
+                    <a:lnR w="0" cap="flat" cmpd="sng" algn="ctr">
+                      <a:noFill/>
+                    </a:lnR>
+                    <a:lnT w="0" cap="flat" cmpd="sng" algn="ctr">
+                      <a:noFill/>
+                    </a:lnT>
+                    <a:lnB w="6350" cap="flat" cmpd="sng" algn="ctr">
+                      <a:solidFill>
+                        <a:srgbClr val="E6E4DE"/>
+                      </a:solidFill>
+                      <a:prstDash val="solid"/>
+                      <a:round/>
+                      <a:headEnd type="none" w="med" len="med"/>
+                      <a:tailEnd type="none" w="med" len="med"/>
+                    </a:lnB>
+                  </a:tcPr>
+                </a:tc>
+                <a:tc>
+                  <a:txBody>
+                    <a:bodyPr/>
+                    <a:lstStyle/>
+                    <a:p>
+                      <a:pPr indent="0" marL="0">
+                        <a:buNone/>
+                      </a:pPr>
+                      <a:r>
+                        <a:rPr lang="en-US" sz="1000" dirty="0">
+                          <a:solidFill>
+                            <a:srgbClr val="1A1A18"/>
+                          </a:solidFill>
+                          <a:latin typeface="Cambria" pitchFamily="34" charset="0"/>
+                          <a:ea typeface="Cambria" pitchFamily="34" charset="-122"/>
+                          <a:cs typeface="Cambria" pitchFamily="34" charset="-120"/>
+                        </a:rPr>
+                        <a:t>0,9468</a:t>
                       </a:r>
                       <a:endParaRPr lang="en-US" sz="1000" dirty="0">
                         <a:latin typeface="Cambria" charset="0"/>
@@ -27152,101 +27342,101 @@
                           <a:ea typeface="Cambria" pitchFamily="34" charset="-122"/>
                           <a:cs typeface="Cambria" pitchFamily="34" charset="-120"/>
                         </a:rPr>
-                        <a:t>Autazes</a:t>
-                      </a:r>
-                      <a:endParaRPr lang="en-US" sz="1000" dirty="0">
-                        <a:latin typeface="Cambria" charset="0"/>
-                        <a:ea typeface="Cambria" charset="0"/>
-                        <a:cs typeface="Cambria" charset="0"/>
-                      </a:endParaRPr>
-                    </a:p>
-                  </a:txBody>
-                  <a:tcPr marL="91440" marR="91440" marT="45720" marB="45720" anchor="ctr">
-                    <a:lnL w="0" cap="flat" cmpd="sng" algn="ctr">
-                      <a:noFill/>
-                    </a:lnL>
-                    <a:lnR w="0" cap="flat" cmpd="sng" algn="ctr">
-                      <a:noFill/>
-                    </a:lnR>
-                    <a:lnT w="0" cap="flat" cmpd="sng" algn="ctr">
-                      <a:noFill/>
-                    </a:lnT>
-                    <a:lnB w="6350" cap="flat" cmpd="sng" algn="ctr">
-                      <a:solidFill>
-                        <a:srgbClr val="E6E4DE"/>
-                      </a:solidFill>
-                      <a:prstDash val="solid"/>
-                      <a:round/>
-                      <a:headEnd type="none" w="med" len="med"/>
-                      <a:tailEnd type="none" w="med" len="med"/>
-                    </a:lnB>
-                  </a:tcPr>
-                </a:tc>
-                <a:tc>
-                  <a:txBody>
-                    <a:bodyPr/>
-                    <a:lstStyle/>
-                    <a:p>
-                      <a:pPr indent="0" marL="0">
-                        <a:buNone/>
-                      </a:pPr>
-                      <a:r>
-                        <a:rPr lang="en-US" sz="1000" dirty="0">
-                          <a:solidFill>
-                            <a:srgbClr val="1A1A18"/>
-                          </a:solidFill>
-                          <a:latin typeface="Cambria" pitchFamily="34" charset="0"/>
-                          <a:ea typeface="Cambria" pitchFamily="34" charset="-122"/>
-                          <a:cs typeface="Cambria" pitchFamily="34" charset="-120"/>
-                        </a:rPr>
-                        <a:t>21</a:t>
-                      </a:r>
-                      <a:endParaRPr lang="en-US" sz="1000" dirty="0">
-                        <a:latin typeface="Cambria" charset="0"/>
-                        <a:ea typeface="Cambria" charset="0"/>
-                        <a:cs typeface="Cambria" charset="0"/>
-                      </a:endParaRPr>
-                    </a:p>
-                  </a:txBody>
-                  <a:tcPr marL="91440" marR="91440" marT="45720" marB="45720" anchor="ctr">
-                    <a:lnL w="0" cap="flat" cmpd="sng" algn="ctr">
-                      <a:noFill/>
-                    </a:lnL>
-                    <a:lnR w="0" cap="flat" cmpd="sng" algn="ctr">
-                      <a:noFill/>
-                    </a:lnR>
-                    <a:lnT w="0" cap="flat" cmpd="sng" algn="ctr">
-                      <a:noFill/>
-                    </a:lnT>
-                    <a:lnB w="6350" cap="flat" cmpd="sng" algn="ctr">
-                      <a:solidFill>
-                        <a:srgbClr val="E6E4DE"/>
-                      </a:solidFill>
-                      <a:prstDash val="solid"/>
-                      <a:round/>
-                      <a:headEnd type="none" w="med" len="med"/>
-                      <a:tailEnd type="none" w="med" len="med"/>
-                    </a:lnB>
-                  </a:tcPr>
-                </a:tc>
-                <a:tc>
-                  <a:txBody>
-                    <a:bodyPr/>
-                    <a:lstStyle/>
-                    <a:p>
-                      <a:pPr indent="0" marL="0">
-                        <a:buNone/>
-                      </a:pPr>
-                      <a:r>
-                        <a:rPr lang="en-US" sz="1000" dirty="0">
-                          <a:solidFill>
-                            <a:srgbClr val="1A1A18"/>
-                          </a:solidFill>
-                          <a:latin typeface="Cambria" pitchFamily="34" charset="0"/>
-                          <a:ea typeface="Cambria" pitchFamily="34" charset="-122"/>
-                          <a:cs typeface="Cambria" pitchFamily="34" charset="-120"/>
-                        </a:rPr>
-                        <a:t>0,9468</a:t>
+                        <a:t>Porto Alegre</a:t>
+                      </a:r>
+                      <a:endParaRPr lang="en-US" sz="1000" dirty="0">
+                        <a:latin typeface="Cambria" charset="0"/>
+                        <a:ea typeface="Cambria" charset="0"/>
+                        <a:cs typeface="Cambria" charset="0"/>
+                      </a:endParaRPr>
+                    </a:p>
+                  </a:txBody>
+                  <a:tcPr marL="91440" marR="91440" marT="45720" marB="45720" anchor="ctr">
+                    <a:lnL w="0" cap="flat" cmpd="sng" algn="ctr">
+                      <a:noFill/>
+                    </a:lnL>
+                    <a:lnR w="0" cap="flat" cmpd="sng" algn="ctr">
+                      <a:noFill/>
+                    </a:lnR>
+                    <a:lnT w="0" cap="flat" cmpd="sng" algn="ctr">
+                      <a:noFill/>
+                    </a:lnT>
+                    <a:lnB w="6350" cap="flat" cmpd="sng" algn="ctr">
+                      <a:solidFill>
+                        <a:srgbClr val="E6E4DE"/>
+                      </a:solidFill>
+                      <a:prstDash val="solid"/>
+                      <a:round/>
+                      <a:headEnd type="none" w="med" len="med"/>
+                      <a:tailEnd type="none" w="med" len="med"/>
+                    </a:lnB>
+                  </a:tcPr>
+                </a:tc>
+                <a:tc>
+                  <a:txBody>
+                    <a:bodyPr/>
+                    <a:lstStyle/>
+                    <a:p>
+                      <a:pPr indent="0" marL="0">
+                        <a:buNone/>
+                      </a:pPr>
+                      <a:r>
+                        <a:rPr lang="en-US" sz="1000" dirty="0">
+                          <a:solidFill>
+                            <a:srgbClr val="1A1A18"/>
+                          </a:solidFill>
+                          <a:latin typeface="Cambria" pitchFamily="34" charset="0"/>
+                          <a:ea typeface="Cambria" pitchFamily="34" charset="-122"/>
+                          <a:cs typeface="Cambria" pitchFamily="34" charset="-120"/>
+                        </a:rPr>
+                        <a:t>1.521</a:t>
+                      </a:r>
+                      <a:endParaRPr lang="en-US" sz="1000" dirty="0">
+                        <a:latin typeface="Cambria" charset="0"/>
+                        <a:ea typeface="Cambria" charset="0"/>
+                        <a:cs typeface="Cambria" charset="0"/>
+                      </a:endParaRPr>
+                    </a:p>
+                  </a:txBody>
+                  <a:tcPr marL="91440" marR="91440" marT="45720" marB="45720" anchor="ctr">
+                    <a:lnL w="0" cap="flat" cmpd="sng" algn="ctr">
+                      <a:noFill/>
+                    </a:lnL>
+                    <a:lnR w="0" cap="flat" cmpd="sng" algn="ctr">
+                      <a:noFill/>
+                    </a:lnR>
+                    <a:lnT w="0" cap="flat" cmpd="sng" algn="ctr">
+                      <a:noFill/>
+                    </a:lnT>
+                    <a:lnB w="6350" cap="flat" cmpd="sng" algn="ctr">
+                      <a:solidFill>
+                        <a:srgbClr val="E6E4DE"/>
+                      </a:solidFill>
+                      <a:prstDash val="solid"/>
+                      <a:round/>
+                      <a:headEnd type="none" w="med" len="med"/>
+                      <a:tailEnd type="none" w="med" len="med"/>
+                    </a:lnB>
+                  </a:tcPr>
+                </a:tc>
+                <a:tc>
+                  <a:txBody>
+                    <a:bodyPr/>
+                    <a:lstStyle/>
+                    <a:p>
+                      <a:pPr indent="0" marL="0">
+                        <a:buNone/>
+                      </a:pPr>
+                      <a:r>
+                        <a:rPr lang="en-US" sz="1000" dirty="0">
+                          <a:solidFill>
+                            <a:srgbClr val="1A1A18"/>
+                          </a:solidFill>
+                          <a:latin typeface="Cambria" pitchFamily="34" charset="0"/>
+                          <a:ea typeface="Cambria" pitchFamily="34" charset="-122"/>
+                          <a:cs typeface="Cambria" pitchFamily="34" charset="-120"/>
+                        </a:rPr>
+                        <a:t>0,9482</a:t>
                       </a:r>
                       <a:endParaRPr lang="en-US" sz="1000" dirty="0">
                         <a:latin typeface="Cambria" charset="0"/>
@@ -27295,7 +27485,7 @@
                           <a:ea typeface="Cambria" pitchFamily="34" charset="-122"/>
                           <a:cs typeface="Cambria" pitchFamily="34" charset="-120"/>
                         </a:rPr>
-                        <a:t>Porto Alegre</a:t>
+                        <a:t>São Caetano do Sul</a:t>
                       </a:r>
                       <a:endParaRPr lang="en-US" sz="1000" dirty="0">
                         <a:latin typeface="Cambria" charset="0"/>
@@ -27342,7 +27532,7 @@
                           <a:ea typeface="Cambria" pitchFamily="34" charset="-122"/>
                           <a:cs typeface="Cambria" pitchFamily="34" charset="-120"/>
                         </a:rPr>
-                        <a:t>1.521</a:t>
+                        <a:t>280</a:t>
                       </a:r>
                       <a:endParaRPr lang="en-US" sz="1000" dirty="0">
                         <a:latin typeface="Cambria" charset="0"/>
@@ -27389,7 +27579,7 @@
                           <a:ea typeface="Cambria" pitchFamily="34" charset="-122"/>
                           <a:cs typeface="Cambria" pitchFamily="34" charset="-120"/>
                         </a:rPr>
-                        <a:t>0,9482</a:t>
+                        <a:t>0,9491</a:t>
                       </a:r>
                       <a:endParaRPr lang="en-US" sz="1000" dirty="0">
                         <a:latin typeface="Cambria" charset="0"/>
@@ -28137,54 +28327,54 @@
                           <a:ea typeface="Cambria" pitchFamily="34" charset="-122"/>
                           <a:cs typeface="Cambria" pitchFamily="34" charset="-120"/>
                         </a:rPr>
-                        <a:t>18.308</a:t>
-                      </a:r>
-                      <a:endParaRPr lang="en-US" sz="1000" dirty="0">
-                        <a:latin typeface="Cambria" charset="0"/>
-                        <a:ea typeface="Cambria" charset="0"/>
-                        <a:cs typeface="Cambria" charset="0"/>
-                      </a:endParaRPr>
-                    </a:p>
-                  </a:txBody>
-                  <a:tcPr marL="91440" marR="91440" marT="45720" marB="45720" anchor="ctr">
-                    <a:lnL w="0" cap="flat" cmpd="sng" algn="ctr">
-                      <a:noFill/>
-                    </a:lnL>
-                    <a:lnR w="0" cap="flat" cmpd="sng" algn="ctr">
-                      <a:noFill/>
-                    </a:lnR>
-                    <a:lnT w="0" cap="flat" cmpd="sng" algn="ctr">
-                      <a:noFill/>
-                    </a:lnT>
-                    <a:lnB w="6350" cap="flat" cmpd="sng" algn="ctr">
-                      <a:solidFill>
-                        <a:srgbClr val="E6E4DE"/>
-                      </a:solidFill>
-                      <a:prstDash val="solid"/>
-                      <a:round/>
-                      <a:headEnd type="none" w="med" len="med"/>
-                      <a:tailEnd type="none" w="med" len="med"/>
-                    </a:lnB>
-                  </a:tcPr>
-                </a:tc>
-                <a:tc>
-                  <a:txBody>
-                    <a:bodyPr/>
-                    <a:lstStyle/>
-                    <a:p>
-                      <a:pPr indent="0" marL="0">
-                        <a:buNone/>
-                      </a:pPr>
-                      <a:r>
-                        <a:rPr lang="en-US" sz="1000" dirty="0">
-                          <a:solidFill>
-                            <a:srgbClr val="1A1A18"/>
-                          </a:solidFill>
-                          <a:latin typeface="Cambria" pitchFamily="34" charset="0"/>
-                          <a:ea typeface="Cambria" pitchFamily="34" charset="-122"/>
-                          <a:cs typeface="Cambria" pitchFamily="34" charset="-120"/>
-                        </a:rPr>
-                        <a:t>2.956</a:t>
+                        <a:t>18.310</a:t>
+                      </a:r>
+                      <a:endParaRPr lang="en-US" sz="1000" dirty="0">
+                        <a:latin typeface="Cambria" charset="0"/>
+                        <a:ea typeface="Cambria" charset="0"/>
+                        <a:cs typeface="Cambria" charset="0"/>
+                      </a:endParaRPr>
+                    </a:p>
+                  </a:txBody>
+                  <a:tcPr marL="91440" marR="91440" marT="45720" marB="45720" anchor="ctr">
+                    <a:lnL w="0" cap="flat" cmpd="sng" algn="ctr">
+                      <a:noFill/>
+                    </a:lnL>
+                    <a:lnR w="0" cap="flat" cmpd="sng" algn="ctr">
+                      <a:noFill/>
+                    </a:lnR>
+                    <a:lnT w="0" cap="flat" cmpd="sng" algn="ctr">
+                      <a:noFill/>
+                    </a:lnT>
+                    <a:lnB w="6350" cap="flat" cmpd="sng" algn="ctr">
+                      <a:solidFill>
+                        <a:srgbClr val="E6E4DE"/>
+                      </a:solidFill>
+                      <a:prstDash val="solid"/>
+                      <a:round/>
+                      <a:headEnd type="none" w="med" len="med"/>
+                      <a:tailEnd type="none" w="med" len="med"/>
+                    </a:lnB>
+                  </a:tcPr>
+                </a:tc>
+                <a:tc>
+                  <a:txBody>
+                    <a:bodyPr/>
+                    <a:lstStyle/>
+                    <a:p>
+                      <a:pPr indent="0" marL="0">
+                        <a:buNone/>
+                      </a:pPr>
+                      <a:r>
+                        <a:rPr lang="en-US" sz="1000" dirty="0">
+                          <a:solidFill>
+                            <a:srgbClr val="1A1A18"/>
+                          </a:solidFill>
+                          <a:latin typeface="Cambria" pitchFamily="34" charset="0"/>
+                          <a:ea typeface="Cambria" pitchFamily="34" charset="-122"/>
+                          <a:cs typeface="Cambria" pitchFamily="34" charset="-120"/>
+                        </a:rPr>
+                        <a:t>2.954</a:t>
                       </a:r>
                       <a:endParaRPr lang="en-US" sz="1000" dirty="0">
                         <a:latin typeface="Cambria" charset="0"/>
@@ -28374,54 +28564,54 @@
                           <a:ea typeface="Cambria" pitchFamily="34" charset="-122"/>
                           <a:cs typeface="Cambria" pitchFamily="34" charset="-120"/>
                         </a:rPr>
-                        <a:t>2.263</a:t>
-                      </a:r>
-                      <a:endParaRPr lang="en-US" sz="1000" dirty="0">
-                        <a:latin typeface="Cambria" charset="0"/>
-                        <a:ea typeface="Cambria" charset="0"/>
-                        <a:cs typeface="Cambria" charset="0"/>
-                      </a:endParaRPr>
-                    </a:p>
-                  </a:txBody>
-                  <a:tcPr marL="91440" marR="91440" marT="45720" marB="45720" anchor="ctr">
-                    <a:lnL w="0" cap="flat" cmpd="sng" algn="ctr">
-                      <a:noFill/>
-                    </a:lnL>
-                    <a:lnR w="0" cap="flat" cmpd="sng" algn="ctr">
-                      <a:noFill/>
-                    </a:lnR>
-                    <a:lnT w="0" cap="flat" cmpd="sng" algn="ctr">
-                      <a:noFill/>
-                    </a:lnT>
-                    <a:lnB w="6350" cap="flat" cmpd="sng" algn="ctr">
-                      <a:solidFill>
-                        <a:srgbClr val="E6E4DE"/>
-                      </a:solidFill>
-                      <a:prstDash val="solid"/>
-                      <a:round/>
-                      <a:headEnd type="none" w="med" len="med"/>
-                      <a:tailEnd type="none" w="med" len="med"/>
-                    </a:lnB>
-                  </a:tcPr>
-                </a:tc>
-                <a:tc>
-                  <a:txBody>
-                    <a:bodyPr/>
-                    <a:lstStyle/>
-                    <a:p>
-                      <a:pPr indent="0" marL="0">
-                        <a:buNone/>
-                      </a:pPr>
-                      <a:r>
-                        <a:rPr lang="en-US" sz="1000" dirty="0">
-                          <a:solidFill>
-                            <a:srgbClr val="1A1A18"/>
-                          </a:solidFill>
-                          <a:latin typeface="Cambria" pitchFamily="34" charset="0"/>
-                          <a:ea typeface="Cambria" pitchFamily="34" charset="-122"/>
-                          <a:cs typeface="Cambria" pitchFamily="34" charset="-120"/>
-                        </a:rPr>
-                        <a:t>27.510</a:t>
+                        <a:t>2.264</a:t>
+                      </a:r>
+                      <a:endParaRPr lang="en-US" sz="1000" dirty="0">
+                        <a:latin typeface="Cambria" charset="0"/>
+                        <a:ea typeface="Cambria" charset="0"/>
+                        <a:cs typeface="Cambria" charset="0"/>
+                      </a:endParaRPr>
+                    </a:p>
+                  </a:txBody>
+                  <a:tcPr marL="91440" marR="91440" marT="45720" marB="45720" anchor="ctr">
+                    <a:lnL w="0" cap="flat" cmpd="sng" algn="ctr">
+                      <a:noFill/>
+                    </a:lnL>
+                    <a:lnR w="0" cap="flat" cmpd="sng" algn="ctr">
+                      <a:noFill/>
+                    </a:lnR>
+                    <a:lnT w="0" cap="flat" cmpd="sng" algn="ctr">
+                      <a:noFill/>
+                    </a:lnT>
+                    <a:lnB w="6350" cap="flat" cmpd="sng" algn="ctr">
+                      <a:solidFill>
+                        <a:srgbClr val="E6E4DE"/>
+                      </a:solidFill>
+                      <a:prstDash val="solid"/>
+                      <a:round/>
+                      <a:headEnd type="none" w="med" len="med"/>
+                      <a:tailEnd type="none" w="med" len="med"/>
+                    </a:lnB>
+                  </a:tcPr>
+                </a:tc>
+                <a:tc>
+                  <a:txBody>
+                    <a:bodyPr/>
+                    <a:lstStyle/>
+                    <a:p>
+                      <a:pPr indent="0" marL="0">
+                        <a:buNone/>
+                      </a:pPr>
+                      <a:r>
+                        <a:rPr lang="en-US" sz="1000" dirty="0">
+                          <a:solidFill>
+                            <a:srgbClr val="1A1A18"/>
+                          </a:solidFill>
+                          <a:latin typeface="Cambria" pitchFamily="34" charset="0"/>
+                          <a:ea typeface="Cambria" pitchFamily="34" charset="-122"/>
+                          <a:cs typeface="Cambria" pitchFamily="34" charset="-120"/>
+                        </a:rPr>
+                        <a:t>27.509</a:t>
                       </a:r>
                       <a:endParaRPr lang="en-US" sz="1000" dirty="0">
                         <a:latin typeface="Cambria" charset="0"/>
@@ -28942,7 +29132,7 @@
                           <a:ea typeface="Cambria" pitchFamily="34" charset="-122"/>
                           <a:cs typeface="Cambria" pitchFamily="34" charset="-120"/>
                         </a:rPr>
-                        <a:t>366</a:t>
+                        <a:t>367</a:t>
                       </a:r>
                       <a:endParaRPr lang="en-US" sz="1000" dirty="0">
                         <a:latin typeface="Cambria" charset="0"/>
@@ -28989,7 +29179,7 @@
                           <a:ea typeface="Cambria" pitchFamily="34" charset="-122"/>
                           <a:cs typeface="Cambria" pitchFamily="34" charset="-120"/>
                         </a:rPr>
-                        <a:t>3.564</a:t>
+                        <a:t>3.563</a:t>
                       </a:r>
                       <a:endParaRPr lang="en-US" sz="1000" dirty="0">
                         <a:latin typeface="Cambria" charset="0"/>
@@ -29644,54 +29834,54 @@
                           <a:ea typeface="Cambria" pitchFamily="34" charset="-122"/>
                           <a:cs typeface="Cambria" pitchFamily="34" charset="-120"/>
                         </a:rPr>
-                        <a:t>73.878</a:t>
-                      </a:r>
-                      <a:endParaRPr lang="en-US" sz="1000" dirty="0">
-                        <a:latin typeface="Cambria" charset="0"/>
-                        <a:ea typeface="Cambria" charset="0"/>
-                        <a:cs typeface="Cambria" charset="0"/>
-                      </a:endParaRPr>
-                    </a:p>
-                  </a:txBody>
-                  <a:tcPr marL="91440" marR="91440" marT="45720" marB="45720" anchor="ctr">
-                    <a:lnL w="0" cap="flat" cmpd="sng" algn="ctr">
-                      <a:noFill/>
-                    </a:lnL>
-                    <a:lnR w="0" cap="flat" cmpd="sng" algn="ctr">
-                      <a:noFill/>
-                    </a:lnR>
-                    <a:lnT w="0" cap="flat" cmpd="sng" algn="ctr">
-                      <a:noFill/>
-                    </a:lnT>
-                    <a:lnB w="6350" cap="flat" cmpd="sng" algn="ctr">
-                      <a:solidFill>
-                        <a:srgbClr val="E6E4DE"/>
-                      </a:solidFill>
-                      <a:prstDash val="solid"/>
-                      <a:round/>
-                      <a:headEnd type="none" w="med" len="med"/>
-                      <a:tailEnd type="none" w="med" len="med"/>
-                    </a:lnB>
-                  </a:tcPr>
-                </a:tc>
-                <a:tc>
-                  <a:txBody>
-                    <a:bodyPr/>
-                    <a:lstStyle/>
-                    <a:p>
-                      <a:pPr indent="0" marL="0">
-                        <a:buNone/>
-                      </a:pPr>
-                      <a:r>
-                        <a:rPr lang="en-US" sz="1000" dirty="0">
-                          <a:solidFill>
-                            <a:srgbClr val="1A1A18"/>
-                          </a:solidFill>
-                          <a:latin typeface="Cambria" pitchFamily="34" charset="0"/>
-                          <a:ea typeface="Cambria" pitchFamily="34" charset="-122"/>
-                          <a:cs typeface="Cambria" pitchFamily="34" charset="-120"/>
-                        </a:rPr>
-                        <a:t>12.598</a:t>
+                        <a:t>73.877</a:t>
+                      </a:r>
+                      <a:endParaRPr lang="en-US" sz="1000" dirty="0">
+                        <a:latin typeface="Cambria" charset="0"/>
+                        <a:ea typeface="Cambria" charset="0"/>
+                        <a:cs typeface="Cambria" charset="0"/>
+                      </a:endParaRPr>
+                    </a:p>
+                  </a:txBody>
+                  <a:tcPr marL="91440" marR="91440" marT="45720" marB="45720" anchor="ctr">
+                    <a:lnL w="0" cap="flat" cmpd="sng" algn="ctr">
+                      <a:noFill/>
+                    </a:lnL>
+                    <a:lnR w="0" cap="flat" cmpd="sng" algn="ctr">
+                      <a:noFill/>
+                    </a:lnR>
+                    <a:lnT w="0" cap="flat" cmpd="sng" algn="ctr">
+                      <a:noFill/>
+                    </a:lnT>
+                    <a:lnB w="6350" cap="flat" cmpd="sng" algn="ctr">
+                      <a:solidFill>
+                        <a:srgbClr val="E6E4DE"/>
+                      </a:solidFill>
+                      <a:prstDash val="solid"/>
+                      <a:round/>
+                      <a:headEnd type="none" w="med" len="med"/>
+                      <a:tailEnd type="none" w="med" len="med"/>
+                    </a:lnB>
+                  </a:tcPr>
+                </a:tc>
+                <a:tc>
+                  <a:txBody>
+                    <a:bodyPr/>
+                    <a:lstStyle/>
+                    <a:p>
+                      <a:pPr indent="0" marL="0">
+                        <a:buNone/>
+                      </a:pPr>
+                      <a:r>
+                        <a:rPr lang="en-US" sz="1000" dirty="0">
+                          <a:solidFill>
+                            <a:srgbClr val="1A1A18"/>
+                          </a:solidFill>
+                          <a:latin typeface="Cambria" pitchFamily="34" charset="0"/>
+                          <a:ea typeface="Cambria" pitchFamily="34" charset="-122"/>
+                          <a:cs typeface="Cambria" pitchFamily="34" charset="-120"/>
+                        </a:rPr>
+                        <a:t>12.597</a:t>
                       </a:r>
                       <a:endParaRPr lang="en-US" sz="1000" dirty="0">
                         <a:latin typeface="Cambria" charset="0"/>
@@ -29787,148 +29977,148 @@
                           <a:ea typeface="Cambria" pitchFamily="34" charset="-122"/>
                           <a:cs typeface="Cambria" pitchFamily="34" charset="-120"/>
                         </a:rPr>
-                        <a:t>São Raimundo do Doca Bezerra</a:t>
-                      </a:r>
-                      <a:endParaRPr lang="en-US" sz="1000" dirty="0">
-                        <a:latin typeface="Cambria" charset="0"/>
-                        <a:ea typeface="Cambria" charset="0"/>
-                        <a:cs typeface="Cambria" charset="0"/>
-                      </a:endParaRPr>
-                    </a:p>
-                  </a:txBody>
-                  <a:tcPr marL="91440" marR="91440" marT="45720" marB="45720" anchor="ctr">
-                    <a:lnL w="0" cap="flat" cmpd="sng" algn="ctr">
-                      <a:noFill/>
-                    </a:lnL>
-                    <a:lnR w="0" cap="flat" cmpd="sng" algn="ctr">
-                      <a:noFill/>
-                    </a:lnR>
-                    <a:lnT w="0" cap="flat" cmpd="sng" algn="ctr">
-                      <a:noFill/>
-                    </a:lnT>
-                    <a:lnB w="6350" cap="flat" cmpd="sng" algn="ctr">
-                      <a:solidFill>
-                        <a:srgbClr val="E6E4DE"/>
-                      </a:solidFill>
-                      <a:prstDash val="solid"/>
-                      <a:round/>
-                      <a:headEnd type="none" w="med" len="med"/>
-                      <a:tailEnd type="none" w="med" len="med"/>
-                    </a:lnB>
-                  </a:tcPr>
-                </a:tc>
-                <a:tc>
-                  <a:txBody>
-                    <a:bodyPr/>
-                    <a:lstStyle/>
-                    <a:p>
-                      <a:pPr indent="0" marL="0">
-                        <a:buNone/>
-                      </a:pPr>
-                      <a:r>
-                        <a:rPr lang="en-US" sz="1000" dirty="0">
-                          <a:solidFill>
-                            <a:srgbClr val="1A1A18"/>
-                          </a:solidFill>
-                          <a:latin typeface="Cambria" pitchFamily="34" charset="0"/>
-                          <a:ea typeface="Cambria" pitchFamily="34" charset="-122"/>
-                          <a:cs typeface="Cambria" pitchFamily="34" charset="-120"/>
-                        </a:rPr>
-                        <a:t>1</a:t>
-                      </a:r>
-                      <a:endParaRPr lang="en-US" sz="1000" dirty="0">
-                        <a:latin typeface="Cambria" charset="0"/>
-                        <a:ea typeface="Cambria" charset="0"/>
-                        <a:cs typeface="Cambria" charset="0"/>
-                      </a:endParaRPr>
-                    </a:p>
-                  </a:txBody>
-                  <a:tcPr marL="91440" marR="91440" marT="45720" marB="45720" anchor="ctr">
-                    <a:lnL w="0" cap="flat" cmpd="sng" algn="ctr">
-                      <a:noFill/>
-                    </a:lnL>
-                    <a:lnR w="0" cap="flat" cmpd="sng" algn="ctr">
-                      <a:noFill/>
-                    </a:lnR>
-                    <a:lnT w="0" cap="flat" cmpd="sng" algn="ctr">
-                      <a:noFill/>
-                    </a:lnT>
-                    <a:lnB w="6350" cap="flat" cmpd="sng" algn="ctr">
-                      <a:solidFill>
-                        <a:srgbClr val="E6E4DE"/>
-                      </a:solidFill>
-                      <a:prstDash val="solid"/>
-                      <a:round/>
-                      <a:headEnd type="none" w="med" len="med"/>
-                      <a:tailEnd type="none" w="med" len="med"/>
-                    </a:lnB>
-                  </a:tcPr>
-                </a:tc>
-                <a:tc>
-                  <a:txBody>
-                    <a:bodyPr/>
-                    <a:lstStyle/>
-                    <a:p>
-                      <a:pPr indent="0" marL="0">
-                        <a:buNone/>
-                      </a:pPr>
-                      <a:r>
-                        <a:rPr lang="en-US" sz="1000" dirty="0">
-                          <a:solidFill>
-                            <a:srgbClr val="1A1A18"/>
-                          </a:solidFill>
-                          <a:latin typeface="Cambria" pitchFamily="34" charset="0"/>
-                          <a:ea typeface="Cambria" pitchFamily="34" charset="-122"/>
-                          <a:cs typeface="Cambria" pitchFamily="34" charset="-120"/>
-                        </a:rPr>
-                        <a:t>1</a:t>
-                      </a:r>
-                      <a:endParaRPr lang="en-US" sz="1000" dirty="0">
-                        <a:latin typeface="Cambria" charset="0"/>
-                        <a:ea typeface="Cambria" charset="0"/>
-                        <a:cs typeface="Cambria" charset="0"/>
-                      </a:endParaRPr>
-                    </a:p>
-                  </a:txBody>
-                  <a:tcPr marL="91440" marR="91440" marT="45720" marB="45720" anchor="ctr">
-                    <a:lnL w="0" cap="flat" cmpd="sng" algn="ctr">
-                      <a:noFill/>
-                    </a:lnL>
-                    <a:lnR w="0" cap="flat" cmpd="sng" algn="ctr">
-                      <a:noFill/>
-                    </a:lnR>
-                    <a:lnT w="0" cap="flat" cmpd="sng" algn="ctr">
-                      <a:noFill/>
-                    </a:lnT>
-                    <a:lnB w="6350" cap="flat" cmpd="sng" algn="ctr">
-                      <a:solidFill>
-                        <a:srgbClr val="E6E4DE"/>
-                      </a:solidFill>
-                      <a:prstDash val="solid"/>
-                      <a:round/>
-                      <a:headEnd type="none" w="med" len="med"/>
-                      <a:tailEnd type="none" w="med" len="med"/>
-                    </a:lnB>
-                  </a:tcPr>
-                </a:tc>
-                <a:tc>
-                  <a:txBody>
-                    <a:bodyPr/>
-                    <a:lstStyle/>
-                    <a:p>
-                      <a:pPr indent="0" marL="0">
-                        <a:buNone/>
-                      </a:pPr>
-                      <a:r>
-                        <a:rPr lang="en-US" sz="1000" dirty="0">
-                          <a:solidFill>
-                            <a:srgbClr val="1A1A18"/>
-                          </a:solidFill>
-                          <a:latin typeface="Cambria" pitchFamily="34" charset="0"/>
-                          <a:ea typeface="Cambria" pitchFamily="34" charset="-122"/>
-                          <a:cs typeface="Cambria" pitchFamily="34" charset="-120"/>
-                        </a:rPr>
-                        <a:t>100,0%</a:t>
+                        <a:t>Água Preta</a:t>
+                      </a:r>
+                      <a:endParaRPr lang="en-US" sz="1000" dirty="0">
+                        <a:latin typeface="Cambria" charset="0"/>
+                        <a:ea typeface="Cambria" charset="0"/>
+                        <a:cs typeface="Cambria" charset="0"/>
+                      </a:endParaRPr>
+                    </a:p>
+                  </a:txBody>
+                  <a:tcPr marL="91440" marR="91440" marT="45720" marB="45720" anchor="ctr">
+                    <a:lnL w="0" cap="flat" cmpd="sng" algn="ctr">
+                      <a:noFill/>
+                    </a:lnL>
+                    <a:lnR w="0" cap="flat" cmpd="sng" algn="ctr">
+                      <a:noFill/>
+                    </a:lnR>
+                    <a:lnT w="0" cap="flat" cmpd="sng" algn="ctr">
+                      <a:noFill/>
+                    </a:lnT>
+                    <a:lnB w="6350" cap="flat" cmpd="sng" algn="ctr">
+                      <a:solidFill>
+                        <a:srgbClr val="E6E4DE"/>
+                      </a:solidFill>
+                      <a:prstDash val="solid"/>
+                      <a:round/>
+                      <a:headEnd type="none" w="med" len="med"/>
+                      <a:tailEnd type="none" w="med" len="med"/>
+                    </a:lnB>
+                  </a:tcPr>
+                </a:tc>
+                <a:tc>
+                  <a:txBody>
+                    <a:bodyPr/>
+                    <a:lstStyle/>
+                    <a:p>
+                      <a:pPr indent="0" marL="0">
+                        <a:buNone/>
+                      </a:pPr>
+                      <a:r>
+                        <a:rPr lang="en-US" sz="1000" dirty="0">
+                          <a:solidFill>
+                            <a:srgbClr val="1A1A18"/>
+                          </a:solidFill>
+                          <a:latin typeface="Cambria" pitchFamily="34" charset="0"/>
+                          <a:ea typeface="Cambria" pitchFamily="34" charset="-122"/>
+                          <a:cs typeface="Cambria" pitchFamily="34" charset="-120"/>
+                        </a:rPr>
+                        <a:t>18</a:t>
+                      </a:r>
+                      <a:endParaRPr lang="en-US" sz="1000" dirty="0">
+                        <a:latin typeface="Cambria" charset="0"/>
+                        <a:ea typeface="Cambria" charset="0"/>
+                        <a:cs typeface="Cambria" charset="0"/>
+                      </a:endParaRPr>
+                    </a:p>
+                  </a:txBody>
+                  <a:tcPr marL="91440" marR="91440" marT="45720" marB="45720" anchor="ctr">
+                    <a:lnL w="0" cap="flat" cmpd="sng" algn="ctr">
+                      <a:noFill/>
+                    </a:lnL>
+                    <a:lnR w="0" cap="flat" cmpd="sng" algn="ctr">
+                      <a:noFill/>
+                    </a:lnR>
+                    <a:lnT w="0" cap="flat" cmpd="sng" algn="ctr">
+                      <a:noFill/>
+                    </a:lnT>
+                    <a:lnB w="6350" cap="flat" cmpd="sng" algn="ctr">
+                      <a:solidFill>
+                        <a:srgbClr val="E6E4DE"/>
+                      </a:solidFill>
+                      <a:prstDash val="solid"/>
+                      <a:round/>
+                      <a:headEnd type="none" w="med" len="med"/>
+                      <a:tailEnd type="none" w="med" len="med"/>
+                    </a:lnB>
+                  </a:tcPr>
+                </a:tc>
+                <a:tc>
+                  <a:txBody>
+                    <a:bodyPr/>
+                    <a:lstStyle/>
+                    <a:p>
+                      <a:pPr indent="0" marL="0">
+                        <a:buNone/>
+                      </a:pPr>
+                      <a:r>
+                        <a:rPr lang="en-US" sz="1000" dirty="0">
+                          <a:solidFill>
+                            <a:srgbClr val="1A1A18"/>
+                          </a:solidFill>
+                          <a:latin typeface="Cambria" pitchFamily="34" charset="0"/>
+                          <a:ea typeface="Cambria" pitchFamily="34" charset="-122"/>
+                          <a:cs typeface="Cambria" pitchFamily="34" charset="-120"/>
+                        </a:rPr>
+                        <a:t>5</a:t>
+                      </a:r>
+                      <a:endParaRPr lang="en-US" sz="1000" dirty="0">
+                        <a:latin typeface="Cambria" charset="0"/>
+                        <a:ea typeface="Cambria" charset="0"/>
+                        <a:cs typeface="Cambria" charset="0"/>
+                      </a:endParaRPr>
+                    </a:p>
+                  </a:txBody>
+                  <a:tcPr marL="91440" marR="91440" marT="45720" marB="45720" anchor="ctr">
+                    <a:lnL w="0" cap="flat" cmpd="sng" algn="ctr">
+                      <a:noFill/>
+                    </a:lnL>
+                    <a:lnR w="0" cap="flat" cmpd="sng" algn="ctr">
+                      <a:noFill/>
+                    </a:lnR>
+                    <a:lnT w="0" cap="flat" cmpd="sng" algn="ctr">
+                      <a:noFill/>
+                    </a:lnT>
+                    <a:lnB w="6350" cap="flat" cmpd="sng" algn="ctr">
+                      <a:solidFill>
+                        <a:srgbClr val="E6E4DE"/>
+                      </a:solidFill>
+                      <a:prstDash val="solid"/>
+                      <a:round/>
+                      <a:headEnd type="none" w="med" len="med"/>
+                      <a:tailEnd type="none" w="med" len="med"/>
+                    </a:lnB>
+                  </a:tcPr>
+                </a:tc>
+                <a:tc>
+                  <a:txBody>
+                    <a:bodyPr/>
+                    <a:lstStyle/>
+                    <a:p>
+                      <a:pPr indent="0" marL="0">
+                        <a:buNone/>
+                      </a:pPr>
+                      <a:r>
+                        <a:rPr lang="en-US" sz="1000" dirty="0">
+                          <a:solidFill>
+                            <a:srgbClr val="1A1A18"/>
+                          </a:solidFill>
+                          <a:latin typeface="Cambria" pitchFamily="34" charset="0"/>
+                          <a:ea typeface="Cambria" pitchFamily="34" charset="-122"/>
+                          <a:cs typeface="Cambria" pitchFamily="34" charset="-120"/>
+                        </a:rPr>
+                        <a:t>27,8%</a:t>
                       </a:r>
                       <a:endParaRPr lang="en-US" sz="1000" dirty="0">
                         <a:latin typeface="Cambria" charset="0"/>
@@ -29977,148 +30167,148 @@
                           <a:ea typeface="Cambria" pitchFamily="34" charset="-122"/>
                           <a:cs typeface="Cambria" pitchFamily="34" charset="-120"/>
                         </a:rPr>
-                        <a:t>Água Preta</a:t>
-                      </a:r>
-                      <a:endParaRPr lang="en-US" sz="1000" dirty="0">
-                        <a:latin typeface="Cambria" charset="0"/>
-                        <a:ea typeface="Cambria" charset="0"/>
-                        <a:cs typeface="Cambria" charset="0"/>
-                      </a:endParaRPr>
-                    </a:p>
-                  </a:txBody>
-                  <a:tcPr marL="91440" marR="91440" marT="45720" marB="45720" anchor="ctr">
-                    <a:lnL w="0" cap="flat" cmpd="sng" algn="ctr">
-                      <a:noFill/>
-                    </a:lnL>
-                    <a:lnR w="0" cap="flat" cmpd="sng" algn="ctr">
-                      <a:noFill/>
-                    </a:lnR>
-                    <a:lnT w="0" cap="flat" cmpd="sng" algn="ctr">
-                      <a:noFill/>
-                    </a:lnT>
-                    <a:lnB w="6350" cap="flat" cmpd="sng" algn="ctr">
-                      <a:solidFill>
-                        <a:srgbClr val="E6E4DE"/>
-                      </a:solidFill>
-                      <a:prstDash val="solid"/>
-                      <a:round/>
-                      <a:headEnd type="none" w="med" len="med"/>
-                      <a:tailEnd type="none" w="med" len="med"/>
-                    </a:lnB>
-                  </a:tcPr>
-                </a:tc>
-                <a:tc>
-                  <a:txBody>
-                    <a:bodyPr/>
-                    <a:lstStyle/>
-                    <a:p>
-                      <a:pPr indent="0" marL="0">
-                        <a:buNone/>
-                      </a:pPr>
-                      <a:r>
-                        <a:rPr lang="en-US" sz="1000" dirty="0">
-                          <a:solidFill>
-                            <a:srgbClr val="1A1A18"/>
-                          </a:solidFill>
-                          <a:latin typeface="Cambria" pitchFamily="34" charset="0"/>
-                          <a:ea typeface="Cambria" pitchFamily="34" charset="-122"/>
-                          <a:cs typeface="Cambria" pitchFamily="34" charset="-120"/>
-                        </a:rPr>
-                        <a:t>18</a:t>
-                      </a:r>
-                      <a:endParaRPr lang="en-US" sz="1000" dirty="0">
-                        <a:latin typeface="Cambria" charset="0"/>
-                        <a:ea typeface="Cambria" charset="0"/>
-                        <a:cs typeface="Cambria" charset="0"/>
-                      </a:endParaRPr>
-                    </a:p>
-                  </a:txBody>
-                  <a:tcPr marL="91440" marR="91440" marT="45720" marB="45720" anchor="ctr">
-                    <a:lnL w="0" cap="flat" cmpd="sng" algn="ctr">
-                      <a:noFill/>
-                    </a:lnL>
-                    <a:lnR w="0" cap="flat" cmpd="sng" algn="ctr">
-                      <a:noFill/>
-                    </a:lnR>
-                    <a:lnT w="0" cap="flat" cmpd="sng" algn="ctr">
-                      <a:noFill/>
-                    </a:lnT>
-                    <a:lnB w="6350" cap="flat" cmpd="sng" algn="ctr">
-                      <a:solidFill>
-                        <a:srgbClr val="E6E4DE"/>
-                      </a:solidFill>
-                      <a:prstDash val="solid"/>
-                      <a:round/>
-                      <a:headEnd type="none" w="med" len="med"/>
-                      <a:tailEnd type="none" w="med" len="med"/>
-                    </a:lnB>
-                  </a:tcPr>
-                </a:tc>
-                <a:tc>
-                  <a:txBody>
-                    <a:bodyPr/>
-                    <a:lstStyle/>
-                    <a:p>
-                      <a:pPr indent="0" marL="0">
-                        <a:buNone/>
-                      </a:pPr>
-                      <a:r>
-                        <a:rPr lang="en-US" sz="1000" dirty="0">
-                          <a:solidFill>
-                            <a:srgbClr val="1A1A18"/>
-                          </a:solidFill>
-                          <a:latin typeface="Cambria" pitchFamily="34" charset="0"/>
-                          <a:ea typeface="Cambria" pitchFamily="34" charset="-122"/>
-                          <a:cs typeface="Cambria" pitchFamily="34" charset="-120"/>
-                        </a:rPr>
-                        <a:t>5</a:t>
-                      </a:r>
-                      <a:endParaRPr lang="en-US" sz="1000" dirty="0">
-                        <a:latin typeface="Cambria" charset="0"/>
-                        <a:ea typeface="Cambria" charset="0"/>
-                        <a:cs typeface="Cambria" charset="0"/>
-                      </a:endParaRPr>
-                    </a:p>
-                  </a:txBody>
-                  <a:tcPr marL="91440" marR="91440" marT="45720" marB="45720" anchor="ctr">
-                    <a:lnL w="0" cap="flat" cmpd="sng" algn="ctr">
-                      <a:noFill/>
-                    </a:lnL>
-                    <a:lnR w="0" cap="flat" cmpd="sng" algn="ctr">
-                      <a:noFill/>
-                    </a:lnR>
-                    <a:lnT w="0" cap="flat" cmpd="sng" algn="ctr">
-                      <a:noFill/>
-                    </a:lnT>
-                    <a:lnB w="6350" cap="flat" cmpd="sng" algn="ctr">
-                      <a:solidFill>
-                        <a:srgbClr val="E6E4DE"/>
-                      </a:solidFill>
-                      <a:prstDash val="solid"/>
-                      <a:round/>
-                      <a:headEnd type="none" w="med" len="med"/>
-                      <a:tailEnd type="none" w="med" len="med"/>
-                    </a:lnB>
-                  </a:tcPr>
-                </a:tc>
-                <a:tc>
-                  <a:txBody>
-                    <a:bodyPr/>
-                    <a:lstStyle/>
-                    <a:p>
-                      <a:pPr indent="0" marL="0">
-                        <a:buNone/>
-                      </a:pPr>
-                      <a:r>
-                        <a:rPr lang="en-US" sz="1000" dirty="0">
-                          <a:solidFill>
-                            <a:srgbClr val="1A1A18"/>
-                          </a:solidFill>
-                          <a:latin typeface="Cambria" pitchFamily="34" charset="0"/>
-                          <a:ea typeface="Cambria" pitchFamily="34" charset="-122"/>
-                          <a:cs typeface="Cambria" pitchFamily="34" charset="-120"/>
-                        </a:rPr>
-                        <a:t>27,8%</a:t>
+                        <a:t>Vicentinópolis</a:t>
+                      </a:r>
+                      <a:endParaRPr lang="en-US" sz="1000" dirty="0">
+                        <a:latin typeface="Cambria" charset="0"/>
+                        <a:ea typeface="Cambria" charset="0"/>
+                        <a:cs typeface="Cambria" charset="0"/>
+                      </a:endParaRPr>
+                    </a:p>
+                  </a:txBody>
+                  <a:tcPr marL="91440" marR="91440" marT="45720" marB="45720" anchor="ctr">
+                    <a:lnL w="0" cap="flat" cmpd="sng" algn="ctr">
+                      <a:noFill/>
+                    </a:lnL>
+                    <a:lnR w="0" cap="flat" cmpd="sng" algn="ctr">
+                      <a:noFill/>
+                    </a:lnR>
+                    <a:lnT w="0" cap="flat" cmpd="sng" algn="ctr">
+                      <a:noFill/>
+                    </a:lnT>
+                    <a:lnB w="6350" cap="flat" cmpd="sng" algn="ctr">
+                      <a:solidFill>
+                        <a:srgbClr val="E6E4DE"/>
+                      </a:solidFill>
+                      <a:prstDash val="solid"/>
+                      <a:round/>
+                      <a:headEnd type="none" w="med" len="med"/>
+                      <a:tailEnd type="none" w="med" len="med"/>
+                    </a:lnB>
+                  </a:tcPr>
+                </a:tc>
+                <a:tc>
+                  <a:txBody>
+                    <a:bodyPr/>
+                    <a:lstStyle/>
+                    <a:p>
+                      <a:pPr indent="0" marL="0">
+                        <a:buNone/>
+                      </a:pPr>
+                      <a:r>
+                        <a:rPr lang="en-US" sz="1000" dirty="0">
+                          <a:solidFill>
+                            <a:srgbClr val="1A1A18"/>
+                          </a:solidFill>
+                          <a:latin typeface="Cambria" pitchFamily="34" charset="0"/>
+                          <a:ea typeface="Cambria" pitchFamily="34" charset="-122"/>
+                          <a:cs typeface="Cambria" pitchFamily="34" charset="-120"/>
+                        </a:rPr>
+                        <a:t>11</a:t>
+                      </a:r>
+                      <a:endParaRPr lang="en-US" sz="1000" dirty="0">
+                        <a:latin typeface="Cambria" charset="0"/>
+                        <a:ea typeface="Cambria" charset="0"/>
+                        <a:cs typeface="Cambria" charset="0"/>
+                      </a:endParaRPr>
+                    </a:p>
+                  </a:txBody>
+                  <a:tcPr marL="91440" marR="91440" marT="45720" marB="45720" anchor="ctr">
+                    <a:lnL w="0" cap="flat" cmpd="sng" algn="ctr">
+                      <a:noFill/>
+                    </a:lnL>
+                    <a:lnR w="0" cap="flat" cmpd="sng" algn="ctr">
+                      <a:noFill/>
+                    </a:lnR>
+                    <a:lnT w="0" cap="flat" cmpd="sng" algn="ctr">
+                      <a:noFill/>
+                    </a:lnT>
+                    <a:lnB w="6350" cap="flat" cmpd="sng" algn="ctr">
+                      <a:solidFill>
+                        <a:srgbClr val="E6E4DE"/>
+                      </a:solidFill>
+                      <a:prstDash val="solid"/>
+                      <a:round/>
+                      <a:headEnd type="none" w="med" len="med"/>
+                      <a:tailEnd type="none" w="med" len="med"/>
+                    </a:lnB>
+                  </a:tcPr>
+                </a:tc>
+                <a:tc>
+                  <a:txBody>
+                    <a:bodyPr/>
+                    <a:lstStyle/>
+                    <a:p>
+                      <a:pPr indent="0" marL="0">
+                        <a:buNone/>
+                      </a:pPr>
+                      <a:r>
+                        <a:rPr lang="en-US" sz="1000" dirty="0">
+                          <a:solidFill>
+                            <a:srgbClr val="1A1A18"/>
+                          </a:solidFill>
+                          <a:latin typeface="Cambria" pitchFamily="34" charset="0"/>
+                          <a:ea typeface="Cambria" pitchFamily="34" charset="-122"/>
+                          <a:cs typeface="Cambria" pitchFamily="34" charset="-120"/>
+                        </a:rPr>
+                        <a:t>3</a:t>
+                      </a:r>
+                      <a:endParaRPr lang="en-US" sz="1000" dirty="0">
+                        <a:latin typeface="Cambria" charset="0"/>
+                        <a:ea typeface="Cambria" charset="0"/>
+                        <a:cs typeface="Cambria" charset="0"/>
+                      </a:endParaRPr>
+                    </a:p>
+                  </a:txBody>
+                  <a:tcPr marL="91440" marR="91440" marT="45720" marB="45720" anchor="ctr">
+                    <a:lnL w="0" cap="flat" cmpd="sng" algn="ctr">
+                      <a:noFill/>
+                    </a:lnL>
+                    <a:lnR w="0" cap="flat" cmpd="sng" algn="ctr">
+                      <a:noFill/>
+                    </a:lnR>
+                    <a:lnT w="0" cap="flat" cmpd="sng" algn="ctr">
+                      <a:noFill/>
+                    </a:lnT>
+                    <a:lnB w="6350" cap="flat" cmpd="sng" algn="ctr">
+                      <a:solidFill>
+                        <a:srgbClr val="E6E4DE"/>
+                      </a:solidFill>
+                      <a:prstDash val="solid"/>
+                      <a:round/>
+                      <a:headEnd type="none" w="med" len="med"/>
+                      <a:tailEnd type="none" w="med" len="med"/>
+                    </a:lnB>
+                  </a:tcPr>
+                </a:tc>
+                <a:tc>
+                  <a:txBody>
+                    <a:bodyPr/>
+                    <a:lstStyle/>
+                    <a:p>
+                      <a:pPr indent="0" marL="0">
+                        <a:buNone/>
+                      </a:pPr>
+                      <a:r>
+                        <a:rPr lang="en-US" sz="1000" dirty="0">
+                          <a:solidFill>
+                            <a:srgbClr val="1A1A18"/>
+                          </a:solidFill>
+                          <a:latin typeface="Cambria" pitchFamily="34" charset="0"/>
+                          <a:ea typeface="Cambria" pitchFamily="34" charset="-122"/>
+                          <a:cs typeface="Cambria" pitchFamily="34" charset="-120"/>
+                        </a:rPr>
+                        <a:t>27,3%</a:t>
                       </a:r>
                       <a:endParaRPr lang="en-US" sz="1000" dirty="0">
                         <a:latin typeface="Cambria" charset="0"/>
@@ -30167,148 +30357,148 @@
                           <a:ea typeface="Cambria" pitchFamily="34" charset="-122"/>
                           <a:cs typeface="Cambria" pitchFamily="34" charset="-120"/>
                         </a:rPr>
-                        <a:t>Vicentinópolis</a:t>
-                      </a:r>
-                      <a:endParaRPr lang="en-US" sz="1000" dirty="0">
-                        <a:latin typeface="Cambria" charset="0"/>
-                        <a:ea typeface="Cambria" charset="0"/>
-                        <a:cs typeface="Cambria" charset="0"/>
-                      </a:endParaRPr>
-                    </a:p>
-                  </a:txBody>
-                  <a:tcPr marL="91440" marR="91440" marT="45720" marB="45720" anchor="ctr">
-                    <a:lnL w="0" cap="flat" cmpd="sng" algn="ctr">
-                      <a:noFill/>
-                    </a:lnL>
-                    <a:lnR w="0" cap="flat" cmpd="sng" algn="ctr">
-                      <a:noFill/>
-                    </a:lnR>
-                    <a:lnT w="0" cap="flat" cmpd="sng" algn="ctr">
-                      <a:noFill/>
-                    </a:lnT>
-                    <a:lnB w="6350" cap="flat" cmpd="sng" algn="ctr">
-                      <a:solidFill>
-                        <a:srgbClr val="E6E4DE"/>
-                      </a:solidFill>
-                      <a:prstDash val="solid"/>
-                      <a:round/>
-                      <a:headEnd type="none" w="med" len="med"/>
-                      <a:tailEnd type="none" w="med" len="med"/>
-                    </a:lnB>
-                  </a:tcPr>
-                </a:tc>
-                <a:tc>
-                  <a:txBody>
-                    <a:bodyPr/>
-                    <a:lstStyle/>
-                    <a:p>
-                      <a:pPr indent="0" marL="0">
-                        <a:buNone/>
-                      </a:pPr>
-                      <a:r>
-                        <a:rPr lang="en-US" sz="1000" dirty="0">
-                          <a:solidFill>
-                            <a:srgbClr val="1A1A18"/>
-                          </a:solidFill>
-                          <a:latin typeface="Cambria" pitchFamily="34" charset="0"/>
-                          <a:ea typeface="Cambria" pitchFamily="34" charset="-122"/>
-                          <a:cs typeface="Cambria" pitchFamily="34" charset="-120"/>
-                        </a:rPr>
-                        <a:t>11</a:t>
-                      </a:r>
-                      <a:endParaRPr lang="en-US" sz="1000" dirty="0">
-                        <a:latin typeface="Cambria" charset="0"/>
-                        <a:ea typeface="Cambria" charset="0"/>
-                        <a:cs typeface="Cambria" charset="0"/>
-                      </a:endParaRPr>
-                    </a:p>
-                  </a:txBody>
-                  <a:tcPr marL="91440" marR="91440" marT="45720" marB="45720" anchor="ctr">
-                    <a:lnL w="0" cap="flat" cmpd="sng" algn="ctr">
-                      <a:noFill/>
-                    </a:lnL>
-                    <a:lnR w="0" cap="flat" cmpd="sng" algn="ctr">
-                      <a:noFill/>
-                    </a:lnR>
-                    <a:lnT w="0" cap="flat" cmpd="sng" algn="ctr">
-                      <a:noFill/>
-                    </a:lnT>
-                    <a:lnB w="6350" cap="flat" cmpd="sng" algn="ctr">
-                      <a:solidFill>
-                        <a:srgbClr val="E6E4DE"/>
-                      </a:solidFill>
-                      <a:prstDash val="solid"/>
-                      <a:round/>
-                      <a:headEnd type="none" w="med" len="med"/>
-                      <a:tailEnd type="none" w="med" len="med"/>
-                    </a:lnB>
-                  </a:tcPr>
-                </a:tc>
-                <a:tc>
-                  <a:txBody>
-                    <a:bodyPr/>
-                    <a:lstStyle/>
-                    <a:p>
-                      <a:pPr indent="0" marL="0">
-                        <a:buNone/>
-                      </a:pPr>
-                      <a:r>
-                        <a:rPr lang="en-US" sz="1000" dirty="0">
-                          <a:solidFill>
-                            <a:srgbClr val="1A1A18"/>
-                          </a:solidFill>
-                          <a:latin typeface="Cambria" pitchFamily="34" charset="0"/>
-                          <a:ea typeface="Cambria" pitchFamily="34" charset="-122"/>
-                          <a:cs typeface="Cambria" pitchFamily="34" charset="-120"/>
-                        </a:rPr>
-                        <a:t>3</a:t>
-                      </a:r>
-                      <a:endParaRPr lang="en-US" sz="1000" dirty="0">
-                        <a:latin typeface="Cambria" charset="0"/>
-                        <a:ea typeface="Cambria" charset="0"/>
-                        <a:cs typeface="Cambria" charset="0"/>
-                      </a:endParaRPr>
-                    </a:p>
-                  </a:txBody>
-                  <a:tcPr marL="91440" marR="91440" marT="45720" marB="45720" anchor="ctr">
-                    <a:lnL w="0" cap="flat" cmpd="sng" algn="ctr">
-                      <a:noFill/>
-                    </a:lnL>
-                    <a:lnR w="0" cap="flat" cmpd="sng" algn="ctr">
-                      <a:noFill/>
-                    </a:lnR>
-                    <a:lnT w="0" cap="flat" cmpd="sng" algn="ctr">
-                      <a:noFill/>
-                    </a:lnT>
-                    <a:lnB w="6350" cap="flat" cmpd="sng" algn="ctr">
-                      <a:solidFill>
-                        <a:srgbClr val="E6E4DE"/>
-                      </a:solidFill>
-                      <a:prstDash val="solid"/>
-                      <a:round/>
-                      <a:headEnd type="none" w="med" len="med"/>
-                      <a:tailEnd type="none" w="med" len="med"/>
-                    </a:lnB>
-                  </a:tcPr>
-                </a:tc>
-                <a:tc>
-                  <a:txBody>
-                    <a:bodyPr/>
-                    <a:lstStyle/>
-                    <a:p>
-                      <a:pPr indent="0" marL="0">
-                        <a:buNone/>
-                      </a:pPr>
-                      <a:r>
-                        <a:rPr lang="en-US" sz="1000" dirty="0">
-                          <a:solidFill>
-                            <a:srgbClr val="1A1A18"/>
-                          </a:solidFill>
-                          <a:latin typeface="Cambria" pitchFamily="34" charset="0"/>
-                          <a:ea typeface="Cambria" pitchFamily="34" charset="-122"/>
-                          <a:cs typeface="Cambria" pitchFamily="34" charset="-120"/>
-                        </a:rPr>
-                        <a:t>27,3%</a:t>
+                        <a:t>Japoatã</a:t>
+                      </a:r>
+                      <a:endParaRPr lang="en-US" sz="1000" dirty="0">
+                        <a:latin typeface="Cambria" charset="0"/>
+                        <a:ea typeface="Cambria" charset="0"/>
+                        <a:cs typeface="Cambria" charset="0"/>
+                      </a:endParaRPr>
+                    </a:p>
+                  </a:txBody>
+                  <a:tcPr marL="91440" marR="91440" marT="45720" marB="45720" anchor="ctr">
+                    <a:lnL w="0" cap="flat" cmpd="sng" algn="ctr">
+                      <a:noFill/>
+                    </a:lnL>
+                    <a:lnR w="0" cap="flat" cmpd="sng" algn="ctr">
+                      <a:noFill/>
+                    </a:lnR>
+                    <a:lnT w="0" cap="flat" cmpd="sng" algn="ctr">
+                      <a:noFill/>
+                    </a:lnT>
+                    <a:lnB w="6350" cap="flat" cmpd="sng" algn="ctr">
+                      <a:solidFill>
+                        <a:srgbClr val="E6E4DE"/>
+                      </a:solidFill>
+                      <a:prstDash val="solid"/>
+                      <a:round/>
+                      <a:headEnd type="none" w="med" len="med"/>
+                      <a:tailEnd type="none" w="med" len="med"/>
+                    </a:lnB>
+                  </a:tcPr>
+                </a:tc>
+                <a:tc>
+                  <a:txBody>
+                    <a:bodyPr/>
+                    <a:lstStyle/>
+                    <a:p>
+                      <a:pPr indent="0" marL="0">
+                        <a:buNone/>
+                      </a:pPr>
+                      <a:r>
+                        <a:rPr lang="en-US" sz="1000" dirty="0">
+                          <a:solidFill>
+                            <a:srgbClr val="1A1A18"/>
+                          </a:solidFill>
+                          <a:latin typeface="Cambria" pitchFamily="34" charset="0"/>
+                          <a:ea typeface="Cambria" pitchFamily="34" charset="-122"/>
+                          <a:cs typeface="Cambria" pitchFamily="34" charset="-120"/>
+                        </a:rPr>
+                        <a:t>4</a:t>
+                      </a:r>
+                      <a:endParaRPr lang="en-US" sz="1000" dirty="0">
+                        <a:latin typeface="Cambria" charset="0"/>
+                        <a:ea typeface="Cambria" charset="0"/>
+                        <a:cs typeface="Cambria" charset="0"/>
+                      </a:endParaRPr>
+                    </a:p>
+                  </a:txBody>
+                  <a:tcPr marL="91440" marR="91440" marT="45720" marB="45720" anchor="ctr">
+                    <a:lnL w="0" cap="flat" cmpd="sng" algn="ctr">
+                      <a:noFill/>
+                    </a:lnL>
+                    <a:lnR w="0" cap="flat" cmpd="sng" algn="ctr">
+                      <a:noFill/>
+                    </a:lnR>
+                    <a:lnT w="0" cap="flat" cmpd="sng" algn="ctr">
+                      <a:noFill/>
+                    </a:lnT>
+                    <a:lnB w="6350" cap="flat" cmpd="sng" algn="ctr">
+                      <a:solidFill>
+                        <a:srgbClr val="E6E4DE"/>
+                      </a:solidFill>
+                      <a:prstDash val="solid"/>
+                      <a:round/>
+                      <a:headEnd type="none" w="med" len="med"/>
+                      <a:tailEnd type="none" w="med" len="med"/>
+                    </a:lnB>
+                  </a:tcPr>
+                </a:tc>
+                <a:tc>
+                  <a:txBody>
+                    <a:bodyPr/>
+                    <a:lstStyle/>
+                    <a:p>
+                      <a:pPr indent="0" marL="0">
+                        <a:buNone/>
+                      </a:pPr>
+                      <a:r>
+                        <a:rPr lang="en-US" sz="1000" dirty="0">
+                          <a:solidFill>
+                            <a:srgbClr val="1A1A18"/>
+                          </a:solidFill>
+                          <a:latin typeface="Cambria" pitchFamily="34" charset="0"/>
+                          <a:ea typeface="Cambria" pitchFamily="34" charset="-122"/>
+                          <a:cs typeface="Cambria" pitchFamily="34" charset="-120"/>
+                        </a:rPr>
+                        <a:t>1</a:t>
+                      </a:r>
+                      <a:endParaRPr lang="en-US" sz="1000" dirty="0">
+                        <a:latin typeface="Cambria" charset="0"/>
+                        <a:ea typeface="Cambria" charset="0"/>
+                        <a:cs typeface="Cambria" charset="0"/>
+                      </a:endParaRPr>
+                    </a:p>
+                  </a:txBody>
+                  <a:tcPr marL="91440" marR="91440" marT="45720" marB="45720" anchor="ctr">
+                    <a:lnL w="0" cap="flat" cmpd="sng" algn="ctr">
+                      <a:noFill/>
+                    </a:lnL>
+                    <a:lnR w="0" cap="flat" cmpd="sng" algn="ctr">
+                      <a:noFill/>
+                    </a:lnR>
+                    <a:lnT w="0" cap="flat" cmpd="sng" algn="ctr">
+                      <a:noFill/>
+                    </a:lnT>
+                    <a:lnB w="6350" cap="flat" cmpd="sng" algn="ctr">
+                      <a:solidFill>
+                        <a:srgbClr val="E6E4DE"/>
+                      </a:solidFill>
+                      <a:prstDash val="solid"/>
+                      <a:round/>
+                      <a:headEnd type="none" w="med" len="med"/>
+                      <a:tailEnd type="none" w="med" len="med"/>
+                    </a:lnB>
+                  </a:tcPr>
+                </a:tc>
+                <a:tc>
+                  <a:txBody>
+                    <a:bodyPr/>
+                    <a:lstStyle/>
+                    <a:p>
+                      <a:pPr indent="0" marL="0">
+                        <a:buNone/>
+                      </a:pPr>
+                      <a:r>
+                        <a:rPr lang="en-US" sz="1000" dirty="0">
+                          <a:solidFill>
+                            <a:srgbClr val="1A1A18"/>
+                          </a:solidFill>
+                          <a:latin typeface="Cambria" pitchFamily="34" charset="0"/>
+                          <a:ea typeface="Cambria" pitchFamily="34" charset="-122"/>
+                          <a:cs typeface="Cambria" pitchFamily="34" charset="-120"/>
+                        </a:rPr>
+                        <a:t>25,0%</a:t>
                       </a:r>
                       <a:endParaRPr lang="en-US" sz="1000" dirty="0">
                         <a:latin typeface="Cambria" charset="0"/>
@@ -30357,148 +30547,148 @@
                           <a:ea typeface="Cambria" pitchFamily="34" charset="-122"/>
                           <a:cs typeface="Cambria" pitchFamily="34" charset="-120"/>
                         </a:rPr>
-                        <a:t>Japoatã</a:t>
-                      </a:r>
-                      <a:endParaRPr lang="en-US" sz="1000" dirty="0">
-                        <a:latin typeface="Cambria" charset="0"/>
-                        <a:ea typeface="Cambria" charset="0"/>
-                        <a:cs typeface="Cambria" charset="0"/>
-                      </a:endParaRPr>
-                    </a:p>
-                  </a:txBody>
-                  <a:tcPr marL="91440" marR="91440" marT="45720" marB="45720" anchor="ctr">
-                    <a:lnL w="0" cap="flat" cmpd="sng" algn="ctr">
-                      <a:noFill/>
-                    </a:lnL>
-                    <a:lnR w="0" cap="flat" cmpd="sng" algn="ctr">
-                      <a:noFill/>
-                    </a:lnR>
-                    <a:lnT w="0" cap="flat" cmpd="sng" algn="ctr">
-                      <a:noFill/>
-                    </a:lnT>
-                    <a:lnB w="6350" cap="flat" cmpd="sng" algn="ctr">
-                      <a:solidFill>
-                        <a:srgbClr val="E6E4DE"/>
-                      </a:solidFill>
-                      <a:prstDash val="solid"/>
-                      <a:round/>
-                      <a:headEnd type="none" w="med" len="med"/>
-                      <a:tailEnd type="none" w="med" len="med"/>
-                    </a:lnB>
-                  </a:tcPr>
-                </a:tc>
-                <a:tc>
-                  <a:txBody>
-                    <a:bodyPr/>
-                    <a:lstStyle/>
-                    <a:p>
-                      <a:pPr indent="0" marL="0">
-                        <a:buNone/>
-                      </a:pPr>
-                      <a:r>
-                        <a:rPr lang="en-US" sz="1000" dirty="0">
-                          <a:solidFill>
-                            <a:srgbClr val="1A1A18"/>
-                          </a:solidFill>
-                          <a:latin typeface="Cambria" pitchFamily="34" charset="0"/>
-                          <a:ea typeface="Cambria" pitchFamily="34" charset="-122"/>
-                          <a:cs typeface="Cambria" pitchFamily="34" charset="-120"/>
-                        </a:rPr>
-                        <a:t>4</a:t>
-                      </a:r>
-                      <a:endParaRPr lang="en-US" sz="1000" dirty="0">
-                        <a:latin typeface="Cambria" charset="0"/>
-                        <a:ea typeface="Cambria" charset="0"/>
-                        <a:cs typeface="Cambria" charset="0"/>
-                      </a:endParaRPr>
-                    </a:p>
-                  </a:txBody>
-                  <a:tcPr marL="91440" marR="91440" marT="45720" marB="45720" anchor="ctr">
-                    <a:lnL w="0" cap="flat" cmpd="sng" algn="ctr">
-                      <a:noFill/>
-                    </a:lnL>
-                    <a:lnR w="0" cap="flat" cmpd="sng" algn="ctr">
-                      <a:noFill/>
-                    </a:lnR>
-                    <a:lnT w="0" cap="flat" cmpd="sng" algn="ctr">
-                      <a:noFill/>
-                    </a:lnT>
-                    <a:lnB w="6350" cap="flat" cmpd="sng" algn="ctr">
-                      <a:solidFill>
-                        <a:srgbClr val="E6E4DE"/>
-                      </a:solidFill>
-                      <a:prstDash val="solid"/>
-                      <a:round/>
-                      <a:headEnd type="none" w="med" len="med"/>
-                      <a:tailEnd type="none" w="med" len="med"/>
-                    </a:lnB>
-                  </a:tcPr>
-                </a:tc>
-                <a:tc>
-                  <a:txBody>
-                    <a:bodyPr/>
-                    <a:lstStyle/>
-                    <a:p>
-                      <a:pPr indent="0" marL="0">
-                        <a:buNone/>
-                      </a:pPr>
-                      <a:r>
-                        <a:rPr lang="en-US" sz="1000" dirty="0">
-                          <a:solidFill>
-                            <a:srgbClr val="1A1A18"/>
-                          </a:solidFill>
-                          <a:latin typeface="Cambria" pitchFamily="34" charset="0"/>
-                          <a:ea typeface="Cambria" pitchFamily="34" charset="-122"/>
-                          <a:cs typeface="Cambria" pitchFamily="34" charset="-120"/>
-                        </a:rPr>
-                        <a:t>1</a:t>
-                      </a:r>
-                      <a:endParaRPr lang="en-US" sz="1000" dirty="0">
-                        <a:latin typeface="Cambria" charset="0"/>
-                        <a:ea typeface="Cambria" charset="0"/>
-                        <a:cs typeface="Cambria" charset="0"/>
-                      </a:endParaRPr>
-                    </a:p>
-                  </a:txBody>
-                  <a:tcPr marL="91440" marR="91440" marT="45720" marB="45720" anchor="ctr">
-                    <a:lnL w="0" cap="flat" cmpd="sng" algn="ctr">
-                      <a:noFill/>
-                    </a:lnL>
-                    <a:lnR w="0" cap="flat" cmpd="sng" algn="ctr">
-                      <a:noFill/>
-                    </a:lnR>
-                    <a:lnT w="0" cap="flat" cmpd="sng" algn="ctr">
-                      <a:noFill/>
-                    </a:lnT>
-                    <a:lnB w="6350" cap="flat" cmpd="sng" algn="ctr">
-                      <a:solidFill>
-                        <a:srgbClr val="E6E4DE"/>
-                      </a:solidFill>
-                      <a:prstDash val="solid"/>
-                      <a:round/>
-                      <a:headEnd type="none" w="med" len="med"/>
-                      <a:tailEnd type="none" w="med" len="med"/>
-                    </a:lnB>
-                  </a:tcPr>
-                </a:tc>
-                <a:tc>
-                  <a:txBody>
-                    <a:bodyPr/>
-                    <a:lstStyle/>
-                    <a:p>
-                      <a:pPr indent="0" marL="0">
-                        <a:buNone/>
-                      </a:pPr>
-                      <a:r>
-                        <a:rPr lang="en-US" sz="1000" dirty="0">
-                          <a:solidFill>
-                            <a:srgbClr val="1A1A18"/>
-                          </a:solidFill>
-                          <a:latin typeface="Cambria" pitchFamily="34" charset="0"/>
-                          <a:ea typeface="Cambria" pitchFamily="34" charset="-122"/>
-                          <a:cs typeface="Cambria" pitchFamily="34" charset="-120"/>
-                        </a:rPr>
-                        <a:t>25,0%</a:t>
+                        <a:t>São José dos Pinhais</a:t>
+                      </a:r>
+                      <a:endParaRPr lang="en-US" sz="1000" dirty="0">
+                        <a:latin typeface="Cambria" charset="0"/>
+                        <a:ea typeface="Cambria" charset="0"/>
+                        <a:cs typeface="Cambria" charset="0"/>
+                      </a:endParaRPr>
+                    </a:p>
+                  </a:txBody>
+                  <a:tcPr marL="91440" marR="91440" marT="45720" marB="45720" anchor="ctr">
+                    <a:lnL w="0" cap="flat" cmpd="sng" algn="ctr">
+                      <a:noFill/>
+                    </a:lnL>
+                    <a:lnR w="0" cap="flat" cmpd="sng" algn="ctr">
+                      <a:noFill/>
+                    </a:lnR>
+                    <a:lnT w="0" cap="flat" cmpd="sng" algn="ctr">
+                      <a:noFill/>
+                    </a:lnT>
+                    <a:lnB w="6350" cap="flat" cmpd="sng" algn="ctr">
+                      <a:solidFill>
+                        <a:srgbClr val="E6E4DE"/>
+                      </a:solidFill>
+                      <a:prstDash val="solid"/>
+                      <a:round/>
+                      <a:headEnd type="none" w="med" len="med"/>
+                      <a:tailEnd type="none" w="med" len="med"/>
+                    </a:lnB>
+                  </a:tcPr>
+                </a:tc>
+                <a:tc>
+                  <a:txBody>
+                    <a:bodyPr/>
+                    <a:lstStyle/>
+                    <a:p>
+                      <a:pPr indent="0" marL="0">
+                        <a:buNone/>
+                      </a:pPr>
+                      <a:r>
+                        <a:rPr lang="en-US" sz="1000" dirty="0">
+                          <a:solidFill>
+                            <a:srgbClr val="1A1A18"/>
+                          </a:solidFill>
+                          <a:latin typeface="Cambria" pitchFamily="34" charset="0"/>
+                          <a:ea typeface="Cambria" pitchFamily="34" charset="-122"/>
+                          <a:cs typeface="Cambria" pitchFamily="34" charset="-120"/>
+                        </a:rPr>
+                        <a:t>357</a:t>
+                      </a:r>
+                      <a:endParaRPr lang="en-US" sz="1000" dirty="0">
+                        <a:latin typeface="Cambria" charset="0"/>
+                        <a:ea typeface="Cambria" charset="0"/>
+                        <a:cs typeface="Cambria" charset="0"/>
+                      </a:endParaRPr>
+                    </a:p>
+                  </a:txBody>
+                  <a:tcPr marL="91440" marR="91440" marT="45720" marB="45720" anchor="ctr">
+                    <a:lnL w="0" cap="flat" cmpd="sng" algn="ctr">
+                      <a:noFill/>
+                    </a:lnL>
+                    <a:lnR w="0" cap="flat" cmpd="sng" algn="ctr">
+                      <a:noFill/>
+                    </a:lnR>
+                    <a:lnT w="0" cap="flat" cmpd="sng" algn="ctr">
+                      <a:noFill/>
+                    </a:lnT>
+                    <a:lnB w="6350" cap="flat" cmpd="sng" algn="ctr">
+                      <a:solidFill>
+                        <a:srgbClr val="E6E4DE"/>
+                      </a:solidFill>
+                      <a:prstDash val="solid"/>
+                      <a:round/>
+                      <a:headEnd type="none" w="med" len="med"/>
+                      <a:tailEnd type="none" w="med" len="med"/>
+                    </a:lnB>
+                  </a:tcPr>
+                </a:tc>
+                <a:tc>
+                  <a:txBody>
+                    <a:bodyPr/>
+                    <a:lstStyle/>
+                    <a:p>
+                      <a:pPr indent="0" marL="0">
+                        <a:buNone/>
+                      </a:pPr>
+                      <a:r>
+                        <a:rPr lang="en-US" sz="1000" dirty="0">
+                          <a:solidFill>
+                            <a:srgbClr val="1A1A18"/>
+                          </a:solidFill>
+                          <a:latin typeface="Cambria" pitchFamily="34" charset="0"/>
+                          <a:ea typeface="Cambria" pitchFamily="34" charset="-122"/>
+                          <a:cs typeface="Cambria" pitchFamily="34" charset="-120"/>
+                        </a:rPr>
+                        <a:t>80</a:t>
+                      </a:r>
+                      <a:endParaRPr lang="en-US" sz="1000" dirty="0">
+                        <a:latin typeface="Cambria" charset="0"/>
+                        <a:ea typeface="Cambria" charset="0"/>
+                        <a:cs typeface="Cambria" charset="0"/>
+                      </a:endParaRPr>
+                    </a:p>
+                  </a:txBody>
+                  <a:tcPr marL="91440" marR="91440" marT="45720" marB="45720" anchor="ctr">
+                    <a:lnL w="0" cap="flat" cmpd="sng" algn="ctr">
+                      <a:noFill/>
+                    </a:lnL>
+                    <a:lnR w="0" cap="flat" cmpd="sng" algn="ctr">
+                      <a:noFill/>
+                    </a:lnR>
+                    <a:lnT w="0" cap="flat" cmpd="sng" algn="ctr">
+                      <a:noFill/>
+                    </a:lnT>
+                    <a:lnB w="6350" cap="flat" cmpd="sng" algn="ctr">
+                      <a:solidFill>
+                        <a:srgbClr val="E6E4DE"/>
+                      </a:solidFill>
+                      <a:prstDash val="solid"/>
+                      <a:round/>
+                      <a:headEnd type="none" w="med" len="med"/>
+                      <a:tailEnd type="none" w="med" len="med"/>
+                    </a:lnB>
+                  </a:tcPr>
+                </a:tc>
+                <a:tc>
+                  <a:txBody>
+                    <a:bodyPr/>
+                    <a:lstStyle/>
+                    <a:p>
+                      <a:pPr indent="0" marL="0">
+                        <a:buNone/>
+                      </a:pPr>
+                      <a:r>
+                        <a:rPr lang="en-US" sz="1000" dirty="0">
+                          <a:solidFill>
+                            <a:srgbClr val="1A1A18"/>
+                          </a:solidFill>
+                          <a:latin typeface="Cambria" pitchFamily="34" charset="0"/>
+                          <a:ea typeface="Cambria" pitchFamily="34" charset="-122"/>
+                          <a:cs typeface="Cambria" pitchFamily="34" charset="-120"/>
+                        </a:rPr>
+                        <a:t>22,4%</a:t>
                       </a:r>
                       <a:endParaRPr lang="en-US" sz="1000" dirty="0">
                         <a:latin typeface="Cambria" charset="0"/>
@@ -30547,148 +30737,148 @@
                           <a:ea typeface="Cambria" pitchFamily="34" charset="-122"/>
                           <a:cs typeface="Cambria" pitchFamily="34" charset="-120"/>
                         </a:rPr>
-                        <a:t>São José dos Pinhais</a:t>
-                      </a:r>
-                      <a:endParaRPr lang="en-US" sz="1000" dirty="0">
-                        <a:latin typeface="Cambria" charset="0"/>
-                        <a:ea typeface="Cambria" charset="0"/>
-                        <a:cs typeface="Cambria" charset="0"/>
-                      </a:endParaRPr>
-                    </a:p>
-                  </a:txBody>
-                  <a:tcPr marL="91440" marR="91440" marT="45720" marB="45720" anchor="ctr">
-                    <a:lnL w="0" cap="flat" cmpd="sng" algn="ctr">
-                      <a:noFill/>
-                    </a:lnL>
-                    <a:lnR w="0" cap="flat" cmpd="sng" algn="ctr">
-                      <a:noFill/>
-                    </a:lnR>
-                    <a:lnT w="0" cap="flat" cmpd="sng" algn="ctr">
-                      <a:noFill/>
-                    </a:lnT>
-                    <a:lnB w="6350" cap="flat" cmpd="sng" algn="ctr">
-                      <a:solidFill>
-                        <a:srgbClr val="E6E4DE"/>
-                      </a:solidFill>
-                      <a:prstDash val="solid"/>
-                      <a:round/>
-                      <a:headEnd type="none" w="med" len="med"/>
-                      <a:tailEnd type="none" w="med" len="med"/>
-                    </a:lnB>
-                  </a:tcPr>
-                </a:tc>
-                <a:tc>
-                  <a:txBody>
-                    <a:bodyPr/>
-                    <a:lstStyle/>
-                    <a:p>
-                      <a:pPr indent="0" marL="0">
-                        <a:buNone/>
-                      </a:pPr>
-                      <a:r>
-                        <a:rPr lang="en-US" sz="1000" dirty="0">
-                          <a:solidFill>
-                            <a:srgbClr val="1A1A18"/>
-                          </a:solidFill>
-                          <a:latin typeface="Cambria" pitchFamily="34" charset="0"/>
-                          <a:ea typeface="Cambria" pitchFamily="34" charset="-122"/>
-                          <a:cs typeface="Cambria" pitchFamily="34" charset="-120"/>
-                        </a:rPr>
-                        <a:t>357</a:t>
-                      </a:r>
-                      <a:endParaRPr lang="en-US" sz="1000" dirty="0">
-                        <a:latin typeface="Cambria" charset="0"/>
-                        <a:ea typeface="Cambria" charset="0"/>
-                        <a:cs typeface="Cambria" charset="0"/>
-                      </a:endParaRPr>
-                    </a:p>
-                  </a:txBody>
-                  <a:tcPr marL="91440" marR="91440" marT="45720" marB="45720" anchor="ctr">
-                    <a:lnL w="0" cap="flat" cmpd="sng" algn="ctr">
-                      <a:noFill/>
-                    </a:lnL>
-                    <a:lnR w="0" cap="flat" cmpd="sng" algn="ctr">
-                      <a:noFill/>
-                    </a:lnR>
-                    <a:lnT w="0" cap="flat" cmpd="sng" algn="ctr">
-                      <a:noFill/>
-                    </a:lnT>
-                    <a:lnB w="6350" cap="flat" cmpd="sng" algn="ctr">
-                      <a:solidFill>
-                        <a:srgbClr val="E6E4DE"/>
-                      </a:solidFill>
-                      <a:prstDash val="solid"/>
-                      <a:round/>
-                      <a:headEnd type="none" w="med" len="med"/>
-                      <a:tailEnd type="none" w="med" len="med"/>
-                    </a:lnB>
-                  </a:tcPr>
-                </a:tc>
-                <a:tc>
-                  <a:txBody>
-                    <a:bodyPr/>
-                    <a:lstStyle/>
-                    <a:p>
-                      <a:pPr indent="0" marL="0">
-                        <a:buNone/>
-                      </a:pPr>
-                      <a:r>
-                        <a:rPr lang="en-US" sz="1000" dirty="0">
-                          <a:solidFill>
-                            <a:srgbClr val="1A1A18"/>
-                          </a:solidFill>
-                          <a:latin typeface="Cambria" pitchFamily="34" charset="0"/>
-                          <a:ea typeface="Cambria" pitchFamily="34" charset="-122"/>
-                          <a:cs typeface="Cambria" pitchFamily="34" charset="-120"/>
-                        </a:rPr>
-                        <a:t>80</a:t>
-                      </a:r>
-                      <a:endParaRPr lang="en-US" sz="1000" dirty="0">
-                        <a:latin typeface="Cambria" charset="0"/>
-                        <a:ea typeface="Cambria" charset="0"/>
-                        <a:cs typeface="Cambria" charset="0"/>
-                      </a:endParaRPr>
-                    </a:p>
-                  </a:txBody>
-                  <a:tcPr marL="91440" marR="91440" marT="45720" marB="45720" anchor="ctr">
-                    <a:lnL w="0" cap="flat" cmpd="sng" algn="ctr">
-                      <a:noFill/>
-                    </a:lnL>
-                    <a:lnR w="0" cap="flat" cmpd="sng" algn="ctr">
-                      <a:noFill/>
-                    </a:lnR>
-                    <a:lnT w="0" cap="flat" cmpd="sng" algn="ctr">
-                      <a:noFill/>
-                    </a:lnT>
-                    <a:lnB w="6350" cap="flat" cmpd="sng" algn="ctr">
-                      <a:solidFill>
-                        <a:srgbClr val="E6E4DE"/>
-                      </a:solidFill>
-                      <a:prstDash val="solid"/>
-                      <a:round/>
-                      <a:headEnd type="none" w="med" len="med"/>
-                      <a:tailEnd type="none" w="med" len="med"/>
-                    </a:lnB>
-                  </a:tcPr>
-                </a:tc>
-                <a:tc>
-                  <a:txBody>
-                    <a:bodyPr/>
-                    <a:lstStyle/>
-                    <a:p>
-                      <a:pPr indent="0" marL="0">
-                        <a:buNone/>
-                      </a:pPr>
-                      <a:r>
-                        <a:rPr lang="en-US" sz="1000" dirty="0">
-                          <a:solidFill>
-                            <a:srgbClr val="1A1A18"/>
-                          </a:solidFill>
-                          <a:latin typeface="Cambria" pitchFamily="34" charset="0"/>
-                          <a:ea typeface="Cambria" pitchFamily="34" charset="-122"/>
-                          <a:cs typeface="Cambria" pitchFamily="34" charset="-120"/>
-                        </a:rPr>
-                        <a:t>22,4%</a:t>
+                        <a:t>Porto Alegre</a:t>
+                      </a:r>
+                      <a:endParaRPr lang="en-US" sz="1000" dirty="0">
+                        <a:latin typeface="Cambria" charset="0"/>
+                        <a:ea typeface="Cambria" charset="0"/>
+                        <a:cs typeface="Cambria" charset="0"/>
+                      </a:endParaRPr>
+                    </a:p>
+                  </a:txBody>
+                  <a:tcPr marL="91440" marR="91440" marT="45720" marB="45720" anchor="ctr">
+                    <a:lnL w="0" cap="flat" cmpd="sng" algn="ctr">
+                      <a:noFill/>
+                    </a:lnL>
+                    <a:lnR w="0" cap="flat" cmpd="sng" algn="ctr">
+                      <a:noFill/>
+                    </a:lnR>
+                    <a:lnT w="0" cap="flat" cmpd="sng" algn="ctr">
+                      <a:noFill/>
+                    </a:lnT>
+                    <a:lnB w="6350" cap="flat" cmpd="sng" algn="ctr">
+                      <a:solidFill>
+                        <a:srgbClr val="E6E4DE"/>
+                      </a:solidFill>
+                      <a:prstDash val="solid"/>
+                      <a:round/>
+                      <a:headEnd type="none" w="med" len="med"/>
+                      <a:tailEnd type="none" w="med" len="med"/>
+                    </a:lnB>
+                  </a:tcPr>
+                </a:tc>
+                <a:tc>
+                  <a:txBody>
+                    <a:bodyPr/>
+                    <a:lstStyle/>
+                    <a:p>
+                      <a:pPr indent="0" marL="0">
+                        <a:buNone/>
+                      </a:pPr>
+                      <a:r>
+                        <a:rPr lang="en-US" sz="1000" dirty="0">
+                          <a:solidFill>
+                            <a:srgbClr val="1A1A18"/>
+                          </a:solidFill>
+                          <a:latin typeface="Cambria" pitchFamily="34" charset="0"/>
+                          <a:ea typeface="Cambria" pitchFamily="34" charset="-122"/>
+                          <a:cs typeface="Cambria" pitchFamily="34" charset="-120"/>
+                        </a:rPr>
+                        <a:t>1.521</a:t>
+                      </a:r>
+                      <a:endParaRPr lang="en-US" sz="1000" dirty="0">
+                        <a:latin typeface="Cambria" charset="0"/>
+                        <a:ea typeface="Cambria" charset="0"/>
+                        <a:cs typeface="Cambria" charset="0"/>
+                      </a:endParaRPr>
+                    </a:p>
+                  </a:txBody>
+                  <a:tcPr marL="91440" marR="91440" marT="45720" marB="45720" anchor="ctr">
+                    <a:lnL w="0" cap="flat" cmpd="sng" algn="ctr">
+                      <a:noFill/>
+                    </a:lnL>
+                    <a:lnR w="0" cap="flat" cmpd="sng" algn="ctr">
+                      <a:noFill/>
+                    </a:lnR>
+                    <a:lnT w="0" cap="flat" cmpd="sng" algn="ctr">
+                      <a:noFill/>
+                    </a:lnT>
+                    <a:lnB w="6350" cap="flat" cmpd="sng" algn="ctr">
+                      <a:solidFill>
+                        <a:srgbClr val="E6E4DE"/>
+                      </a:solidFill>
+                      <a:prstDash val="solid"/>
+                      <a:round/>
+                      <a:headEnd type="none" w="med" len="med"/>
+                      <a:tailEnd type="none" w="med" len="med"/>
+                    </a:lnB>
+                  </a:tcPr>
+                </a:tc>
+                <a:tc>
+                  <a:txBody>
+                    <a:bodyPr/>
+                    <a:lstStyle/>
+                    <a:p>
+                      <a:pPr indent="0" marL="0">
+                        <a:buNone/>
+                      </a:pPr>
+                      <a:r>
+                        <a:rPr lang="en-US" sz="1000" dirty="0">
+                          <a:solidFill>
+                            <a:srgbClr val="1A1A18"/>
+                          </a:solidFill>
+                          <a:latin typeface="Cambria" pitchFamily="34" charset="0"/>
+                          <a:ea typeface="Cambria" pitchFamily="34" charset="-122"/>
+                          <a:cs typeface="Cambria" pitchFamily="34" charset="-120"/>
+                        </a:rPr>
+                        <a:t>325</a:t>
+                      </a:r>
+                      <a:endParaRPr lang="en-US" sz="1000" dirty="0">
+                        <a:latin typeface="Cambria" charset="0"/>
+                        <a:ea typeface="Cambria" charset="0"/>
+                        <a:cs typeface="Cambria" charset="0"/>
+                      </a:endParaRPr>
+                    </a:p>
+                  </a:txBody>
+                  <a:tcPr marL="91440" marR="91440" marT="45720" marB="45720" anchor="ctr">
+                    <a:lnL w="0" cap="flat" cmpd="sng" algn="ctr">
+                      <a:noFill/>
+                    </a:lnL>
+                    <a:lnR w="0" cap="flat" cmpd="sng" algn="ctr">
+                      <a:noFill/>
+                    </a:lnR>
+                    <a:lnT w="0" cap="flat" cmpd="sng" algn="ctr">
+                      <a:noFill/>
+                    </a:lnT>
+                    <a:lnB w="6350" cap="flat" cmpd="sng" algn="ctr">
+                      <a:solidFill>
+                        <a:srgbClr val="E6E4DE"/>
+                      </a:solidFill>
+                      <a:prstDash val="solid"/>
+                      <a:round/>
+                      <a:headEnd type="none" w="med" len="med"/>
+                      <a:tailEnd type="none" w="med" len="med"/>
+                    </a:lnB>
+                  </a:tcPr>
+                </a:tc>
+                <a:tc>
+                  <a:txBody>
+                    <a:bodyPr/>
+                    <a:lstStyle/>
+                    <a:p>
+                      <a:pPr indent="0" marL="0">
+                        <a:buNone/>
+                      </a:pPr>
+                      <a:r>
+                        <a:rPr lang="en-US" sz="1000" dirty="0">
+                          <a:solidFill>
+                            <a:srgbClr val="1A1A18"/>
+                          </a:solidFill>
+                          <a:latin typeface="Cambria" pitchFamily="34" charset="0"/>
+                          <a:ea typeface="Cambria" pitchFamily="34" charset="-122"/>
+                          <a:cs typeface="Cambria" pitchFamily="34" charset="-120"/>
+                        </a:rPr>
+                        <a:t>21,4%</a:t>
                       </a:r>
                       <a:endParaRPr lang="en-US" sz="1000" dirty="0">
                         <a:latin typeface="Cambria" charset="0"/>
@@ -30737,148 +30927,148 @@
                           <a:ea typeface="Cambria" pitchFamily="34" charset="-122"/>
                           <a:cs typeface="Cambria" pitchFamily="34" charset="-120"/>
                         </a:rPr>
-                        <a:t>Porto Alegre</a:t>
-                      </a:r>
-                      <a:endParaRPr lang="en-US" sz="1000" dirty="0">
-                        <a:latin typeface="Cambria" charset="0"/>
-                        <a:ea typeface="Cambria" charset="0"/>
-                        <a:cs typeface="Cambria" charset="0"/>
-                      </a:endParaRPr>
-                    </a:p>
-                  </a:txBody>
-                  <a:tcPr marL="91440" marR="91440" marT="45720" marB="45720" anchor="ctr">
-                    <a:lnL w="0" cap="flat" cmpd="sng" algn="ctr">
-                      <a:noFill/>
-                    </a:lnL>
-                    <a:lnR w="0" cap="flat" cmpd="sng" algn="ctr">
-                      <a:noFill/>
-                    </a:lnR>
-                    <a:lnT w="0" cap="flat" cmpd="sng" algn="ctr">
-                      <a:noFill/>
-                    </a:lnT>
-                    <a:lnB w="6350" cap="flat" cmpd="sng" algn="ctr">
-                      <a:solidFill>
-                        <a:srgbClr val="E6E4DE"/>
-                      </a:solidFill>
-                      <a:prstDash val="solid"/>
-                      <a:round/>
-                      <a:headEnd type="none" w="med" len="med"/>
-                      <a:tailEnd type="none" w="med" len="med"/>
-                    </a:lnB>
-                  </a:tcPr>
-                </a:tc>
-                <a:tc>
-                  <a:txBody>
-                    <a:bodyPr/>
-                    <a:lstStyle/>
-                    <a:p>
-                      <a:pPr indent="0" marL="0">
-                        <a:buNone/>
-                      </a:pPr>
-                      <a:r>
-                        <a:rPr lang="en-US" sz="1000" dirty="0">
-                          <a:solidFill>
-                            <a:srgbClr val="1A1A18"/>
-                          </a:solidFill>
-                          <a:latin typeface="Cambria" pitchFamily="34" charset="0"/>
-                          <a:ea typeface="Cambria" pitchFamily="34" charset="-122"/>
-                          <a:cs typeface="Cambria" pitchFamily="34" charset="-120"/>
-                        </a:rPr>
-                        <a:t>1.521</a:t>
-                      </a:r>
-                      <a:endParaRPr lang="en-US" sz="1000" dirty="0">
-                        <a:latin typeface="Cambria" charset="0"/>
-                        <a:ea typeface="Cambria" charset="0"/>
-                        <a:cs typeface="Cambria" charset="0"/>
-                      </a:endParaRPr>
-                    </a:p>
-                  </a:txBody>
-                  <a:tcPr marL="91440" marR="91440" marT="45720" marB="45720" anchor="ctr">
-                    <a:lnL w="0" cap="flat" cmpd="sng" algn="ctr">
-                      <a:noFill/>
-                    </a:lnL>
-                    <a:lnR w="0" cap="flat" cmpd="sng" algn="ctr">
-                      <a:noFill/>
-                    </a:lnR>
-                    <a:lnT w="0" cap="flat" cmpd="sng" algn="ctr">
-                      <a:noFill/>
-                    </a:lnT>
-                    <a:lnB w="6350" cap="flat" cmpd="sng" algn="ctr">
-                      <a:solidFill>
-                        <a:srgbClr val="E6E4DE"/>
-                      </a:solidFill>
-                      <a:prstDash val="solid"/>
-                      <a:round/>
-                      <a:headEnd type="none" w="med" len="med"/>
-                      <a:tailEnd type="none" w="med" len="med"/>
-                    </a:lnB>
-                  </a:tcPr>
-                </a:tc>
-                <a:tc>
-                  <a:txBody>
-                    <a:bodyPr/>
-                    <a:lstStyle/>
-                    <a:p>
-                      <a:pPr indent="0" marL="0">
-                        <a:buNone/>
-                      </a:pPr>
-                      <a:r>
-                        <a:rPr lang="en-US" sz="1000" dirty="0">
-                          <a:solidFill>
-                            <a:srgbClr val="1A1A18"/>
-                          </a:solidFill>
-                          <a:latin typeface="Cambria" pitchFamily="34" charset="0"/>
-                          <a:ea typeface="Cambria" pitchFamily="34" charset="-122"/>
-                          <a:cs typeface="Cambria" pitchFamily="34" charset="-120"/>
-                        </a:rPr>
-                        <a:t>325</a:t>
-                      </a:r>
-                      <a:endParaRPr lang="en-US" sz="1000" dirty="0">
-                        <a:latin typeface="Cambria" charset="0"/>
-                        <a:ea typeface="Cambria" charset="0"/>
-                        <a:cs typeface="Cambria" charset="0"/>
-                      </a:endParaRPr>
-                    </a:p>
-                  </a:txBody>
-                  <a:tcPr marL="91440" marR="91440" marT="45720" marB="45720" anchor="ctr">
-                    <a:lnL w="0" cap="flat" cmpd="sng" algn="ctr">
-                      <a:noFill/>
-                    </a:lnL>
-                    <a:lnR w="0" cap="flat" cmpd="sng" algn="ctr">
-                      <a:noFill/>
-                    </a:lnR>
-                    <a:lnT w="0" cap="flat" cmpd="sng" algn="ctr">
-                      <a:noFill/>
-                    </a:lnT>
-                    <a:lnB w="6350" cap="flat" cmpd="sng" algn="ctr">
-                      <a:solidFill>
-                        <a:srgbClr val="E6E4DE"/>
-                      </a:solidFill>
-                      <a:prstDash val="solid"/>
-                      <a:round/>
-                      <a:headEnd type="none" w="med" len="med"/>
-                      <a:tailEnd type="none" w="med" len="med"/>
-                    </a:lnB>
-                  </a:tcPr>
-                </a:tc>
-                <a:tc>
-                  <a:txBody>
-                    <a:bodyPr/>
-                    <a:lstStyle/>
-                    <a:p>
-                      <a:pPr indent="0" marL="0">
-                        <a:buNone/>
-                      </a:pPr>
-                      <a:r>
-                        <a:rPr lang="en-US" sz="1000" dirty="0">
-                          <a:solidFill>
-                            <a:srgbClr val="1A1A18"/>
-                          </a:solidFill>
-                          <a:latin typeface="Cambria" pitchFamily="34" charset="0"/>
-                          <a:ea typeface="Cambria" pitchFamily="34" charset="-122"/>
-                          <a:cs typeface="Cambria" pitchFamily="34" charset="-120"/>
-                        </a:rPr>
-                        <a:t>21,4%</a:t>
+                        <a:t>Cachoeiro de Itapemirim</a:t>
+                      </a:r>
+                      <a:endParaRPr lang="en-US" sz="1000" dirty="0">
+                        <a:latin typeface="Cambria" charset="0"/>
+                        <a:ea typeface="Cambria" charset="0"/>
+                        <a:cs typeface="Cambria" charset="0"/>
+                      </a:endParaRPr>
+                    </a:p>
+                  </a:txBody>
+                  <a:tcPr marL="91440" marR="91440" marT="45720" marB="45720" anchor="ctr">
+                    <a:lnL w="0" cap="flat" cmpd="sng" algn="ctr">
+                      <a:noFill/>
+                    </a:lnL>
+                    <a:lnR w="0" cap="flat" cmpd="sng" algn="ctr">
+                      <a:noFill/>
+                    </a:lnR>
+                    <a:lnT w="0" cap="flat" cmpd="sng" algn="ctr">
+                      <a:noFill/>
+                    </a:lnT>
+                    <a:lnB w="6350" cap="flat" cmpd="sng" algn="ctr">
+                      <a:solidFill>
+                        <a:srgbClr val="E6E4DE"/>
+                      </a:solidFill>
+                      <a:prstDash val="solid"/>
+                      <a:round/>
+                      <a:headEnd type="none" w="med" len="med"/>
+                      <a:tailEnd type="none" w="med" len="med"/>
+                    </a:lnB>
+                  </a:tcPr>
+                </a:tc>
+                <a:tc>
+                  <a:txBody>
+                    <a:bodyPr/>
+                    <a:lstStyle/>
+                    <a:p>
+                      <a:pPr indent="0" marL="0">
+                        <a:buNone/>
+                      </a:pPr>
+                      <a:r>
+                        <a:rPr lang="en-US" sz="1000" dirty="0">
+                          <a:solidFill>
+                            <a:srgbClr val="1A1A18"/>
+                          </a:solidFill>
+                          <a:latin typeface="Cambria" pitchFamily="34" charset="0"/>
+                          <a:ea typeface="Cambria" pitchFamily="34" charset="-122"/>
+                          <a:cs typeface="Cambria" pitchFamily="34" charset="-120"/>
+                        </a:rPr>
+                        <a:t>293</a:t>
+                      </a:r>
+                      <a:endParaRPr lang="en-US" sz="1000" dirty="0">
+                        <a:latin typeface="Cambria" charset="0"/>
+                        <a:ea typeface="Cambria" charset="0"/>
+                        <a:cs typeface="Cambria" charset="0"/>
+                      </a:endParaRPr>
+                    </a:p>
+                  </a:txBody>
+                  <a:tcPr marL="91440" marR="91440" marT="45720" marB="45720" anchor="ctr">
+                    <a:lnL w="0" cap="flat" cmpd="sng" algn="ctr">
+                      <a:noFill/>
+                    </a:lnL>
+                    <a:lnR w="0" cap="flat" cmpd="sng" algn="ctr">
+                      <a:noFill/>
+                    </a:lnR>
+                    <a:lnT w="0" cap="flat" cmpd="sng" algn="ctr">
+                      <a:noFill/>
+                    </a:lnT>
+                    <a:lnB w="6350" cap="flat" cmpd="sng" algn="ctr">
+                      <a:solidFill>
+                        <a:srgbClr val="E6E4DE"/>
+                      </a:solidFill>
+                      <a:prstDash val="solid"/>
+                      <a:round/>
+                      <a:headEnd type="none" w="med" len="med"/>
+                      <a:tailEnd type="none" w="med" len="med"/>
+                    </a:lnB>
+                  </a:tcPr>
+                </a:tc>
+                <a:tc>
+                  <a:txBody>
+                    <a:bodyPr/>
+                    <a:lstStyle/>
+                    <a:p>
+                      <a:pPr indent="0" marL="0">
+                        <a:buNone/>
+                      </a:pPr>
+                      <a:r>
+                        <a:rPr lang="en-US" sz="1000" dirty="0">
+                          <a:solidFill>
+                            <a:srgbClr val="1A1A18"/>
+                          </a:solidFill>
+                          <a:latin typeface="Cambria" pitchFamily="34" charset="0"/>
+                          <a:ea typeface="Cambria" pitchFamily="34" charset="-122"/>
+                          <a:cs typeface="Cambria" pitchFamily="34" charset="-120"/>
+                        </a:rPr>
+                        <a:t>61</a:t>
+                      </a:r>
+                      <a:endParaRPr lang="en-US" sz="1000" dirty="0">
+                        <a:latin typeface="Cambria" charset="0"/>
+                        <a:ea typeface="Cambria" charset="0"/>
+                        <a:cs typeface="Cambria" charset="0"/>
+                      </a:endParaRPr>
+                    </a:p>
+                  </a:txBody>
+                  <a:tcPr marL="91440" marR="91440" marT="45720" marB="45720" anchor="ctr">
+                    <a:lnL w="0" cap="flat" cmpd="sng" algn="ctr">
+                      <a:noFill/>
+                    </a:lnL>
+                    <a:lnR w="0" cap="flat" cmpd="sng" algn="ctr">
+                      <a:noFill/>
+                    </a:lnR>
+                    <a:lnT w="0" cap="flat" cmpd="sng" algn="ctr">
+                      <a:noFill/>
+                    </a:lnT>
+                    <a:lnB w="6350" cap="flat" cmpd="sng" algn="ctr">
+                      <a:solidFill>
+                        <a:srgbClr val="E6E4DE"/>
+                      </a:solidFill>
+                      <a:prstDash val="solid"/>
+                      <a:round/>
+                      <a:headEnd type="none" w="med" len="med"/>
+                      <a:tailEnd type="none" w="med" len="med"/>
+                    </a:lnB>
+                  </a:tcPr>
+                </a:tc>
+                <a:tc>
+                  <a:txBody>
+                    <a:bodyPr/>
+                    <a:lstStyle/>
+                    <a:p>
+                      <a:pPr indent="0" marL="0">
+                        <a:buNone/>
+                      </a:pPr>
+                      <a:r>
+                        <a:rPr lang="en-US" sz="1000" dirty="0">
+                          <a:solidFill>
+                            <a:srgbClr val="1A1A18"/>
+                          </a:solidFill>
+                          <a:latin typeface="Cambria" pitchFamily="34" charset="0"/>
+                          <a:ea typeface="Cambria" pitchFamily="34" charset="-122"/>
+                          <a:cs typeface="Cambria" pitchFamily="34" charset="-120"/>
+                        </a:rPr>
+                        <a:t>20,8%</a:t>
                       </a:r>
                       <a:endParaRPr lang="en-US" sz="1000" dirty="0">
                         <a:latin typeface="Cambria" charset="0"/>
@@ -30927,101 +31117,101 @@
                           <a:ea typeface="Cambria" pitchFamily="34" charset="-122"/>
                           <a:cs typeface="Cambria" pitchFamily="34" charset="-120"/>
                         </a:rPr>
-                        <a:t>Cachoeiro de Itapemirim</a:t>
-                      </a:r>
-                      <a:endParaRPr lang="en-US" sz="1000" dirty="0">
-                        <a:latin typeface="Cambria" charset="0"/>
-                        <a:ea typeface="Cambria" charset="0"/>
-                        <a:cs typeface="Cambria" charset="0"/>
-                      </a:endParaRPr>
-                    </a:p>
-                  </a:txBody>
-                  <a:tcPr marL="91440" marR="91440" marT="45720" marB="45720" anchor="ctr">
-                    <a:lnL w="0" cap="flat" cmpd="sng" algn="ctr">
-                      <a:noFill/>
-                    </a:lnL>
-                    <a:lnR w="0" cap="flat" cmpd="sng" algn="ctr">
-                      <a:noFill/>
-                    </a:lnR>
-                    <a:lnT w="0" cap="flat" cmpd="sng" algn="ctr">
-                      <a:noFill/>
-                    </a:lnT>
-                    <a:lnB w="6350" cap="flat" cmpd="sng" algn="ctr">
-                      <a:solidFill>
-                        <a:srgbClr val="E6E4DE"/>
-                      </a:solidFill>
-                      <a:prstDash val="solid"/>
-                      <a:round/>
-                      <a:headEnd type="none" w="med" len="med"/>
-                      <a:tailEnd type="none" w="med" len="med"/>
-                    </a:lnB>
-                  </a:tcPr>
-                </a:tc>
-                <a:tc>
-                  <a:txBody>
-                    <a:bodyPr/>
-                    <a:lstStyle/>
-                    <a:p>
-                      <a:pPr indent="0" marL="0">
-                        <a:buNone/>
-                      </a:pPr>
-                      <a:r>
-                        <a:rPr lang="en-US" sz="1000" dirty="0">
-                          <a:solidFill>
-                            <a:srgbClr val="1A1A18"/>
-                          </a:solidFill>
-                          <a:latin typeface="Cambria" pitchFamily="34" charset="0"/>
-                          <a:ea typeface="Cambria" pitchFamily="34" charset="-122"/>
-                          <a:cs typeface="Cambria" pitchFamily="34" charset="-120"/>
-                        </a:rPr>
-                        <a:t>293</a:t>
-                      </a:r>
-                      <a:endParaRPr lang="en-US" sz="1000" dirty="0">
-                        <a:latin typeface="Cambria" charset="0"/>
-                        <a:ea typeface="Cambria" charset="0"/>
-                        <a:cs typeface="Cambria" charset="0"/>
-                      </a:endParaRPr>
-                    </a:p>
-                  </a:txBody>
-                  <a:tcPr marL="91440" marR="91440" marT="45720" marB="45720" anchor="ctr">
-                    <a:lnL w="0" cap="flat" cmpd="sng" algn="ctr">
-                      <a:noFill/>
-                    </a:lnL>
-                    <a:lnR w="0" cap="flat" cmpd="sng" algn="ctr">
-                      <a:noFill/>
-                    </a:lnR>
-                    <a:lnT w="0" cap="flat" cmpd="sng" algn="ctr">
-                      <a:noFill/>
-                    </a:lnT>
-                    <a:lnB w="6350" cap="flat" cmpd="sng" algn="ctr">
-                      <a:solidFill>
-                        <a:srgbClr val="E6E4DE"/>
-                      </a:solidFill>
-                      <a:prstDash val="solid"/>
-                      <a:round/>
-                      <a:headEnd type="none" w="med" len="med"/>
-                      <a:tailEnd type="none" w="med" len="med"/>
-                    </a:lnB>
-                  </a:tcPr>
-                </a:tc>
-                <a:tc>
-                  <a:txBody>
-                    <a:bodyPr/>
-                    <a:lstStyle/>
-                    <a:p>
-                      <a:pPr indent="0" marL="0">
-                        <a:buNone/>
-                      </a:pPr>
-                      <a:r>
-                        <a:rPr lang="en-US" sz="1000" dirty="0">
-                          <a:solidFill>
-                            <a:srgbClr val="1A1A18"/>
-                          </a:solidFill>
-                          <a:latin typeface="Cambria" pitchFamily="34" charset="0"/>
-                          <a:ea typeface="Cambria" pitchFamily="34" charset="-122"/>
-                          <a:cs typeface="Cambria" pitchFamily="34" charset="-120"/>
-                        </a:rPr>
-                        <a:t>61</a:t>
+                        <a:t>Belo Horizonte</a:t>
+                      </a:r>
+                      <a:endParaRPr lang="en-US" sz="1000" dirty="0">
+                        <a:latin typeface="Cambria" charset="0"/>
+                        <a:ea typeface="Cambria" charset="0"/>
+                        <a:cs typeface="Cambria" charset="0"/>
+                      </a:endParaRPr>
+                    </a:p>
+                  </a:txBody>
+                  <a:tcPr marL="91440" marR="91440" marT="45720" marB="45720" anchor="ctr">
+                    <a:lnL w="0" cap="flat" cmpd="sng" algn="ctr">
+                      <a:noFill/>
+                    </a:lnL>
+                    <a:lnR w="0" cap="flat" cmpd="sng" algn="ctr">
+                      <a:noFill/>
+                    </a:lnR>
+                    <a:lnT w="0" cap="flat" cmpd="sng" algn="ctr">
+                      <a:noFill/>
+                    </a:lnT>
+                    <a:lnB w="6350" cap="flat" cmpd="sng" algn="ctr">
+                      <a:solidFill>
+                        <a:srgbClr val="E6E4DE"/>
+                      </a:solidFill>
+                      <a:prstDash val="solid"/>
+                      <a:round/>
+                      <a:headEnd type="none" w="med" len="med"/>
+                      <a:tailEnd type="none" w="med" len="med"/>
+                    </a:lnB>
+                  </a:tcPr>
+                </a:tc>
+                <a:tc>
+                  <a:txBody>
+                    <a:bodyPr/>
+                    <a:lstStyle/>
+                    <a:p>
+                      <a:pPr indent="0" marL="0">
+                        <a:buNone/>
+                      </a:pPr>
+                      <a:r>
+                        <a:rPr lang="en-US" sz="1000" dirty="0">
+                          <a:solidFill>
+                            <a:srgbClr val="1A1A18"/>
+                          </a:solidFill>
+                          <a:latin typeface="Cambria" pitchFamily="34" charset="0"/>
+                          <a:ea typeface="Cambria" pitchFamily="34" charset="-122"/>
+                          <a:cs typeface="Cambria" pitchFamily="34" charset="-120"/>
+                        </a:rPr>
+                        <a:t>3.499</a:t>
+                      </a:r>
+                      <a:endParaRPr lang="en-US" sz="1000" dirty="0">
+                        <a:latin typeface="Cambria" charset="0"/>
+                        <a:ea typeface="Cambria" charset="0"/>
+                        <a:cs typeface="Cambria" charset="0"/>
+                      </a:endParaRPr>
+                    </a:p>
+                  </a:txBody>
+                  <a:tcPr marL="91440" marR="91440" marT="45720" marB="45720" anchor="ctr">
+                    <a:lnL w="0" cap="flat" cmpd="sng" algn="ctr">
+                      <a:noFill/>
+                    </a:lnL>
+                    <a:lnR w="0" cap="flat" cmpd="sng" algn="ctr">
+                      <a:noFill/>
+                    </a:lnR>
+                    <a:lnT w="0" cap="flat" cmpd="sng" algn="ctr">
+                      <a:noFill/>
+                    </a:lnT>
+                    <a:lnB w="6350" cap="flat" cmpd="sng" algn="ctr">
+                      <a:solidFill>
+                        <a:srgbClr val="E6E4DE"/>
+                      </a:solidFill>
+                      <a:prstDash val="solid"/>
+                      <a:round/>
+                      <a:headEnd type="none" w="med" len="med"/>
+                      <a:tailEnd type="none" w="med" len="med"/>
+                    </a:lnB>
+                  </a:tcPr>
+                </a:tc>
+                <a:tc>
+                  <a:txBody>
+                    <a:bodyPr/>
+                    <a:lstStyle/>
+                    <a:p>
+                      <a:pPr indent="0" marL="0">
+                        <a:buNone/>
+                      </a:pPr>
+                      <a:r>
+                        <a:rPr lang="en-US" sz="1000" dirty="0">
+                          <a:solidFill>
+                            <a:srgbClr val="1A1A18"/>
+                          </a:solidFill>
+                          <a:latin typeface="Cambria" pitchFamily="34" charset="0"/>
+                          <a:ea typeface="Cambria" pitchFamily="34" charset="-122"/>
+                          <a:cs typeface="Cambria" pitchFamily="34" charset="-120"/>
+                        </a:rPr>
+                        <a:t>727</a:t>
                       </a:r>
                       <a:endParaRPr lang="en-US" sz="1000" dirty="0">
                         <a:latin typeface="Cambria" charset="0"/>
@@ -31117,148 +31307,148 @@
                           <a:ea typeface="Cambria" pitchFamily="34" charset="-122"/>
                           <a:cs typeface="Cambria" pitchFamily="34" charset="-120"/>
                         </a:rPr>
-                        <a:t>Belo Horizonte</a:t>
-                      </a:r>
-                      <a:endParaRPr lang="en-US" sz="1000" dirty="0">
-                        <a:latin typeface="Cambria" charset="0"/>
-                        <a:ea typeface="Cambria" charset="0"/>
-                        <a:cs typeface="Cambria" charset="0"/>
-                      </a:endParaRPr>
-                    </a:p>
-                  </a:txBody>
-                  <a:tcPr marL="91440" marR="91440" marT="45720" marB="45720" anchor="ctr">
-                    <a:lnL w="0" cap="flat" cmpd="sng" algn="ctr">
-                      <a:noFill/>
-                    </a:lnL>
-                    <a:lnR w="0" cap="flat" cmpd="sng" algn="ctr">
-                      <a:noFill/>
-                    </a:lnR>
-                    <a:lnT w="0" cap="flat" cmpd="sng" algn="ctr">
-                      <a:noFill/>
-                    </a:lnT>
-                    <a:lnB w="6350" cap="flat" cmpd="sng" algn="ctr">
-                      <a:solidFill>
-                        <a:srgbClr val="E6E4DE"/>
-                      </a:solidFill>
-                      <a:prstDash val="solid"/>
-                      <a:round/>
-                      <a:headEnd type="none" w="med" len="med"/>
-                      <a:tailEnd type="none" w="med" len="med"/>
-                    </a:lnB>
-                  </a:tcPr>
-                </a:tc>
-                <a:tc>
-                  <a:txBody>
-                    <a:bodyPr/>
-                    <a:lstStyle/>
-                    <a:p>
-                      <a:pPr indent="0" marL="0">
-                        <a:buNone/>
-                      </a:pPr>
-                      <a:r>
-                        <a:rPr lang="en-US" sz="1000" dirty="0">
-                          <a:solidFill>
-                            <a:srgbClr val="1A1A18"/>
-                          </a:solidFill>
-                          <a:latin typeface="Cambria" pitchFamily="34" charset="0"/>
-                          <a:ea typeface="Cambria" pitchFamily="34" charset="-122"/>
-                          <a:cs typeface="Cambria" pitchFamily="34" charset="-120"/>
-                        </a:rPr>
-                        <a:t>3.499</a:t>
-                      </a:r>
-                      <a:endParaRPr lang="en-US" sz="1000" dirty="0">
-                        <a:latin typeface="Cambria" charset="0"/>
-                        <a:ea typeface="Cambria" charset="0"/>
-                        <a:cs typeface="Cambria" charset="0"/>
-                      </a:endParaRPr>
-                    </a:p>
-                  </a:txBody>
-                  <a:tcPr marL="91440" marR="91440" marT="45720" marB="45720" anchor="ctr">
-                    <a:lnL w="0" cap="flat" cmpd="sng" algn="ctr">
-                      <a:noFill/>
-                    </a:lnL>
-                    <a:lnR w="0" cap="flat" cmpd="sng" algn="ctr">
-                      <a:noFill/>
-                    </a:lnR>
-                    <a:lnT w="0" cap="flat" cmpd="sng" algn="ctr">
-                      <a:noFill/>
-                    </a:lnT>
-                    <a:lnB w="6350" cap="flat" cmpd="sng" algn="ctr">
-                      <a:solidFill>
-                        <a:srgbClr val="E6E4DE"/>
-                      </a:solidFill>
-                      <a:prstDash val="solid"/>
-                      <a:round/>
-                      <a:headEnd type="none" w="med" len="med"/>
-                      <a:tailEnd type="none" w="med" len="med"/>
-                    </a:lnB>
-                  </a:tcPr>
-                </a:tc>
-                <a:tc>
-                  <a:txBody>
-                    <a:bodyPr/>
-                    <a:lstStyle/>
-                    <a:p>
-                      <a:pPr indent="0" marL="0">
-                        <a:buNone/>
-                      </a:pPr>
-                      <a:r>
-                        <a:rPr lang="en-US" sz="1000" dirty="0">
-                          <a:solidFill>
-                            <a:srgbClr val="1A1A18"/>
-                          </a:solidFill>
-                          <a:latin typeface="Cambria" pitchFamily="34" charset="0"/>
-                          <a:ea typeface="Cambria" pitchFamily="34" charset="-122"/>
-                          <a:cs typeface="Cambria" pitchFamily="34" charset="-120"/>
-                        </a:rPr>
-                        <a:t>727</a:t>
-                      </a:r>
-                      <a:endParaRPr lang="en-US" sz="1000" dirty="0">
-                        <a:latin typeface="Cambria" charset="0"/>
-                        <a:ea typeface="Cambria" charset="0"/>
-                        <a:cs typeface="Cambria" charset="0"/>
-                      </a:endParaRPr>
-                    </a:p>
-                  </a:txBody>
-                  <a:tcPr marL="91440" marR="91440" marT="45720" marB="45720" anchor="ctr">
-                    <a:lnL w="0" cap="flat" cmpd="sng" algn="ctr">
-                      <a:noFill/>
-                    </a:lnL>
-                    <a:lnR w="0" cap="flat" cmpd="sng" algn="ctr">
-                      <a:noFill/>
-                    </a:lnR>
-                    <a:lnT w="0" cap="flat" cmpd="sng" algn="ctr">
-                      <a:noFill/>
-                    </a:lnT>
-                    <a:lnB w="6350" cap="flat" cmpd="sng" algn="ctr">
-                      <a:solidFill>
-                        <a:srgbClr val="E6E4DE"/>
-                      </a:solidFill>
-                      <a:prstDash val="solid"/>
-                      <a:round/>
-                      <a:headEnd type="none" w="med" len="med"/>
-                      <a:tailEnd type="none" w="med" len="med"/>
-                    </a:lnB>
-                  </a:tcPr>
-                </a:tc>
-                <a:tc>
-                  <a:txBody>
-                    <a:bodyPr/>
-                    <a:lstStyle/>
-                    <a:p>
-                      <a:pPr indent="0" marL="0">
-                        <a:buNone/>
-                      </a:pPr>
-                      <a:r>
-                        <a:rPr lang="en-US" sz="1000" dirty="0">
-                          <a:solidFill>
-                            <a:srgbClr val="1A1A18"/>
-                          </a:solidFill>
-                          <a:latin typeface="Cambria" pitchFamily="34" charset="0"/>
-                          <a:ea typeface="Cambria" pitchFamily="34" charset="-122"/>
-                          <a:cs typeface="Cambria" pitchFamily="34" charset="-120"/>
-                        </a:rPr>
-                        <a:t>20,8%</a:t>
+                        <a:t>Rio de Janeiro</a:t>
+                      </a:r>
+                      <a:endParaRPr lang="en-US" sz="1000" dirty="0">
+                        <a:latin typeface="Cambria" charset="0"/>
+                        <a:ea typeface="Cambria" charset="0"/>
+                        <a:cs typeface="Cambria" charset="0"/>
+                      </a:endParaRPr>
+                    </a:p>
+                  </a:txBody>
+                  <a:tcPr marL="91440" marR="91440" marT="45720" marB="45720" anchor="ctr">
+                    <a:lnL w="0" cap="flat" cmpd="sng" algn="ctr">
+                      <a:noFill/>
+                    </a:lnL>
+                    <a:lnR w="0" cap="flat" cmpd="sng" algn="ctr">
+                      <a:noFill/>
+                    </a:lnR>
+                    <a:lnT w="0" cap="flat" cmpd="sng" algn="ctr">
+                      <a:noFill/>
+                    </a:lnT>
+                    <a:lnB w="6350" cap="flat" cmpd="sng" algn="ctr">
+                      <a:solidFill>
+                        <a:srgbClr val="E6E4DE"/>
+                      </a:solidFill>
+                      <a:prstDash val="solid"/>
+                      <a:round/>
+                      <a:headEnd type="none" w="med" len="med"/>
+                      <a:tailEnd type="none" w="med" len="med"/>
+                    </a:lnB>
+                  </a:tcPr>
+                </a:tc>
+                <a:tc>
+                  <a:txBody>
+                    <a:bodyPr/>
+                    <a:lstStyle/>
+                    <a:p>
+                      <a:pPr indent="0" marL="0">
+                        <a:buNone/>
+                      </a:pPr>
+                      <a:r>
+                        <a:rPr lang="en-US" sz="1000" dirty="0">
+                          <a:solidFill>
+                            <a:srgbClr val="1A1A18"/>
+                          </a:solidFill>
+                          <a:latin typeface="Cambria" pitchFamily="34" charset="0"/>
+                          <a:ea typeface="Cambria" pitchFamily="34" charset="-122"/>
+                          <a:cs typeface="Cambria" pitchFamily="34" charset="-120"/>
+                        </a:rPr>
+                        <a:t>9.479</a:t>
+                      </a:r>
+                      <a:endParaRPr lang="en-US" sz="1000" dirty="0">
+                        <a:latin typeface="Cambria" charset="0"/>
+                        <a:ea typeface="Cambria" charset="0"/>
+                        <a:cs typeface="Cambria" charset="0"/>
+                      </a:endParaRPr>
+                    </a:p>
+                  </a:txBody>
+                  <a:tcPr marL="91440" marR="91440" marT="45720" marB="45720" anchor="ctr">
+                    <a:lnL w="0" cap="flat" cmpd="sng" algn="ctr">
+                      <a:noFill/>
+                    </a:lnL>
+                    <a:lnR w="0" cap="flat" cmpd="sng" algn="ctr">
+                      <a:noFill/>
+                    </a:lnR>
+                    <a:lnT w="0" cap="flat" cmpd="sng" algn="ctr">
+                      <a:noFill/>
+                    </a:lnT>
+                    <a:lnB w="6350" cap="flat" cmpd="sng" algn="ctr">
+                      <a:solidFill>
+                        <a:srgbClr val="E6E4DE"/>
+                      </a:solidFill>
+                      <a:prstDash val="solid"/>
+                      <a:round/>
+                      <a:headEnd type="none" w="med" len="med"/>
+                      <a:tailEnd type="none" w="med" len="med"/>
+                    </a:lnB>
+                  </a:tcPr>
+                </a:tc>
+                <a:tc>
+                  <a:txBody>
+                    <a:bodyPr/>
+                    <a:lstStyle/>
+                    <a:p>
+                      <a:pPr indent="0" marL="0">
+                        <a:buNone/>
+                      </a:pPr>
+                      <a:r>
+                        <a:rPr lang="en-US" sz="1000" dirty="0">
+                          <a:solidFill>
+                            <a:srgbClr val="1A1A18"/>
+                          </a:solidFill>
+                          <a:latin typeface="Cambria" pitchFamily="34" charset="0"/>
+                          <a:ea typeface="Cambria" pitchFamily="34" charset="-122"/>
+                          <a:cs typeface="Cambria" pitchFamily="34" charset="-120"/>
+                        </a:rPr>
+                        <a:t>1.911</a:t>
+                      </a:r>
+                      <a:endParaRPr lang="en-US" sz="1000" dirty="0">
+                        <a:latin typeface="Cambria" charset="0"/>
+                        <a:ea typeface="Cambria" charset="0"/>
+                        <a:cs typeface="Cambria" charset="0"/>
+                      </a:endParaRPr>
+                    </a:p>
+                  </a:txBody>
+                  <a:tcPr marL="91440" marR="91440" marT="45720" marB="45720" anchor="ctr">
+                    <a:lnL w="0" cap="flat" cmpd="sng" algn="ctr">
+                      <a:noFill/>
+                    </a:lnL>
+                    <a:lnR w="0" cap="flat" cmpd="sng" algn="ctr">
+                      <a:noFill/>
+                    </a:lnR>
+                    <a:lnT w="0" cap="flat" cmpd="sng" algn="ctr">
+                      <a:noFill/>
+                    </a:lnT>
+                    <a:lnB w="6350" cap="flat" cmpd="sng" algn="ctr">
+                      <a:solidFill>
+                        <a:srgbClr val="E6E4DE"/>
+                      </a:solidFill>
+                      <a:prstDash val="solid"/>
+                      <a:round/>
+                      <a:headEnd type="none" w="med" len="med"/>
+                      <a:tailEnd type="none" w="med" len="med"/>
+                    </a:lnB>
+                  </a:tcPr>
+                </a:tc>
+                <a:tc>
+                  <a:txBody>
+                    <a:bodyPr/>
+                    <a:lstStyle/>
+                    <a:p>
+                      <a:pPr indent="0" marL="0">
+                        <a:buNone/>
+                      </a:pPr>
+                      <a:r>
+                        <a:rPr lang="en-US" sz="1000" dirty="0">
+                          <a:solidFill>
+                            <a:srgbClr val="1A1A18"/>
+                          </a:solidFill>
+                          <a:latin typeface="Cambria" pitchFamily="34" charset="0"/>
+                          <a:ea typeface="Cambria" pitchFamily="34" charset="-122"/>
+                          <a:cs typeface="Cambria" pitchFamily="34" charset="-120"/>
+                        </a:rPr>
+                        <a:t>20,2%</a:t>
                       </a:r>
                       <a:endParaRPr lang="en-US" sz="1000" dirty="0">
                         <a:latin typeface="Cambria" charset="0"/>
@@ -31307,148 +31497,148 @@
                           <a:ea typeface="Cambria" pitchFamily="34" charset="-122"/>
                           <a:cs typeface="Cambria" pitchFamily="34" charset="-120"/>
                         </a:rPr>
-                        <a:t>Rio de Janeiro</a:t>
-                      </a:r>
-                      <a:endParaRPr lang="en-US" sz="1000" dirty="0">
-                        <a:latin typeface="Cambria" charset="0"/>
-                        <a:ea typeface="Cambria" charset="0"/>
-                        <a:cs typeface="Cambria" charset="0"/>
-                      </a:endParaRPr>
-                    </a:p>
-                  </a:txBody>
-                  <a:tcPr marL="91440" marR="91440" marT="45720" marB="45720" anchor="ctr">
-                    <a:lnL w="0" cap="flat" cmpd="sng" algn="ctr">
-                      <a:noFill/>
-                    </a:lnL>
-                    <a:lnR w="0" cap="flat" cmpd="sng" algn="ctr">
-                      <a:noFill/>
-                    </a:lnR>
-                    <a:lnT w="0" cap="flat" cmpd="sng" algn="ctr">
-                      <a:noFill/>
-                    </a:lnT>
-                    <a:lnB w="6350" cap="flat" cmpd="sng" algn="ctr">
-                      <a:solidFill>
-                        <a:srgbClr val="E6E4DE"/>
-                      </a:solidFill>
-                      <a:prstDash val="solid"/>
-                      <a:round/>
-                      <a:headEnd type="none" w="med" len="med"/>
-                      <a:tailEnd type="none" w="med" len="med"/>
-                    </a:lnB>
-                  </a:tcPr>
-                </a:tc>
-                <a:tc>
-                  <a:txBody>
-                    <a:bodyPr/>
-                    <a:lstStyle/>
-                    <a:p>
-                      <a:pPr indent="0" marL="0">
-                        <a:buNone/>
-                      </a:pPr>
-                      <a:r>
-                        <a:rPr lang="en-US" sz="1000" dirty="0">
-                          <a:solidFill>
-                            <a:srgbClr val="1A1A18"/>
-                          </a:solidFill>
-                          <a:latin typeface="Cambria" pitchFamily="34" charset="0"/>
-                          <a:ea typeface="Cambria" pitchFamily="34" charset="-122"/>
-                          <a:cs typeface="Cambria" pitchFamily="34" charset="-120"/>
-                        </a:rPr>
-                        <a:t>9.479</a:t>
-                      </a:r>
-                      <a:endParaRPr lang="en-US" sz="1000" dirty="0">
-                        <a:latin typeface="Cambria" charset="0"/>
-                        <a:ea typeface="Cambria" charset="0"/>
-                        <a:cs typeface="Cambria" charset="0"/>
-                      </a:endParaRPr>
-                    </a:p>
-                  </a:txBody>
-                  <a:tcPr marL="91440" marR="91440" marT="45720" marB="45720" anchor="ctr">
-                    <a:lnL w="0" cap="flat" cmpd="sng" algn="ctr">
-                      <a:noFill/>
-                    </a:lnL>
-                    <a:lnR w="0" cap="flat" cmpd="sng" algn="ctr">
-                      <a:noFill/>
-                    </a:lnR>
-                    <a:lnT w="0" cap="flat" cmpd="sng" algn="ctr">
-                      <a:noFill/>
-                    </a:lnT>
-                    <a:lnB w="6350" cap="flat" cmpd="sng" algn="ctr">
-                      <a:solidFill>
-                        <a:srgbClr val="E6E4DE"/>
-                      </a:solidFill>
-                      <a:prstDash val="solid"/>
-                      <a:round/>
-                      <a:headEnd type="none" w="med" len="med"/>
-                      <a:tailEnd type="none" w="med" len="med"/>
-                    </a:lnB>
-                  </a:tcPr>
-                </a:tc>
-                <a:tc>
-                  <a:txBody>
-                    <a:bodyPr/>
-                    <a:lstStyle/>
-                    <a:p>
-                      <a:pPr indent="0" marL="0">
-                        <a:buNone/>
-                      </a:pPr>
-                      <a:r>
-                        <a:rPr lang="en-US" sz="1000" dirty="0">
-                          <a:solidFill>
-                            <a:srgbClr val="1A1A18"/>
-                          </a:solidFill>
-                          <a:latin typeface="Cambria" pitchFamily="34" charset="0"/>
-                          <a:ea typeface="Cambria" pitchFamily="34" charset="-122"/>
-                          <a:cs typeface="Cambria" pitchFamily="34" charset="-120"/>
-                        </a:rPr>
-                        <a:t>1.911</a:t>
-                      </a:r>
-                      <a:endParaRPr lang="en-US" sz="1000" dirty="0">
-                        <a:latin typeface="Cambria" charset="0"/>
-                        <a:ea typeface="Cambria" charset="0"/>
-                        <a:cs typeface="Cambria" charset="0"/>
-                      </a:endParaRPr>
-                    </a:p>
-                  </a:txBody>
-                  <a:tcPr marL="91440" marR="91440" marT="45720" marB="45720" anchor="ctr">
-                    <a:lnL w="0" cap="flat" cmpd="sng" algn="ctr">
-                      <a:noFill/>
-                    </a:lnL>
-                    <a:lnR w="0" cap="flat" cmpd="sng" algn="ctr">
-                      <a:noFill/>
-                    </a:lnR>
-                    <a:lnT w="0" cap="flat" cmpd="sng" algn="ctr">
-                      <a:noFill/>
-                    </a:lnT>
-                    <a:lnB w="6350" cap="flat" cmpd="sng" algn="ctr">
-                      <a:solidFill>
-                        <a:srgbClr val="E6E4DE"/>
-                      </a:solidFill>
-                      <a:prstDash val="solid"/>
-                      <a:round/>
-                      <a:headEnd type="none" w="med" len="med"/>
-                      <a:tailEnd type="none" w="med" len="med"/>
-                    </a:lnB>
-                  </a:tcPr>
-                </a:tc>
-                <a:tc>
-                  <a:txBody>
-                    <a:bodyPr/>
-                    <a:lstStyle/>
-                    <a:p>
-                      <a:pPr indent="0" marL="0">
-                        <a:buNone/>
-                      </a:pPr>
-                      <a:r>
-                        <a:rPr lang="en-US" sz="1000" dirty="0">
-                          <a:solidFill>
-                            <a:srgbClr val="1A1A18"/>
-                          </a:solidFill>
-                          <a:latin typeface="Cambria" pitchFamily="34" charset="0"/>
-                          <a:ea typeface="Cambria" pitchFamily="34" charset="-122"/>
-                          <a:cs typeface="Cambria" pitchFamily="34" charset="-120"/>
-                        </a:rPr>
-                        <a:t>20,2%</a:t>
+                        <a:t>São Paulo</a:t>
+                      </a:r>
+                      <a:endParaRPr lang="en-US" sz="1000" dirty="0">
+                        <a:latin typeface="Cambria" charset="0"/>
+                        <a:ea typeface="Cambria" charset="0"/>
+                        <a:cs typeface="Cambria" charset="0"/>
+                      </a:endParaRPr>
+                    </a:p>
+                  </a:txBody>
+                  <a:tcPr marL="91440" marR="91440" marT="45720" marB="45720" anchor="ctr">
+                    <a:lnL w="0" cap="flat" cmpd="sng" algn="ctr">
+                      <a:noFill/>
+                    </a:lnL>
+                    <a:lnR w="0" cap="flat" cmpd="sng" algn="ctr">
+                      <a:noFill/>
+                    </a:lnR>
+                    <a:lnT w="0" cap="flat" cmpd="sng" algn="ctr">
+                      <a:noFill/>
+                    </a:lnT>
+                    <a:lnB w="6350" cap="flat" cmpd="sng" algn="ctr">
+                      <a:solidFill>
+                        <a:srgbClr val="E6E4DE"/>
+                      </a:solidFill>
+                      <a:prstDash val="solid"/>
+                      <a:round/>
+                      <a:headEnd type="none" w="med" len="med"/>
+                      <a:tailEnd type="none" w="med" len="med"/>
+                    </a:lnB>
+                  </a:tcPr>
+                </a:tc>
+                <a:tc>
+                  <a:txBody>
+                    <a:bodyPr/>
+                    <a:lstStyle/>
+                    <a:p>
+                      <a:pPr indent="0" marL="0">
+                        <a:buNone/>
+                      </a:pPr>
+                      <a:r>
+                        <a:rPr lang="en-US" sz="1000" dirty="0">
+                          <a:solidFill>
+                            <a:srgbClr val="1A1A18"/>
+                          </a:solidFill>
+                          <a:latin typeface="Cambria" pitchFamily="34" charset="0"/>
+                          <a:ea typeface="Cambria" pitchFamily="34" charset="-122"/>
+                          <a:cs typeface="Cambria" pitchFamily="34" charset="-120"/>
+                        </a:rPr>
+                        <a:t>19.433</a:t>
+                      </a:r>
+                      <a:endParaRPr lang="en-US" sz="1000" dirty="0">
+                        <a:latin typeface="Cambria" charset="0"/>
+                        <a:ea typeface="Cambria" charset="0"/>
+                        <a:cs typeface="Cambria" charset="0"/>
+                      </a:endParaRPr>
+                    </a:p>
+                  </a:txBody>
+                  <a:tcPr marL="91440" marR="91440" marT="45720" marB="45720" anchor="ctr">
+                    <a:lnL w="0" cap="flat" cmpd="sng" algn="ctr">
+                      <a:noFill/>
+                    </a:lnL>
+                    <a:lnR w="0" cap="flat" cmpd="sng" algn="ctr">
+                      <a:noFill/>
+                    </a:lnR>
+                    <a:lnT w="0" cap="flat" cmpd="sng" algn="ctr">
+                      <a:noFill/>
+                    </a:lnT>
+                    <a:lnB w="6350" cap="flat" cmpd="sng" algn="ctr">
+                      <a:solidFill>
+                        <a:srgbClr val="E6E4DE"/>
+                      </a:solidFill>
+                      <a:prstDash val="solid"/>
+                      <a:round/>
+                      <a:headEnd type="none" w="med" len="med"/>
+                      <a:tailEnd type="none" w="med" len="med"/>
+                    </a:lnB>
+                  </a:tcPr>
+                </a:tc>
+                <a:tc>
+                  <a:txBody>
+                    <a:bodyPr/>
+                    <a:lstStyle/>
+                    <a:p>
+                      <a:pPr indent="0" marL="0">
+                        <a:buNone/>
+                      </a:pPr>
+                      <a:r>
+                        <a:rPr lang="en-US" sz="1000" dirty="0">
+                          <a:solidFill>
+                            <a:srgbClr val="1A1A18"/>
+                          </a:solidFill>
+                          <a:latin typeface="Cambria" pitchFamily="34" charset="0"/>
+                          <a:ea typeface="Cambria" pitchFamily="34" charset="-122"/>
+                          <a:cs typeface="Cambria" pitchFamily="34" charset="-120"/>
+                        </a:rPr>
+                        <a:t>3.888</a:t>
+                      </a:r>
+                      <a:endParaRPr lang="en-US" sz="1000" dirty="0">
+                        <a:latin typeface="Cambria" charset="0"/>
+                        <a:ea typeface="Cambria" charset="0"/>
+                        <a:cs typeface="Cambria" charset="0"/>
+                      </a:endParaRPr>
+                    </a:p>
+                  </a:txBody>
+                  <a:tcPr marL="91440" marR="91440" marT="45720" marB="45720" anchor="ctr">
+                    <a:lnL w="0" cap="flat" cmpd="sng" algn="ctr">
+                      <a:noFill/>
+                    </a:lnL>
+                    <a:lnR w="0" cap="flat" cmpd="sng" algn="ctr">
+                      <a:noFill/>
+                    </a:lnR>
+                    <a:lnT w="0" cap="flat" cmpd="sng" algn="ctr">
+                      <a:noFill/>
+                    </a:lnT>
+                    <a:lnB w="6350" cap="flat" cmpd="sng" algn="ctr">
+                      <a:solidFill>
+                        <a:srgbClr val="E6E4DE"/>
+                      </a:solidFill>
+                      <a:prstDash val="solid"/>
+                      <a:round/>
+                      <a:headEnd type="none" w="med" len="med"/>
+                      <a:tailEnd type="none" w="med" len="med"/>
+                    </a:lnB>
+                  </a:tcPr>
+                </a:tc>
+                <a:tc>
+                  <a:txBody>
+                    <a:bodyPr/>
+                    <a:lstStyle/>
+                    <a:p>
+                      <a:pPr indent="0" marL="0">
+                        <a:buNone/>
+                      </a:pPr>
+                      <a:r>
+                        <a:rPr lang="en-US" sz="1000" dirty="0">
+                          <a:solidFill>
+                            <a:srgbClr val="1A1A18"/>
+                          </a:solidFill>
+                          <a:latin typeface="Cambria" pitchFamily="34" charset="0"/>
+                          <a:ea typeface="Cambria" pitchFamily="34" charset="-122"/>
+                          <a:cs typeface="Cambria" pitchFamily="34" charset="-120"/>
+                        </a:rPr>
+                        <a:t>20,0%</a:t>
                       </a:r>
                       <a:endParaRPr lang="en-US" sz="1000" dirty="0">
                         <a:latin typeface="Cambria" charset="0"/>
@@ -31497,101 +31687,101 @@
                           <a:ea typeface="Cambria" pitchFamily="34" charset="-122"/>
                           <a:cs typeface="Cambria" pitchFamily="34" charset="-120"/>
                         </a:rPr>
-                        <a:t>São Paulo</a:t>
-                      </a:r>
-                      <a:endParaRPr lang="en-US" sz="1000" dirty="0">
-                        <a:latin typeface="Cambria" charset="0"/>
-                        <a:ea typeface="Cambria" charset="0"/>
-                        <a:cs typeface="Cambria" charset="0"/>
-                      </a:endParaRPr>
-                    </a:p>
-                  </a:txBody>
-                  <a:tcPr marL="91440" marR="91440" marT="45720" marB="45720" anchor="ctr">
-                    <a:lnL w="0" cap="flat" cmpd="sng" algn="ctr">
-                      <a:noFill/>
-                    </a:lnL>
-                    <a:lnR w="0" cap="flat" cmpd="sng" algn="ctr">
-                      <a:noFill/>
-                    </a:lnR>
-                    <a:lnT w="0" cap="flat" cmpd="sng" algn="ctr">
-                      <a:noFill/>
-                    </a:lnT>
-                    <a:lnB w="6350" cap="flat" cmpd="sng" algn="ctr">
-                      <a:solidFill>
-                        <a:srgbClr val="E6E4DE"/>
-                      </a:solidFill>
-                      <a:prstDash val="solid"/>
-                      <a:round/>
-                      <a:headEnd type="none" w="med" len="med"/>
-                      <a:tailEnd type="none" w="med" len="med"/>
-                    </a:lnB>
-                  </a:tcPr>
-                </a:tc>
-                <a:tc>
-                  <a:txBody>
-                    <a:bodyPr/>
-                    <a:lstStyle/>
-                    <a:p>
-                      <a:pPr indent="0" marL="0">
-                        <a:buNone/>
-                      </a:pPr>
-                      <a:r>
-                        <a:rPr lang="en-US" sz="1000" dirty="0">
-                          <a:solidFill>
-                            <a:srgbClr val="1A1A18"/>
-                          </a:solidFill>
-                          <a:latin typeface="Cambria" pitchFamily="34" charset="0"/>
-                          <a:ea typeface="Cambria" pitchFamily="34" charset="-122"/>
-                          <a:cs typeface="Cambria" pitchFamily="34" charset="-120"/>
-                        </a:rPr>
-                        <a:t>19.433</a:t>
-                      </a:r>
-                      <a:endParaRPr lang="en-US" sz="1000" dirty="0">
-                        <a:latin typeface="Cambria" charset="0"/>
-                        <a:ea typeface="Cambria" charset="0"/>
-                        <a:cs typeface="Cambria" charset="0"/>
-                      </a:endParaRPr>
-                    </a:p>
-                  </a:txBody>
-                  <a:tcPr marL="91440" marR="91440" marT="45720" marB="45720" anchor="ctr">
-                    <a:lnL w="0" cap="flat" cmpd="sng" algn="ctr">
-                      <a:noFill/>
-                    </a:lnL>
-                    <a:lnR w="0" cap="flat" cmpd="sng" algn="ctr">
-                      <a:noFill/>
-                    </a:lnR>
-                    <a:lnT w="0" cap="flat" cmpd="sng" algn="ctr">
-                      <a:noFill/>
-                    </a:lnT>
-                    <a:lnB w="6350" cap="flat" cmpd="sng" algn="ctr">
-                      <a:solidFill>
-                        <a:srgbClr val="E6E4DE"/>
-                      </a:solidFill>
-                      <a:prstDash val="solid"/>
-                      <a:round/>
-                      <a:headEnd type="none" w="med" len="med"/>
-                      <a:tailEnd type="none" w="med" len="med"/>
-                    </a:lnB>
-                  </a:tcPr>
-                </a:tc>
-                <a:tc>
-                  <a:txBody>
-                    <a:bodyPr/>
-                    <a:lstStyle/>
-                    <a:p>
-                      <a:pPr indent="0" marL="0">
-                        <a:buNone/>
-                      </a:pPr>
-                      <a:r>
-                        <a:rPr lang="en-US" sz="1000" dirty="0">
-                          <a:solidFill>
-                            <a:srgbClr val="1A1A18"/>
-                          </a:solidFill>
-                          <a:latin typeface="Cambria" pitchFamily="34" charset="0"/>
-                          <a:ea typeface="Cambria" pitchFamily="34" charset="-122"/>
-                          <a:cs typeface="Cambria" pitchFamily="34" charset="-120"/>
-                        </a:rPr>
-                        <a:t>3.888</a:t>
+                        <a:t>Santa Maria do Oeste</a:t>
+                      </a:r>
+                      <a:endParaRPr lang="en-US" sz="1000" dirty="0">
+                        <a:latin typeface="Cambria" charset="0"/>
+                        <a:ea typeface="Cambria" charset="0"/>
+                        <a:cs typeface="Cambria" charset="0"/>
+                      </a:endParaRPr>
+                    </a:p>
+                  </a:txBody>
+                  <a:tcPr marL="91440" marR="91440" marT="45720" marB="45720" anchor="ctr">
+                    <a:lnL w="0" cap="flat" cmpd="sng" algn="ctr">
+                      <a:noFill/>
+                    </a:lnL>
+                    <a:lnR w="0" cap="flat" cmpd="sng" algn="ctr">
+                      <a:noFill/>
+                    </a:lnR>
+                    <a:lnT w="0" cap="flat" cmpd="sng" algn="ctr">
+                      <a:noFill/>
+                    </a:lnT>
+                    <a:lnB w="6350" cap="flat" cmpd="sng" algn="ctr">
+                      <a:solidFill>
+                        <a:srgbClr val="E6E4DE"/>
+                      </a:solidFill>
+                      <a:prstDash val="solid"/>
+                      <a:round/>
+                      <a:headEnd type="none" w="med" len="med"/>
+                      <a:tailEnd type="none" w="med" len="med"/>
+                    </a:lnB>
+                  </a:tcPr>
+                </a:tc>
+                <a:tc>
+                  <a:txBody>
+                    <a:bodyPr/>
+                    <a:lstStyle/>
+                    <a:p>
+                      <a:pPr indent="0" marL="0">
+                        <a:buNone/>
+                      </a:pPr>
+                      <a:r>
+                        <a:rPr lang="en-US" sz="1000" dirty="0">
+                          <a:solidFill>
+                            <a:srgbClr val="1A1A18"/>
+                          </a:solidFill>
+                          <a:latin typeface="Cambria" pitchFamily="34" charset="0"/>
+                          <a:ea typeface="Cambria" pitchFamily="34" charset="-122"/>
+                          <a:cs typeface="Cambria" pitchFamily="34" charset="-120"/>
+                        </a:rPr>
+                        <a:t>5</a:t>
+                      </a:r>
+                      <a:endParaRPr lang="en-US" sz="1000" dirty="0">
+                        <a:latin typeface="Cambria" charset="0"/>
+                        <a:ea typeface="Cambria" charset="0"/>
+                        <a:cs typeface="Cambria" charset="0"/>
+                      </a:endParaRPr>
+                    </a:p>
+                  </a:txBody>
+                  <a:tcPr marL="91440" marR="91440" marT="45720" marB="45720" anchor="ctr">
+                    <a:lnL w="0" cap="flat" cmpd="sng" algn="ctr">
+                      <a:noFill/>
+                    </a:lnL>
+                    <a:lnR w="0" cap="flat" cmpd="sng" algn="ctr">
+                      <a:noFill/>
+                    </a:lnR>
+                    <a:lnT w="0" cap="flat" cmpd="sng" algn="ctr">
+                      <a:noFill/>
+                    </a:lnT>
+                    <a:lnB w="6350" cap="flat" cmpd="sng" algn="ctr">
+                      <a:solidFill>
+                        <a:srgbClr val="E6E4DE"/>
+                      </a:solidFill>
+                      <a:prstDash val="solid"/>
+                      <a:round/>
+                      <a:headEnd type="none" w="med" len="med"/>
+                      <a:tailEnd type="none" w="med" len="med"/>
+                    </a:lnB>
+                  </a:tcPr>
+                </a:tc>
+                <a:tc>
+                  <a:txBody>
+                    <a:bodyPr/>
+                    <a:lstStyle/>
+                    <a:p>
+                      <a:pPr indent="0" marL="0">
+                        <a:buNone/>
+                      </a:pPr>
+                      <a:r>
+                        <a:rPr lang="en-US" sz="1000" dirty="0">
+                          <a:solidFill>
+                            <a:srgbClr val="1A1A18"/>
+                          </a:solidFill>
+                          <a:latin typeface="Cambria" pitchFamily="34" charset="0"/>
+                          <a:ea typeface="Cambria" pitchFamily="34" charset="-122"/>
+                          <a:cs typeface="Cambria" pitchFamily="34" charset="-120"/>
+                        </a:rPr>
+                        <a:t>1</a:t>
                       </a:r>
                       <a:endParaRPr lang="en-US" sz="1000" dirty="0">
                         <a:latin typeface="Cambria" charset="0"/>
@@ -31687,148 +31877,148 @@
                           <a:ea typeface="Cambria" pitchFamily="34" charset="-122"/>
                           <a:cs typeface="Cambria" pitchFamily="34" charset="-120"/>
                         </a:rPr>
-                        <a:t>Santa Maria do Oeste</a:t>
-                      </a:r>
-                      <a:endParaRPr lang="en-US" sz="1000" dirty="0">
-                        <a:latin typeface="Cambria" charset="0"/>
-                        <a:ea typeface="Cambria" charset="0"/>
-                        <a:cs typeface="Cambria" charset="0"/>
-                      </a:endParaRPr>
-                    </a:p>
-                  </a:txBody>
-                  <a:tcPr marL="91440" marR="91440" marT="45720" marB="45720" anchor="ctr">
-                    <a:lnL w="0" cap="flat" cmpd="sng" algn="ctr">
-                      <a:noFill/>
-                    </a:lnL>
-                    <a:lnR w="0" cap="flat" cmpd="sng" algn="ctr">
-                      <a:noFill/>
-                    </a:lnR>
-                    <a:lnT w="0" cap="flat" cmpd="sng" algn="ctr">
-                      <a:noFill/>
-                    </a:lnT>
-                    <a:lnB w="6350" cap="flat" cmpd="sng" algn="ctr">
-                      <a:solidFill>
-                        <a:srgbClr val="E6E4DE"/>
-                      </a:solidFill>
-                      <a:prstDash val="solid"/>
-                      <a:round/>
-                      <a:headEnd type="none" w="med" len="med"/>
-                      <a:tailEnd type="none" w="med" len="med"/>
-                    </a:lnB>
-                  </a:tcPr>
-                </a:tc>
-                <a:tc>
-                  <a:txBody>
-                    <a:bodyPr/>
-                    <a:lstStyle/>
-                    <a:p>
-                      <a:pPr indent="0" marL="0">
-                        <a:buNone/>
-                      </a:pPr>
-                      <a:r>
-                        <a:rPr lang="en-US" sz="1000" dirty="0">
-                          <a:solidFill>
-                            <a:srgbClr val="1A1A18"/>
-                          </a:solidFill>
-                          <a:latin typeface="Cambria" pitchFamily="34" charset="0"/>
-                          <a:ea typeface="Cambria" pitchFamily="34" charset="-122"/>
-                          <a:cs typeface="Cambria" pitchFamily="34" charset="-120"/>
-                        </a:rPr>
-                        <a:t>5</a:t>
-                      </a:r>
-                      <a:endParaRPr lang="en-US" sz="1000" dirty="0">
-                        <a:latin typeface="Cambria" charset="0"/>
-                        <a:ea typeface="Cambria" charset="0"/>
-                        <a:cs typeface="Cambria" charset="0"/>
-                      </a:endParaRPr>
-                    </a:p>
-                  </a:txBody>
-                  <a:tcPr marL="91440" marR="91440" marT="45720" marB="45720" anchor="ctr">
-                    <a:lnL w="0" cap="flat" cmpd="sng" algn="ctr">
-                      <a:noFill/>
-                    </a:lnL>
-                    <a:lnR w="0" cap="flat" cmpd="sng" algn="ctr">
-                      <a:noFill/>
-                    </a:lnR>
-                    <a:lnT w="0" cap="flat" cmpd="sng" algn="ctr">
-                      <a:noFill/>
-                    </a:lnT>
-                    <a:lnB w="6350" cap="flat" cmpd="sng" algn="ctr">
-                      <a:solidFill>
-                        <a:srgbClr val="E6E4DE"/>
-                      </a:solidFill>
-                      <a:prstDash val="solid"/>
-                      <a:round/>
-                      <a:headEnd type="none" w="med" len="med"/>
-                      <a:tailEnd type="none" w="med" len="med"/>
-                    </a:lnB>
-                  </a:tcPr>
-                </a:tc>
-                <a:tc>
-                  <a:txBody>
-                    <a:bodyPr/>
-                    <a:lstStyle/>
-                    <a:p>
-                      <a:pPr indent="0" marL="0">
-                        <a:buNone/>
-                      </a:pPr>
-                      <a:r>
-                        <a:rPr lang="en-US" sz="1000" dirty="0">
-                          <a:solidFill>
-                            <a:srgbClr val="1A1A18"/>
-                          </a:solidFill>
-                          <a:latin typeface="Cambria" pitchFamily="34" charset="0"/>
-                          <a:ea typeface="Cambria" pitchFamily="34" charset="-122"/>
-                          <a:cs typeface="Cambria" pitchFamily="34" charset="-120"/>
-                        </a:rPr>
-                        <a:t>1</a:t>
-                      </a:r>
-                      <a:endParaRPr lang="en-US" sz="1000" dirty="0">
-                        <a:latin typeface="Cambria" charset="0"/>
-                        <a:ea typeface="Cambria" charset="0"/>
-                        <a:cs typeface="Cambria" charset="0"/>
-                      </a:endParaRPr>
-                    </a:p>
-                  </a:txBody>
-                  <a:tcPr marL="91440" marR="91440" marT="45720" marB="45720" anchor="ctr">
-                    <a:lnL w="0" cap="flat" cmpd="sng" algn="ctr">
-                      <a:noFill/>
-                    </a:lnL>
-                    <a:lnR w="0" cap="flat" cmpd="sng" algn="ctr">
-                      <a:noFill/>
-                    </a:lnR>
-                    <a:lnT w="0" cap="flat" cmpd="sng" algn="ctr">
-                      <a:noFill/>
-                    </a:lnT>
-                    <a:lnB w="6350" cap="flat" cmpd="sng" algn="ctr">
-                      <a:solidFill>
-                        <a:srgbClr val="E6E4DE"/>
-                      </a:solidFill>
-                      <a:prstDash val="solid"/>
-                      <a:round/>
-                      <a:headEnd type="none" w="med" len="med"/>
-                      <a:tailEnd type="none" w="med" len="med"/>
-                    </a:lnB>
-                  </a:tcPr>
-                </a:tc>
-                <a:tc>
-                  <a:txBody>
-                    <a:bodyPr/>
-                    <a:lstStyle/>
-                    <a:p>
-                      <a:pPr indent="0" marL="0">
-                        <a:buNone/>
-                      </a:pPr>
-                      <a:r>
-                        <a:rPr lang="en-US" sz="1000" dirty="0">
-                          <a:solidFill>
-                            <a:srgbClr val="1A1A18"/>
-                          </a:solidFill>
-                          <a:latin typeface="Cambria" pitchFamily="34" charset="0"/>
-                          <a:ea typeface="Cambria" pitchFamily="34" charset="-122"/>
-                          <a:cs typeface="Cambria" pitchFamily="34" charset="-120"/>
-                        </a:rPr>
-                        <a:t>20,0%</a:t>
+                        <a:t>Salvador</a:t>
+                      </a:r>
+                      <a:endParaRPr lang="en-US" sz="1000" dirty="0">
+                        <a:latin typeface="Cambria" charset="0"/>
+                        <a:ea typeface="Cambria" charset="0"/>
+                        <a:cs typeface="Cambria" charset="0"/>
+                      </a:endParaRPr>
+                    </a:p>
+                  </a:txBody>
+                  <a:tcPr marL="91440" marR="91440" marT="45720" marB="45720" anchor="ctr">
+                    <a:lnL w="0" cap="flat" cmpd="sng" algn="ctr">
+                      <a:noFill/>
+                    </a:lnL>
+                    <a:lnR w="0" cap="flat" cmpd="sng" algn="ctr">
+                      <a:noFill/>
+                    </a:lnR>
+                    <a:lnT w="0" cap="flat" cmpd="sng" algn="ctr">
+                      <a:noFill/>
+                    </a:lnT>
+                    <a:lnB w="6350" cap="flat" cmpd="sng" algn="ctr">
+                      <a:solidFill>
+                        <a:srgbClr val="E6E4DE"/>
+                      </a:solidFill>
+                      <a:prstDash val="solid"/>
+                      <a:round/>
+                      <a:headEnd type="none" w="med" len="med"/>
+                      <a:tailEnd type="none" w="med" len="med"/>
+                    </a:lnB>
+                  </a:tcPr>
+                </a:tc>
+                <a:tc>
+                  <a:txBody>
+                    <a:bodyPr/>
+                    <a:lstStyle/>
+                    <a:p>
+                      <a:pPr indent="0" marL="0">
+                        <a:buNone/>
+                      </a:pPr>
+                      <a:r>
+                        <a:rPr lang="en-US" sz="1000" dirty="0">
+                          <a:solidFill>
+                            <a:srgbClr val="1A1A18"/>
+                          </a:solidFill>
+                          <a:latin typeface="Cambria" pitchFamily="34" charset="0"/>
+                          <a:ea typeface="Cambria" pitchFamily="34" charset="-122"/>
+                          <a:cs typeface="Cambria" pitchFamily="34" charset="-120"/>
+                        </a:rPr>
+                        <a:t>3.088</a:t>
+                      </a:r>
+                      <a:endParaRPr lang="en-US" sz="1000" dirty="0">
+                        <a:latin typeface="Cambria" charset="0"/>
+                        <a:ea typeface="Cambria" charset="0"/>
+                        <a:cs typeface="Cambria" charset="0"/>
+                      </a:endParaRPr>
+                    </a:p>
+                  </a:txBody>
+                  <a:tcPr marL="91440" marR="91440" marT="45720" marB="45720" anchor="ctr">
+                    <a:lnL w="0" cap="flat" cmpd="sng" algn="ctr">
+                      <a:noFill/>
+                    </a:lnL>
+                    <a:lnR w="0" cap="flat" cmpd="sng" algn="ctr">
+                      <a:noFill/>
+                    </a:lnR>
+                    <a:lnT w="0" cap="flat" cmpd="sng" algn="ctr">
+                      <a:noFill/>
+                    </a:lnT>
+                    <a:lnB w="6350" cap="flat" cmpd="sng" algn="ctr">
+                      <a:solidFill>
+                        <a:srgbClr val="E6E4DE"/>
+                      </a:solidFill>
+                      <a:prstDash val="solid"/>
+                      <a:round/>
+                      <a:headEnd type="none" w="med" len="med"/>
+                      <a:tailEnd type="none" w="med" len="med"/>
+                    </a:lnB>
+                  </a:tcPr>
+                </a:tc>
+                <a:tc>
+                  <a:txBody>
+                    <a:bodyPr/>
+                    <a:lstStyle/>
+                    <a:p>
+                      <a:pPr indent="0" marL="0">
+                        <a:buNone/>
+                      </a:pPr>
+                      <a:r>
+                        <a:rPr lang="en-US" sz="1000" dirty="0">
+                          <a:solidFill>
+                            <a:srgbClr val="1A1A18"/>
+                          </a:solidFill>
+                          <a:latin typeface="Cambria" pitchFamily="34" charset="0"/>
+                          <a:ea typeface="Cambria" pitchFamily="34" charset="-122"/>
+                          <a:cs typeface="Cambria" pitchFamily="34" charset="-120"/>
+                        </a:rPr>
+                        <a:t>614</a:t>
+                      </a:r>
+                      <a:endParaRPr lang="en-US" sz="1000" dirty="0">
+                        <a:latin typeface="Cambria" charset="0"/>
+                        <a:ea typeface="Cambria" charset="0"/>
+                        <a:cs typeface="Cambria" charset="0"/>
+                      </a:endParaRPr>
+                    </a:p>
+                  </a:txBody>
+                  <a:tcPr marL="91440" marR="91440" marT="45720" marB="45720" anchor="ctr">
+                    <a:lnL w="0" cap="flat" cmpd="sng" algn="ctr">
+                      <a:noFill/>
+                    </a:lnL>
+                    <a:lnR w="0" cap="flat" cmpd="sng" algn="ctr">
+                      <a:noFill/>
+                    </a:lnR>
+                    <a:lnT w="0" cap="flat" cmpd="sng" algn="ctr">
+                      <a:noFill/>
+                    </a:lnT>
+                    <a:lnB w="6350" cap="flat" cmpd="sng" algn="ctr">
+                      <a:solidFill>
+                        <a:srgbClr val="E6E4DE"/>
+                      </a:solidFill>
+                      <a:prstDash val="solid"/>
+                      <a:round/>
+                      <a:headEnd type="none" w="med" len="med"/>
+                      <a:tailEnd type="none" w="med" len="med"/>
+                    </a:lnB>
+                  </a:tcPr>
+                </a:tc>
+                <a:tc>
+                  <a:txBody>
+                    <a:bodyPr/>
+                    <a:lstStyle/>
+                    <a:p>
+                      <a:pPr indent="0" marL="0">
+                        <a:buNone/>
+                      </a:pPr>
+                      <a:r>
+                        <a:rPr lang="en-US" sz="1000" dirty="0">
+                          <a:solidFill>
+                            <a:srgbClr val="1A1A18"/>
+                          </a:solidFill>
+                          <a:latin typeface="Cambria" pitchFamily="34" charset="0"/>
+                          <a:ea typeface="Cambria" pitchFamily="34" charset="-122"/>
+                          <a:cs typeface="Cambria" pitchFamily="34" charset="-120"/>
+                        </a:rPr>
+                        <a:t>19,9%</a:t>
                       </a:r>
                       <a:endParaRPr lang="en-US" sz="1000" dirty="0">
                         <a:latin typeface="Cambria" charset="0"/>
@@ -31877,101 +32067,101 @@
                           <a:ea typeface="Cambria" pitchFamily="34" charset="-122"/>
                           <a:cs typeface="Cambria" pitchFamily="34" charset="-120"/>
                         </a:rPr>
-                        <a:t>Salvador</a:t>
-                      </a:r>
-                      <a:endParaRPr lang="en-US" sz="1000" dirty="0">
-                        <a:latin typeface="Cambria" charset="0"/>
-                        <a:ea typeface="Cambria" charset="0"/>
-                        <a:cs typeface="Cambria" charset="0"/>
-                      </a:endParaRPr>
-                    </a:p>
-                  </a:txBody>
-                  <a:tcPr marL="91440" marR="91440" marT="45720" marB="45720" anchor="ctr">
-                    <a:lnL w="0" cap="flat" cmpd="sng" algn="ctr">
-                      <a:noFill/>
-                    </a:lnL>
-                    <a:lnR w="0" cap="flat" cmpd="sng" algn="ctr">
-                      <a:noFill/>
-                    </a:lnR>
-                    <a:lnT w="0" cap="flat" cmpd="sng" algn="ctr">
-                      <a:noFill/>
-                    </a:lnT>
-                    <a:lnB w="6350" cap="flat" cmpd="sng" algn="ctr">
-                      <a:solidFill>
-                        <a:srgbClr val="E6E4DE"/>
-                      </a:solidFill>
-                      <a:prstDash val="solid"/>
-                      <a:round/>
-                      <a:headEnd type="none" w="med" len="med"/>
-                      <a:tailEnd type="none" w="med" len="med"/>
-                    </a:lnB>
-                  </a:tcPr>
-                </a:tc>
-                <a:tc>
-                  <a:txBody>
-                    <a:bodyPr/>
-                    <a:lstStyle/>
-                    <a:p>
-                      <a:pPr indent="0" marL="0">
-                        <a:buNone/>
-                      </a:pPr>
-                      <a:r>
-                        <a:rPr lang="en-US" sz="1000" dirty="0">
-                          <a:solidFill>
-                            <a:srgbClr val="1A1A18"/>
-                          </a:solidFill>
-                          <a:latin typeface="Cambria" pitchFamily="34" charset="0"/>
-                          <a:ea typeface="Cambria" pitchFamily="34" charset="-122"/>
-                          <a:cs typeface="Cambria" pitchFamily="34" charset="-120"/>
-                        </a:rPr>
-                        <a:t>3.088</a:t>
-                      </a:r>
-                      <a:endParaRPr lang="en-US" sz="1000" dirty="0">
-                        <a:latin typeface="Cambria" charset="0"/>
-                        <a:ea typeface="Cambria" charset="0"/>
-                        <a:cs typeface="Cambria" charset="0"/>
-                      </a:endParaRPr>
-                    </a:p>
-                  </a:txBody>
-                  <a:tcPr marL="91440" marR="91440" marT="45720" marB="45720" anchor="ctr">
-                    <a:lnL w="0" cap="flat" cmpd="sng" algn="ctr">
-                      <a:noFill/>
-                    </a:lnL>
-                    <a:lnR w="0" cap="flat" cmpd="sng" algn="ctr">
-                      <a:noFill/>
-                    </a:lnR>
-                    <a:lnT w="0" cap="flat" cmpd="sng" algn="ctr">
-                      <a:noFill/>
-                    </a:lnT>
-                    <a:lnB w="6350" cap="flat" cmpd="sng" algn="ctr">
-                      <a:solidFill>
-                        <a:srgbClr val="E6E4DE"/>
-                      </a:solidFill>
-                      <a:prstDash val="solid"/>
-                      <a:round/>
-                      <a:headEnd type="none" w="med" len="med"/>
-                      <a:tailEnd type="none" w="med" len="med"/>
-                    </a:lnB>
-                  </a:tcPr>
-                </a:tc>
-                <a:tc>
-                  <a:txBody>
-                    <a:bodyPr/>
-                    <a:lstStyle/>
-                    <a:p>
-                      <a:pPr indent="0" marL="0">
-                        <a:buNone/>
-                      </a:pPr>
-                      <a:r>
-                        <a:rPr lang="en-US" sz="1000" dirty="0">
-                          <a:solidFill>
-                            <a:srgbClr val="1A1A18"/>
-                          </a:solidFill>
-                          <a:latin typeface="Cambria" pitchFamily="34" charset="0"/>
-                          <a:ea typeface="Cambria" pitchFamily="34" charset="-122"/>
-                          <a:cs typeface="Cambria" pitchFamily="34" charset="-120"/>
-                        </a:rPr>
-                        <a:t>614</a:t>
+                        <a:t>Divinópolis</a:t>
+                      </a:r>
+                      <a:endParaRPr lang="en-US" sz="1000" dirty="0">
+                        <a:latin typeface="Cambria" charset="0"/>
+                        <a:ea typeface="Cambria" charset="0"/>
+                        <a:cs typeface="Cambria" charset="0"/>
+                      </a:endParaRPr>
+                    </a:p>
+                  </a:txBody>
+                  <a:tcPr marL="91440" marR="91440" marT="45720" marB="45720" anchor="ctr">
+                    <a:lnL w="0" cap="flat" cmpd="sng" algn="ctr">
+                      <a:noFill/>
+                    </a:lnL>
+                    <a:lnR w="0" cap="flat" cmpd="sng" algn="ctr">
+                      <a:noFill/>
+                    </a:lnR>
+                    <a:lnT w="0" cap="flat" cmpd="sng" algn="ctr">
+                      <a:noFill/>
+                    </a:lnT>
+                    <a:lnB w="6350" cap="flat" cmpd="sng" algn="ctr">
+                      <a:solidFill>
+                        <a:srgbClr val="E6E4DE"/>
+                      </a:solidFill>
+                      <a:prstDash val="solid"/>
+                      <a:round/>
+                      <a:headEnd type="none" w="med" len="med"/>
+                      <a:tailEnd type="none" w="med" len="med"/>
+                    </a:lnB>
+                  </a:tcPr>
+                </a:tc>
+                <a:tc>
+                  <a:txBody>
+                    <a:bodyPr/>
+                    <a:lstStyle/>
+                    <a:p>
+                      <a:pPr indent="0" marL="0">
+                        <a:buNone/>
+                      </a:pPr>
+                      <a:r>
+                        <a:rPr lang="en-US" sz="1000" dirty="0">
+                          <a:solidFill>
+                            <a:srgbClr val="1A1A18"/>
+                          </a:solidFill>
+                          <a:latin typeface="Cambria" pitchFamily="34" charset="0"/>
+                          <a:ea typeface="Cambria" pitchFamily="34" charset="-122"/>
+                          <a:cs typeface="Cambria" pitchFamily="34" charset="-120"/>
+                        </a:rPr>
+                        <a:t>428</a:t>
+                      </a:r>
+                      <a:endParaRPr lang="en-US" sz="1000" dirty="0">
+                        <a:latin typeface="Cambria" charset="0"/>
+                        <a:ea typeface="Cambria" charset="0"/>
+                        <a:cs typeface="Cambria" charset="0"/>
+                      </a:endParaRPr>
+                    </a:p>
+                  </a:txBody>
+                  <a:tcPr marL="91440" marR="91440" marT="45720" marB="45720" anchor="ctr">
+                    <a:lnL w="0" cap="flat" cmpd="sng" algn="ctr">
+                      <a:noFill/>
+                    </a:lnL>
+                    <a:lnR w="0" cap="flat" cmpd="sng" algn="ctr">
+                      <a:noFill/>
+                    </a:lnR>
+                    <a:lnT w="0" cap="flat" cmpd="sng" algn="ctr">
+                      <a:noFill/>
+                    </a:lnT>
+                    <a:lnB w="6350" cap="flat" cmpd="sng" algn="ctr">
+                      <a:solidFill>
+                        <a:srgbClr val="E6E4DE"/>
+                      </a:solidFill>
+                      <a:prstDash val="solid"/>
+                      <a:round/>
+                      <a:headEnd type="none" w="med" len="med"/>
+                      <a:tailEnd type="none" w="med" len="med"/>
+                    </a:lnB>
+                  </a:tcPr>
+                </a:tc>
+                <a:tc>
+                  <a:txBody>
+                    <a:bodyPr/>
+                    <a:lstStyle/>
+                    <a:p>
+                      <a:pPr indent="0" marL="0">
+                        <a:buNone/>
+                      </a:pPr>
+                      <a:r>
+                        <a:rPr lang="en-US" sz="1000" dirty="0">
+                          <a:solidFill>
+                            <a:srgbClr val="1A1A18"/>
+                          </a:solidFill>
+                          <a:latin typeface="Cambria" pitchFamily="34" charset="0"/>
+                          <a:ea typeface="Cambria" pitchFamily="34" charset="-122"/>
+                          <a:cs typeface="Cambria" pitchFamily="34" charset="-120"/>
+                        </a:rPr>
+                        <a:t>85</a:t>
                       </a:r>
                       <a:endParaRPr lang="en-US" sz="1000" dirty="0">
                         <a:latin typeface="Cambria" charset="0"/>
@@ -32067,148 +32257,148 @@
                           <a:ea typeface="Cambria" pitchFamily="34" charset="-122"/>
                           <a:cs typeface="Cambria" pitchFamily="34" charset="-120"/>
                         </a:rPr>
-                        <a:t>Divinópolis</a:t>
-                      </a:r>
-                      <a:endParaRPr lang="en-US" sz="1000" dirty="0">
-                        <a:latin typeface="Cambria" charset="0"/>
-                        <a:ea typeface="Cambria" charset="0"/>
-                        <a:cs typeface="Cambria" charset="0"/>
-                      </a:endParaRPr>
-                    </a:p>
-                  </a:txBody>
-                  <a:tcPr marL="91440" marR="91440" marT="45720" marB="45720" anchor="ctr">
-                    <a:lnL w="0" cap="flat" cmpd="sng" algn="ctr">
-                      <a:noFill/>
-                    </a:lnL>
-                    <a:lnR w="0" cap="flat" cmpd="sng" algn="ctr">
-                      <a:noFill/>
-                    </a:lnR>
-                    <a:lnT w="0" cap="flat" cmpd="sng" algn="ctr">
-                      <a:noFill/>
-                    </a:lnT>
-                    <a:lnB w="6350" cap="flat" cmpd="sng" algn="ctr">
-                      <a:solidFill>
-                        <a:srgbClr val="E6E4DE"/>
-                      </a:solidFill>
-                      <a:prstDash val="solid"/>
-                      <a:round/>
-                      <a:headEnd type="none" w="med" len="med"/>
-                      <a:tailEnd type="none" w="med" len="med"/>
-                    </a:lnB>
-                  </a:tcPr>
-                </a:tc>
-                <a:tc>
-                  <a:txBody>
-                    <a:bodyPr/>
-                    <a:lstStyle/>
-                    <a:p>
-                      <a:pPr indent="0" marL="0">
-                        <a:buNone/>
-                      </a:pPr>
-                      <a:r>
-                        <a:rPr lang="en-US" sz="1000" dirty="0">
-                          <a:solidFill>
-                            <a:srgbClr val="1A1A18"/>
-                          </a:solidFill>
-                          <a:latin typeface="Cambria" pitchFamily="34" charset="0"/>
-                          <a:ea typeface="Cambria" pitchFamily="34" charset="-122"/>
-                          <a:cs typeface="Cambria" pitchFamily="34" charset="-120"/>
-                        </a:rPr>
-                        <a:t>428</a:t>
-                      </a:r>
-                      <a:endParaRPr lang="en-US" sz="1000" dirty="0">
-                        <a:latin typeface="Cambria" charset="0"/>
-                        <a:ea typeface="Cambria" charset="0"/>
-                        <a:cs typeface="Cambria" charset="0"/>
-                      </a:endParaRPr>
-                    </a:p>
-                  </a:txBody>
-                  <a:tcPr marL="91440" marR="91440" marT="45720" marB="45720" anchor="ctr">
-                    <a:lnL w="0" cap="flat" cmpd="sng" algn="ctr">
-                      <a:noFill/>
-                    </a:lnL>
-                    <a:lnR w="0" cap="flat" cmpd="sng" algn="ctr">
-                      <a:noFill/>
-                    </a:lnR>
-                    <a:lnT w="0" cap="flat" cmpd="sng" algn="ctr">
-                      <a:noFill/>
-                    </a:lnT>
-                    <a:lnB w="6350" cap="flat" cmpd="sng" algn="ctr">
-                      <a:solidFill>
-                        <a:srgbClr val="E6E4DE"/>
-                      </a:solidFill>
-                      <a:prstDash val="solid"/>
-                      <a:round/>
-                      <a:headEnd type="none" w="med" len="med"/>
-                      <a:tailEnd type="none" w="med" len="med"/>
-                    </a:lnB>
-                  </a:tcPr>
-                </a:tc>
-                <a:tc>
-                  <a:txBody>
-                    <a:bodyPr/>
-                    <a:lstStyle/>
-                    <a:p>
-                      <a:pPr indent="0" marL="0">
-                        <a:buNone/>
-                      </a:pPr>
-                      <a:r>
-                        <a:rPr lang="en-US" sz="1000" dirty="0">
-                          <a:solidFill>
-                            <a:srgbClr val="1A1A18"/>
-                          </a:solidFill>
-                          <a:latin typeface="Cambria" pitchFamily="34" charset="0"/>
-                          <a:ea typeface="Cambria" pitchFamily="34" charset="-122"/>
-                          <a:cs typeface="Cambria" pitchFamily="34" charset="-120"/>
-                        </a:rPr>
-                        <a:t>85</a:t>
-                      </a:r>
-                      <a:endParaRPr lang="en-US" sz="1000" dirty="0">
-                        <a:latin typeface="Cambria" charset="0"/>
-                        <a:ea typeface="Cambria" charset="0"/>
-                        <a:cs typeface="Cambria" charset="0"/>
-                      </a:endParaRPr>
-                    </a:p>
-                  </a:txBody>
-                  <a:tcPr marL="91440" marR="91440" marT="45720" marB="45720" anchor="ctr">
-                    <a:lnL w="0" cap="flat" cmpd="sng" algn="ctr">
-                      <a:noFill/>
-                    </a:lnL>
-                    <a:lnR w="0" cap="flat" cmpd="sng" algn="ctr">
-                      <a:noFill/>
-                    </a:lnR>
-                    <a:lnT w="0" cap="flat" cmpd="sng" algn="ctr">
-                      <a:noFill/>
-                    </a:lnT>
-                    <a:lnB w="6350" cap="flat" cmpd="sng" algn="ctr">
-                      <a:solidFill>
-                        <a:srgbClr val="E6E4DE"/>
-                      </a:solidFill>
-                      <a:prstDash val="solid"/>
-                      <a:round/>
-                      <a:headEnd type="none" w="med" len="med"/>
-                      <a:tailEnd type="none" w="med" len="med"/>
-                    </a:lnB>
-                  </a:tcPr>
-                </a:tc>
-                <a:tc>
-                  <a:txBody>
-                    <a:bodyPr/>
-                    <a:lstStyle/>
-                    <a:p>
-                      <a:pPr indent="0" marL="0">
-                        <a:buNone/>
-                      </a:pPr>
-                      <a:r>
-                        <a:rPr lang="en-US" sz="1000" dirty="0">
-                          <a:solidFill>
-                            <a:srgbClr val="1A1A18"/>
-                          </a:solidFill>
-                          <a:latin typeface="Cambria" pitchFamily="34" charset="0"/>
-                          <a:ea typeface="Cambria" pitchFamily="34" charset="-122"/>
-                          <a:cs typeface="Cambria" pitchFamily="34" charset="-120"/>
-                        </a:rPr>
-                        <a:t>19,9%</a:t>
+                        <a:t>Guapiaçu</a:t>
+                      </a:r>
+                      <a:endParaRPr lang="en-US" sz="1000" dirty="0">
+                        <a:latin typeface="Cambria" charset="0"/>
+                        <a:ea typeface="Cambria" charset="0"/>
+                        <a:cs typeface="Cambria" charset="0"/>
+                      </a:endParaRPr>
+                    </a:p>
+                  </a:txBody>
+                  <a:tcPr marL="91440" marR="91440" marT="45720" marB="45720" anchor="ctr">
+                    <a:lnL w="0" cap="flat" cmpd="sng" algn="ctr">
+                      <a:noFill/>
+                    </a:lnL>
+                    <a:lnR w="0" cap="flat" cmpd="sng" algn="ctr">
+                      <a:noFill/>
+                    </a:lnR>
+                    <a:lnT w="0" cap="flat" cmpd="sng" algn="ctr">
+                      <a:noFill/>
+                    </a:lnT>
+                    <a:lnB w="6350" cap="flat" cmpd="sng" algn="ctr">
+                      <a:solidFill>
+                        <a:srgbClr val="E6E4DE"/>
+                      </a:solidFill>
+                      <a:prstDash val="solid"/>
+                      <a:round/>
+                      <a:headEnd type="none" w="med" len="med"/>
+                      <a:tailEnd type="none" w="med" len="med"/>
+                    </a:lnB>
+                  </a:tcPr>
+                </a:tc>
+                <a:tc>
+                  <a:txBody>
+                    <a:bodyPr/>
+                    <a:lstStyle/>
+                    <a:p>
+                      <a:pPr indent="0" marL="0">
+                        <a:buNone/>
+                      </a:pPr>
+                      <a:r>
+                        <a:rPr lang="en-US" sz="1000" dirty="0">
+                          <a:solidFill>
+                            <a:srgbClr val="1A1A18"/>
+                          </a:solidFill>
+                          <a:latin typeface="Cambria" pitchFamily="34" charset="0"/>
+                          <a:ea typeface="Cambria" pitchFamily="34" charset="-122"/>
+                          <a:cs typeface="Cambria" pitchFamily="34" charset="-120"/>
+                        </a:rPr>
+                        <a:t>37</a:t>
+                      </a:r>
+                      <a:endParaRPr lang="en-US" sz="1000" dirty="0">
+                        <a:latin typeface="Cambria" charset="0"/>
+                        <a:ea typeface="Cambria" charset="0"/>
+                        <a:cs typeface="Cambria" charset="0"/>
+                      </a:endParaRPr>
+                    </a:p>
+                  </a:txBody>
+                  <a:tcPr marL="91440" marR="91440" marT="45720" marB="45720" anchor="ctr">
+                    <a:lnL w="0" cap="flat" cmpd="sng" algn="ctr">
+                      <a:noFill/>
+                    </a:lnL>
+                    <a:lnR w="0" cap="flat" cmpd="sng" algn="ctr">
+                      <a:noFill/>
+                    </a:lnR>
+                    <a:lnT w="0" cap="flat" cmpd="sng" algn="ctr">
+                      <a:noFill/>
+                    </a:lnT>
+                    <a:lnB w="6350" cap="flat" cmpd="sng" algn="ctr">
+                      <a:solidFill>
+                        <a:srgbClr val="E6E4DE"/>
+                      </a:solidFill>
+                      <a:prstDash val="solid"/>
+                      <a:round/>
+                      <a:headEnd type="none" w="med" len="med"/>
+                      <a:tailEnd type="none" w="med" len="med"/>
+                    </a:lnB>
+                  </a:tcPr>
+                </a:tc>
+                <a:tc>
+                  <a:txBody>
+                    <a:bodyPr/>
+                    <a:lstStyle/>
+                    <a:p>
+                      <a:pPr indent="0" marL="0">
+                        <a:buNone/>
+                      </a:pPr>
+                      <a:r>
+                        <a:rPr lang="en-US" sz="1000" dirty="0">
+                          <a:solidFill>
+                            <a:srgbClr val="1A1A18"/>
+                          </a:solidFill>
+                          <a:latin typeface="Cambria" pitchFamily="34" charset="0"/>
+                          <a:ea typeface="Cambria" pitchFamily="34" charset="-122"/>
+                          <a:cs typeface="Cambria" pitchFamily="34" charset="-120"/>
+                        </a:rPr>
+                        <a:t>7</a:t>
+                      </a:r>
+                      <a:endParaRPr lang="en-US" sz="1000" dirty="0">
+                        <a:latin typeface="Cambria" charset="0"/>
+                        <a:ea typeface="Cambria" charset="0"/>
+                        <a:cs typeface="Cambria" charset="0"/>
+                      </a:endParaRPr>
+                    </a:p>
+                  </a:txBody>
+                  <a:tcPr marL="91440" marR="91440" marT="45720" marB="45720" anchor="ctr">
+                    <a:lnL w="0" cap="flat" cmpd="sng" algn="ctr">
+                      <a:noFill/>
+                    </a:lnL>
+                    <a:lnR w="0" cap="flat" cmpd="sng" algn="ctr">
+                      <a:noFill/>
+                    </a:lnR>
+                    <a:lnT w="0" cap="flat" cmpd="sng" algn="ctr">
+                      <a:noFill/>
+                    </a:lnT>
+                    <a:lnB w="6350" cap="flat" cmpd="sng" algn="ctr">
+                      <a:solidFill>
+                        <a:srgbClr val="E6E4DE"/>
+                      </a:solidFill>
+                      <a:prstDash val="solid"/>
+                      <a:round/>
+                      <a:headEnd type="none" w="med" len="med"/>
+                      <a:tailEnd type="none" w="med" len="med"/>
+                    </a:lnB>
+                  </a:tcPr>
+                </a:tc>
+                <a:tc>
+                  <a:txBody>
+                    <a:bodyPr/>
+                    <a:lstStyle/>
+                    <a:p>
+                      <a:pPr indent="0" marL="0">
+                        <a:buNone/>
+                      </a:pPr>
+                      <a:r>
+                        <a:rPr lang="en-US" sz="1000" dirty="0">
+                          <a:solidFill>
+                            <a:srgbClr val="1A1A18"/>
+                          </a:solidFill>
+                          <a:latin typeface="Cambria" pitchFamily="34" charset="0"/>
+                          <a:ea typeface="Cambria" pitchFamily="34" charset="-122"/>
+                          <a:cs typeface="Cambria" pitchFamily="34" charset="-120"/>
+                        </a:rPr>
+                        <a:t>18,9%</a:t>
                       </a:r>
                       <a:endParaRPr lang="en-US" sz="1000" dirty="0">
                         <a:latin typeface="Cambria" charset="0"/>
@@ -32257,148 +32447,148 @@
                           <a:ea typeface="Cambria" pitchFamily="34" charset="-122"/>
                           <a:cs typeface="Cambria" pitchFamily="34" charset="-120"/>
                         </a:rPr>
-                        <a:t>Guapiaçu</a:t>
-                      </a:r>
-                      <a:endParaRPr lang="en-US" sz="1000" dirty="0">
-                        <a:latin typeface="Cambria" charset="0"/>
-                        <a:ea typeface="Cambria" charset="0"/>
-                        <a:cs typeface="Cambria" charset="0"/>
-                      </a:endParaRPr>
-                    </a:p>
-                  </a:txBody>
-                  <a:tcPr marL="91440" marR="91440" marT="45720" marB="45720" anchor="ctr">
-                    <a:lnL w="0" cap="flat" cmpd="sng" algn="ctr">
-                      <a:noFill/>
-                    </a:lnL>
-                    <a:lnR w="0" cap="flat" cmpd="sng" algn="ctr">
-                      <a:noFill/>
-                    </a:lnR>
-                    <a:lnT w="0" cap="flat" cmpd="sng" algn="ctr">
-                      <a:noFill/>
-                    </a:lnT>
-                    <a:lnB w="6350" cap="flat" cmpd="sng" algn="ctr">
-                      <a:solidFill>
-                        <a:srgbClr val="E6E4DE"/>
-                      </a:solidFill>
-                      <a:prstDash val="solid"/>
-                      <a:round/>
-                      <a:headEnd type="none" w="med" len="med"/>
-                      <a:tailEnd type="none" w="med" len="med"/>
-                    </a:lnB>
-                  </a:tcPr>
-                </a:tc>
-                <a:tc>
-                  <a:txBody>
-                    <a:bodyPr/>
-                    <a:lstStyle/>
-                    <a:p>
-                      <a:pPr indent="0" marL="0">
-                        <a:buNone/>
-                      </a:pPr>
-                      <a:r>
-                        <a:rPr lang="en-US" sz="1000" dirty="0">
-                          <a:solidFill>
-                            <a:srgbClr val="1A1A18"/>
-                          </a:solidFill>
-                          <a:latin typeface="Cambria" pitchFamily="34" charset="0"/>
-                          <a:ea typeface="Cambria" pitchFamily="34" charset="-122"/>
-                          <a:cs typeface="Cambria" pitchFamily="34" charset="-120"/>
-                        </a:rPr>
-                        <a:t>37</a:t>
-                      </a:r>
-                      <a:endParaRPr lang="en-US" sz="1000" dirty="0">
-                        <a:latin typeface="Cambria" charset="0"/>
-                        <a:ea typeface="Cambria" charset="0"/>
-                        <a:cs typeface="Cambria" charset="0"/>
-                      </a:endParaRPr>
-                    </a:p>
-                  </a:txBody>
-                  <a:tcPr marL="91440" marR="91440" marT="45720" marB="45720" anchor="ctr">
-                    <a:lnL w="0" cap="flat" cmpd="sng" algn="ctr">
-                      <a:noFill/>
-                    </a:lnL>
-                    <a:lnR w="0" cap="flat" cmpd="sng" algn="ctr">
-                      <a:noFill/>
-                    </a:lnR>
-                    <a:lnT w="0" cap="flat" cmpd="sng" algn="ctr">
-                      <a:noFill/>
-                    </a:lnT>
-                    <a:lnB w="6350" cap="flat" cmpd="sng" algn="ctr">
-                      <a:solidFill>
-                        <a:srgbClr val="E6E4DE"/>
-                      </a:solidFill>
-                      <a:prstDash val="solid"/>
-                      <a:round/>
-                      <a:headEnd type="none" w="med" len="med"/>
-                      <a:tailEnd type="none" w="med" len="med"/>
-                    </a:lnB>
-                  </a:tcPr>
-                </a:tc>
-                <a:tc>
-                  <a:txBody>
-                    <a:bodyPr/>
-                    <a:lstStyle/>
-                    <a:p>
-                      <a:pPr indent="0" marL="0">
-                        <a:buNone/>
-                      </a:pPr>
-                      <a:r>
-                        <a:rPr lang="en-US" sz="1000" dirty="0">
-                          <a:solidFill>
-                            <a:srgbClr val="1A1A18"/>
-                          </a:solidFill>
-                          <a:latin typeface="Cambria" pitchFamily="34" charset="0"/>
-                          <a:ea typeface="Cambria" pitchFamily="34" charset="-122"/>
-                          <a:cs typeface="Cambria" pitchFamily="34" charset="-120"/>
-                        </a:rPr>
-                        <a:t>7</a:t>
-                      </a:r>
-                      <a:endParaRPr lang="en-US" sz="1000" dirty="0">
-                        <a:latin typeface="Cambria" charset="0"/>
-                        <a:ea typeface="Cambria" charset="0"/>
-                        <a:cs typeface="Cambria" charset="0"/>
-                      </a:endParaRPr>
-                    </a:p>
-                  </a:txBody>
-                  <a:tcPr marL="91440" marR="91440" marT="45720" marB="45720" anchor="ctr">
-                    <a:lnL w="0" cap="flat" cmpd="sng" algn="ctr">
-                      <a:noFill/>
-                    </a:lnL>
-                    <a:lnR w="0" cap="flat" cmpd="sng" algn="ctr">
-                      <a:noFill/>
-                    </a:lnR>
-                    <a:lnT w="0" cap="flat" cmpd="sng" algn="ctr">
-                      <a:noFill/>
-                    </a:lnT>
-                    <a:lnB w="6350" cap="flat" cmpd="sng" algn="ctr">
-                      <a:solidFill>
-                        <a:srgbClr val="E6E4DE"/>
-                      </a:solidFill>
-                      <a:prstDash val="solid"/>
-                      <a:round/>
-                      <a:headEnd type="none" w="med" len="med"/>
-                      <a:tailEnd type="none" w="med" len="med"/>
-                    </a:lnB>
-                  </a:tcPr>
-                </a:tc>
-                <a:tc>
-                  <a:txBody>
-                    <a:bodyPr/>
-                    <a:lstStyle/>
-                    <a:p>
-                      <a:pPr indent="0" marL="0">
-                        <a:buNone/>
-                      </a:pPr>
-                      <a:r>
-                        <a:rPr lang="en-US" sz="1000" dirty="0">
-                          <a:solidFill>
-                            <a:srgbClr val="1A1A18"/>
-                          </a:solidFill>
-                          <a:latin typeface="Cambria" pitchFamily="34" charset="0"/>
-                          <a:ea typeface="Cambria" pitchFamily="34" charset="-122"/>
-                          <a:cs typeface="Cambria" pitchFamily="34" charset="-120"/>
-                        </a:rPr>
-                        <a:t>18,9%</a:t>
+                        <a:t>Pato Branco</a:t>
+                      </a:r>
+                      <a:endParaRPr lang="en-US" sz="1000" dirty="0">
+                        <a:latin typeface="Cambria" charset="0"/>
+                        <a:ea typeface="Cambria" charset="0"/>
+                        <a:cs typeface="Cambria" charset="0"/>
+                      </a:endParaRPr>
+                    </a:p>
+                  </a:txBody>
+                  <a:tcPr marL="91440" marR="91440" marT="45720" marB="45720" anchor="ctr">
+                    <a:lnL w="0" cap="flat" cmpd="sng" algn="ctr">
+                      <a:noFill/>
+                    </a:lnL>
+                    <a:lnR w="0" cap="flat" cmpd="sng" algn="ctr">
+                      <a:noFill/>
+                    </a:lnR>
+                    <a:lnT w="0" cap="flat" cmpd="sng" algn="ctr">
+                      <a:noFill/>
+                    </a:lnT>
+                    <a:lnB w="6350" cap="flat" cmpd="sng" algn="ctr">
+                      <a:solidFill>
+                        <a:srgbClr val="E6E4DE"/>
+                      </a:solidFill>
+                      <a:prstDash val="solid"/>
+                      <a:round/>
+                      <a:headEnd type="none" w="med" len="med"/>
+                      <a:tailEnd type="none" w="med" len="med"/>
+                    </a:lnB>
+                  </a:tcPr>
+                </a:tc>
+                <a:tc>
+                  <a:txBody>
+                    <a:bodyPr/>
+                    <a:lstStyle/>
+                    <a:p>
+                      <a:pPr indent="0" marL="0">
+                        <a:buNone/>
+                      </a:pPr>
+                      <a:r>
+                        <a:rPr lang="en-US" sz="1000" dirty="0">
+                          <a:solidFill>
+                            <a:srgbClr val="1A1A18"/>
+                          </a:solidFill>
+                          <a:latin typeface="Cambria" pitchFamily="34" charset="0"/>
+                          <a:ea typeface="Cambria" pitchFamily="34" charset="-122"/>
+                          <a:cs typeface="Cambria" pitchFamily="34" charset="-120"/>
+                        </a:rPr>
+                        <a:t>112</a:t>
+                      </a:r>
+                      <a:endParaRPr lang="en-US" sz="1000" dirty="0">
+                        <a:latin typeface="Cambria" charset="0"/>
+                        <a:ea typeface="Cambria" charset="0"/>
+                        <a:cs typeface="Cambria" charset="0"/>
+                      </a:endParaRPr>
+                    </a:p>
+                  </a:txBody>
+                  <a:tcPr marL="91440" marR="91440" marT="45720" marB="45720" anchor="ctr">
+                    <a:lnL w="0" cap="flat" cmpd="sng" algn="ctr">
+                      <a:noFill/>
+                    </a:lnL>
+                    <a:lnR w="0" cap="flat" cmpd="sng" algn="ctr">
+                      <a:noFill/>
+                    </a:lnR>
+                    <a:lnT w="0" cap="flat" cmpd="sng" algn="ctr">
+                      <a:noFill/>
+                    </a:lnT>
+                    <a:lnB w="6350" cap="flat" cmpd="sng" algn="ctr">
+                      <a:solidFill>
+                        <a:srgbClr val="E6E4DE"/>
+                      </a:solidFill>
+                      <a:prstDash val="solid"/>
+                      <a:round/>
+                      <a:headEnd type="none" w="med" len="med"/>
+                      <a:tailEnd type="none" w="med" len="med"/>
+                    </a:lnB>
+                  </a:tcPr>
+                </a:tc>
+                <a:tc>
+                  <a:txBody>
+                    <a:bodyPr/>
+                    <a:lstStyle/>
+                    <a:p>
+                      <a:pPr indent="0" marL="0">
+                        <a:buNone/>
+                      </a:pPr>
+                      <a:r>
+                        <a:rPr lang="en-US" sz="1000" dirty="0">
+                          <a:solidFill>
+                            <a:srgbClr val="1A1A18"/>
+                          </a:solidFill>
+                          <a:latin typeface="Cambria" pitchFamily="34" charset="0"/>
+                          <a:ea typeface="Cambria" pitchFamily="34" charset="-122"/>
+                          <a:cs typeface="Cambria" pitchFamily="34" charset="-120"/>
+                        </a:rPr>
+                        <a:t>21</a:t>
+                      </a:r>
+                      <a:endParaRPr lang="en-US" sz="1000" dirty="0">
+                        <a:latin typeface="Cambria" charset="0"/>
+                        <a:ea typeface="Cambria" charset="0"/>
+                        <a:cs typeface="Cambria" charset="0"/>
+                      </a:endParaRPr>
+                    </a:p>
+                  </a:txBody>
+                  <a:tcPr marL="91440" marR="91440" marT="45720" marB="45720" anchor="ctr">
+                    <a:lnL w="0" cap="flat" cmpd="sng" algn="ctr">
+                      <a:noFill/>
+                    </a:lnL>
+                    <a:lnR w="0" cap="flat" cmpd="sng" algn="ctr">
+                      <a:noFill/>
+                    </a:lnR>
+                    <a:lnT w="0" cap="flat" cmpd="sng" algn="ctr">
+                      <a:noFill/>
+                    </a:lnT>
+                    <a:lnB w="6350" cap="flat" cmpd="sng" algn="ctr">
+                      <a:solidFill>
+                        <a:srgbClr val="E6E4DE"/>
+                      </a:solidFill>
+                      <a:prstDash val="solid"/>
+                      <a:round/>
+                      <a:headEnd type="none" w="med" len="med"/>
+                      <a:tailEnd type="none" w="med" len="med"/>
+                    </a:lnB>
+                  </a:tcPr>
+                </a:tc>
+                <a:tc>
+                  <a:txBody>
+                    <a:bodyPr/>
+                    <a:lstStyle/>
+                    <a:p>
+                      <a:pPr indent="0" marL="0">
+                        <a:buNone/>
+                      </a:pPr>
+                      <a:r>
+                        <a:rPr lang="en-US" sz="1000" dirty="0">
+                          <a:solidFill>
+                            <a:srgbClr val="1A1A18"/>
+                          </a:solidFill>
+                          <a:latin typeface="Cambria" pitchFamily="34" charset="0"/>
+                          <a:ea typeface="Cambria" pitchFamily="34" charset="-122"/>
+                          <a:cs typeface="Cambria" pitchFamily="34" charset="-120"/>
+                        </a:rPr>
+                        <a:t>18,8%</a:t>
                       </a:r>
                       <a:endParaRPr lang="en-US" sz="1000" dirty="0">
                         <a:latin typeface="Cambria" charset="0"/>
@@ -32447,7 +32637,7 @@
                           <a:ea typeface="Cambria" pitchFamily="34" charset="-122"/>
                           <a:cs typeface="Cambria" pitchFamily="34" charset="-120"/>
                         </a:rPr>
-                        <a:t>Pato Branco</a:t>
+                        <a:t>São Bernardo do Campo</a:t>
                       </a:r>
                       <a:endParaRPr lang="en-US" sz="1000" dirty="0">
                         <a:latin typeface="Cambria" charset="0"/>
@@ -32494,7 +32684,7 @@
                           <a:ea typeface="Cambria" pitchFamily="34" charset="-122"/>
                           <a:cs typeface="Cambria" pitchFamily="34" charset="-120"/>
                         </a:rPr>
-                        <a:t>112</a:t>
+                        <a:t>1.280</a:t>
                       </a:r>
                       <a:endParaRPr lang="en-US" sz="1000" dirty="0">
                         <a:latin typeface="Cambria" charset="0"/>
@@ -32541,7 +32731,7 @@
                           <a:ea typeface="Cambria" pitchFamily="34" charset="-122"/>
                           <a:cs typeface="Cambria" pitchFamily="34" charset="-120"/>
                         </a:rPr>
-                        <a:t>21</a:t>
+                        <a:t>237</a:t>
                       </a:r>
                       <a:endParaRPr lang="en-US" sz="1000" dirty="0">
                         <a:latin typeface="Cambria" charset="0"/>
@@ -32588,7 +32778,7 @@
                           <a:ea typeface="Cambria" pitchFamily="34" charset="-122"/>
                           <a:cs typeface="Cambria" pitchFamily="34" charset="-120"/>
                         </a:rPr>
-                        <a:t>18,8%</a:t>
+                        <a:t>18,5%</a:t>
                       </a:r>
                       <a:endParaRPr lang="en-US" sz="1000" dirty="0">
                         <a:latin typeface="Cambria" charset="0"/>
@@ -32753,7 +32943,7 @@
         <p:spPr>
           <a:xfrm>
             <a:off x="8549640" y="2839974"/>
-            <a:ext cx="2862072" cy="1066800"/>
+            <a:ext cx="2862072" cy="857250"/>
           </a:xfrm>
           <a:prstGeom prst="rect">
             <a:avLst/>
@@ -32797,7 +32987,7 @@
                 <a:ea typeface="Cambria" pitchFamily="34" charset="-122"/>
                 <a:cs typeface="Cambria" pitchFamily="34" charset="-120"/>
               </a:rPr>
-              <a:t>No total, 17,1% dos setores mudam de faixa; o município mais afetado é São Raimundo do Doca Bezerra (100,0%).</a:t>
+              <a:t>No total, 17,1% dos setores mudam de faixa; o município mais afetado é Água Preta (27,8%).</a:t>
             </a:r>
             <a:endParaRPr lang="en-US" sz="1250" dirty="0"/>
           </a:p>
@@ -33328,8 +33518,8 @@
         </p:blipFill>
         <p:spPr>
           <a:xfrm>
-            <a:off x="1273489" y="1243584"/>
-            <a:ext cx="6459863" cy="4791456"/>
+            <a:off x="1419474" y="1243584"/>
+            <a:ext cx="6167892" cy="4791456"/>
           </a:xfrm>
           <a:prstGeom prst="rect">
             <a:avLst/>
@@ -33427,7 +33617,7 @@
         <p:spPr>
           <a:xfrm>
             <a:off x="8549640" y="2420874"/>
-            <a:ext cx="2862072" cy="857250"/>
+            <a:ext cx="2862072" cy="647700"/>
           </a:xfrm>
           <a:prstGeom prst="rect">
             <a:avLst/>
@@ -33471,7 +33661,7 @@
                 <a:ea typeface="Cambria" pitchFamily="34" charset="-122"/>
                 <a:cs typeface="Cambria" pitchFamily="34" charset="-120"/>
               </a:rPr>
-              <a:t>O mais afetado é São Raimundo do Doca Bezerra (100,0%); no total, 17,1%.</a:t>
+              <a:t>O mais afetado é Água Preta (27,8%); no total, 17,1%.</a:t>
             </a:r>
             <a:endParaRPr lang="en-US" sz="1250" dirty="0"/>
           </a:p>
@@ -35507,7 +35697,7 @@
                           <a:ea typeface="Cambria" pitchFamily="34" charset="-122"/>
                           <a:cs typeface="Cambria" pitchFamily="34" charset="-120"/>
                         </a:rPr>
-                        <a:t>O índice tem mediana 0,3037 e P90 0,4007, em 73.879 setores</a:t>
+                        <a:t>O índice tem mediana 0,3037 e P90 0,4007, em 73.878 setores</a:t>
                       </a:r>
                       <a:endParaRPr lang="en-US" sz="950" dirty="0">
                         <a:latin typeface="Cambria" charset="0"/>
@@ -40716,7 +40906,7 @@
                 <a:ea typeface="Cambria" pitchFamily="34" charset="-122"/>
                 <a:cs typeface="Cambria" pitchFamily="34" charset="-120"/>
               </a:rPr>
-              <a:t>KMO 0,7155, com 73.879 setores; Kaiser retém 2 fatores e Horn, 2; dois fatores explicam 60,0% da variância.</a:t>
+              <a:t>KMO 0,7155, com 73.879 setores; Kaiser retém 2 fatores e Horn, 2; 2 fatores explicam 60,0% da variância.</a:t>
             </a:r>
             <a:endParaRPr lang="en-US" sz="1250" dirty="0"/>
           </a:p>
